--- a/static/ppts/G6_Sci_T2_Changes_of_State.pptx
+++ b/static/ppts/G6_Sci_T2_Changes_of_State.pptx
@@ -9,11 +9,9 @@
     <p:sldId id="257" r:id="rId3"/>
     <p:sldId id="258" r:id="rId4"/>
     <p:sldId id="259" r:id="rId5"/>
-    <p:sldId id="260" r:id="rId6"/>
-    <p:sldId id="261" r:id="rId7"/>
   </p:sldIdLst>
   <p:notesMasterIdLst>
-    <p:notesMasterId r:id="rId8"/>
+    <p:notesMasterId r:id="rId6"/>
   </p:notesMasterIdLst>
   <p:sldSz cx="9144000" cy="5143500"/>
   <p:notesSz cx="5143500" cy="9144000"/>
@@ -813,182 +811,6 @@
 </p:notes>
 </file>
 
-<file path=ppt/notesSlides/notesSlide5.xml><?xml version="1.0" encoding="utf-8"?>
-<p:notes xmlns:a="http://schemas.openxmlformats.org/drawingml/2006/main" xmlns:r="http://schemas.openxmlformats.org/officeDocument/2006/relationships" xmlns:p="http://schemas.openxmlformats.org/presentationml/2006/main">
-  <p:cSld>
-    <p:spTree>
-      <p:nvGrpSpPr>
-        <p:cNvPr id="1" name=""/>
-        <p:cNvGrpSpPr/>
-        <p:nvPr/>
-      </p:nvGrpSpPr>
-      <p:grpSpPr>
-        <a:xfrm>
-          <a:off x="0" y="0"/>
-          <a:ext cx="0" cy="0"/>
-          <a:chOff x="0" y="0"/>
-          <a:chExt cx="0" cy="0"/>
-        </a:xfrm>
-      </p:grpSpPr>
-      <p:sp>
-        <p:nvSpPr>
-          <p:cNvPr id="2" name="Slide Image Placeholder 1"/>
-          <p:cNvSpPr>
-            <a:spLocks noGrp="1" noRot="1" noChangeAspect="1"/>
-          </p:cNvSpPr>
-          <p:nvPr>
-            <p:ph type="sldImg"/>
-          </p:nvPr>
-        </p:nvSpPr>
-        <p:spPr/>
-      </p:sp>
-      <p:sp>
-        <p:nvSpPr>
-          <p:cNvPr id="3" name="Notes Placeholder 2"/>
-          <p:cNvSpPr>
-            <a:spLocks noGrp="1"/>
-          </p:cNvSpPr>
-          <p:nvPr>
-            <p:ph type="body" idx="1"/>
-          </p:nvPr>
-        </p:nvSpPr>
-        <p:spPr/>
-        <p:txBody>
-          <a:bodyPr/>
-          <a:lstStyle/>
-          <a:p>
-            <a:r>
-              <a:rPr lang="en-US" dirty="0"/>
-              <a:t/>
-            </a:r>
-            <a:endParaRPr lang="en-US" dirty="0"/>
-          </a:p>
-        </p:txBody>
-      </p:sp>
-      <p:sp>
-        <p:nvSpPr>
-          <p:cNvPr id="4" name="Slide Number Placeholder 3"/>
-          <p:cNvSpPr>
-            <a:spLocks noGrp="1"/>
-          </p:cNvSpPr>
-          <p:nvPr>
-            <p:ph type="sldNum" sz="quarter" idx="10"/>
-          </p:nvPr>
-        </p:nvSpPr>
-        <p:spPr/>
-        <p:txBody>
-          <a:bodyPr/>
-          <a:lstStyle/>
-          <a:p>
-            <a:fld id="{F7021451-1387-4CA6-816F-3879F97B5CBC}" type="slidenum">
-              <a:rPr lang="en-US"/>
-              <a:t>5</a:t>
-            </a:fld>
-            <a:endParaRPr lang="en-US"/>
-          </a:p>
-        </p:txBody>
-      </p:sp>
-    </p:spTree>
-    <p:extLst>
-      <p:ext uri="{BB962C8B-B14F-4D97-AF65-F5344CB8AC3E}">
-        <p14:creationId xmlns:p14="http://schemas.microsoft.com/office/powerpoint/2010/main" val="1024086991"/>
-      </p:ext>
-    </p:extLst>
-  </p:cSld>
-  <p:clrMapOvr>
-    <a:masterClrMapping/>
-  </p:clrMapOvr>
-</p:notes>
-</file>
-
-<file path=ppt/notesSlides/notesSlide6.xml><?xml version="1.0" encoding="utf-8"?>
-<p:notes xmlns:a="http://schemas.openxmlformats.org/drawingml/2006/main" xmlns:r="http://schemas.openxmlformats.org/officeDocument/2006/relationships" xmlns:p="http://schemas.openxmlformats.org/presentationml/2006/main">
-  <p:cSld>
-    <p:spTree>
-      <p:nvGrpSpPr>
-        <p:cNvPr id="1" name=""/>
-        <p:cNvGrpSpPr/>
-        <p:nvPr/>
-      </p:nvGrpSpPr>
-      <p:grpSpPr>
-        <a:xfrm>
-          <a:off x="0" y="0"/>
-          <a:ext cx="0" cy="0"/>
-          <a:chOff x="0" y="0"/>
-          <a:chExt cx="0" cy="0"/>
-        </a:xfrm>
-      </p:grpSpPr>
-      <p:sp>
-        <p:nvSpPr>
-          <p:cNvPr id="2" name="Slide Image Placeholder 1"/>
-          <p:cNvSpPr>
-            <a:spLocks noGrp="1" noRot="1" noChangeAspect="1"/>
-          </p:cNvSpPr>
-          <p:nvPr>
-            <p:ph type="sldImg"/>
-          </p:nvPr>
-        </p:nvSpPr>
-        <p:spPr/>
-      </p:sp>
-      <p:sp>
-        <p:nvSpPr>
-          <p:cNvPr id="3" name="Notes Placeholder 2"/>
-          <p:cNvSpPr>
-            <a:spLocks noGrp="1"/>
-          </p:cNvSpPr>
-          <p:nvPr>
-            <p:ph type="body" idx="1"/>
-          </p:nvPr>
-        </p:nvSpPr>
-        <p:spPr/>
-        <p:txBody>
-          <a:bodyPr/>
-          <a:lstStyle/>
-          <a:p>
-            <a:r>
-              <a:rPr lang="en-US" dirty="0"/>
-              <a:t/>
-            </a:r>
-            <a:endParaRPr lang="en-US" dirty="0"/>
-          </a:p>
-        </p:txBody>
-      </p:sp>
-      <p:sp>
-        <p:nvSpPr>
-          <p:cNvPr id="4" name="Slide Number Placeholder 3"/>
-          <p:cNvSpPr>
-            <a:spLocks noGrp="1"/>
-          </p:cNvSpPr>
-          <p:nvPr>
-            <p:ph type="sldNum" sz="quarter" idx="10"/>
-          </p:nvPr>
-        </p:nvSpPr>
-        <p:spPr/>
-        <p:txBody>
-          <a:bodyPr/>
-          <a:lstStyle/>
-          <a:p>
-            <a:fld id="{F7021451-1387-4CA6-816F-3879F97B5CBC}" type="slidenum">
-              <a:rPr lang="en-US"/>
-              <a:t>6</a:t>
-            </a:fld>
-            <a:endParaRPr lang="en-US"/>
-          </a:p>
-        </p:txBody>
-      </p:sp>
-    </p:spTree>
-    <p:extLst>
-      <p:ext uri="{BB962C8B-B14F-4D97-AF65-F5344CB8AC3E}">
-        <p14:creationId xmlns:p14="http://schemas.microsoft.com/office/powerpoint/2010/main" val="1024086991"/>
-      </p:ext>
-    </p:extLst>
-  </p:cSld>
-  <p:clrMapOvr>
-    <a:masterClrMapping/>
-  </p:clrMapOvr>
-</p:notes>
-</file>
-
 <file path=ppt/slideLayouts/slideLayout1.xml><?xml version="1.0" encoding="utf-8"?>
 <p:sldLayout xmlns:a="http://schemas.openxmlformats.org/drawingml/2006/main" xmlns:r="http://schemas.openxmlformats.org/officeDocument/2006/relationships" xmlns:p="http://schemas.openxmlformats.org/presentationml/2006/main" preserve="1">
   <p:cSld name="DEFAULT">
@@ -1302,7 +1124,7 @@
     <p:bg>
       <p:bgPr>
         <a:solidFill>
-          <a:srgbClr val="7C3AED"/>
+          <a:srgbClr val="1B2A4A"/>
         </a:solidFill>
       </p:bgPr>
     </p:bg>
@@ -1322,14 +1144,34 @@
       </p:grpSpPr>
       <p:sp>
         <p:nvSpPr>
-          <p:cNvPr id="2" name="Text 0"/>
+          <p:cNvPr id="2" name="Shape 0"/>
           <p:cNvSpPr/>
           <p:nvPr/>
         </p:nvSpPr>
         <p:spPr>
           <a:xfrm>
-            <a:off x="731520" y="1371600"/>
-            <a:ext cx="7680960" cy="1371600"/>
+            <a:off x="0" y="0"/>
+            <a:ext cx="109728" cy="5143500"/>
+          </a:xfrm>
+          <a:prstGeom prst="rect">
+            <a:avLst/>
+          </a:prstGeom>
+          <a:solidFill>
+            <a:srgbClr val="2A9D8F"/>
+          </a:solidFill>
+          <a:ln/>
+        </p:spPr>
+      </p:sp>
+      <p:sp>
+        <p:nvSpPr>
+          <p:cNvPr id="3" name="Text 1"/>
+          <p:cNvSpPr/>
+          <p:nvPr/>
+        </p:nvSpPr>
+        <p:spPr>
+          <a:xfrm>
+            <a:off x="731520" y="1280160"/>
+            <a:ext cx="7772400" cy="1371600"/>
           </a:xfrm>
           <a:prstGeom prst="rect">
             <a:avLst/>
@@ -1345,30 +1187,69 @@
               <a:buNone/>
             </a:pPr>
             <a:r>
-              <a:rPr lang="en-US" sz="4000" b="1" dirty="0">
+              <a:rPr lang="en-US" sz="3600" b="1" dirty="0">
                 <a:solidFill>
                   <a:srgbClr val="FFFFFF"/>
+                </a:solidFill>
+                <a:latin typeface="Georgia" pitchFamily="34" charset="0"/>
+                <a:ea typeface="Georgia" pitchFamily="34" charset="-122"/>
+                <a:cs typeface="Georgia" pitchFamily="34" charset="-120"/>
+              </a:rPr>
+              <a:t>Changes of State</a:t>
+            </a:r>
+            <a:endParaRPr lang="en-US" sz="3600" dirty="0"/>
+          </a:p>
+        </p:txBody>
+      </p:sp>
+      <p:sp>
+        <p:nvSpPr>
+          <p:cNvPr id="4" name="Text 2"/>
+          <p:cNvSpPr/>
+          <p:nvPr/>
+        </p:nvSpPr>
+        <p:spPr>
+          <a:xfrm>
+            <a:off x="731520" y="2743200"/>
+            <a:ext cx="7772400" cy="548640"/>
+          </a:xfrm>
+          <a:prstGeom prst="rect">
+            <a:avLst/>
+          </a:prstGeom>
+          <a:noFill/>
+          <a:ln/>
+        </p:spPr>
+        <p:txBody>
+          <a:bodyPr wrap="square" rtlCol="0" anchor="ctr"/>
+          <a:lstStyle/>
+          <a:p>
+            <a:pPr indent="0" marL="0">
+              <a:buNone/>
+            </a:pPr>
+            <a:r>
+              <a:rPr lang="en-US" sz="1600" dirty="0">
+                <a:solidFill>
+                  <a:srgbClr val="9B9690"/>
                 </a:solidFill>
                 <a:latin typeface="Calibri" pitchFamily="34" charset="0"/>
                 <a:ea typeface="Calibri" pitchFamily="34" charset="-122"/>
                 <a:cs typeface="Calibri" pitchFamily="34" charset="-120"/>
               </a:rPr>
-              <a:t>Changes of State</a:t>
-            </a:r>
-            <a:endParaRPr lang="en-US" sz="4000" dirty="0"/>
-          </a:p>
-        </p:txBody>
-      </p:sp>
-      <p:sp>
-        <p:nvSpPr>
-          <p:cNvPr id="3" name="Text 1"/>
+              <a:t>G6 Science · Chemistry</a:t>
+            </a:r>
+            <a:endParaRPr lang="en-US" sz="1600" dirty="0"/>
+          </a:p>
+        </p:txBody>
+      </p:sp>
+      <p:sp>
+        <p:nvSpPr>
+          <p:cNvPr id="5" name="Text 3"/>
           <p:cNvSpPr/>
           <p:nvPr/>
         </p:nvSpPr>
         <p:spPr>
           <a:xfrm>
-            <a:off x="731520" y="2926080"/>
-            <a:ext cx="7680960" cy="548640"/>
+            <a:off x="731520" y="4389120"/>
+            <a:ext cx="7772400" cy="457200"/>
           </a:xfrm>
           <a:prstGeom prst="rect">
             <a:avLst/>
@@ -1384,17 +1265,17 @@
               <a:buNone/>
             </a:pPr>
             <a:r>
-              <a:rPr lang="en-US" sz="1600" i="1" dirty="0">
-                <a:solidFill>
-                  <a:srgbClr val="FFFFFF"/>
+              <a:rPr lang="en-US" sz="1000" dirty="0">
+                <a:solidFill>
+                  <a:srgbClr val="6B6660"/>
                 </a:solidFill>
                 <a:latin typeface="Calibri" pitchFamily="34" charset="0"/>
                 <a:ea typeface="Calibri" pitchFamily="34" charset="-122"/>
                 <a:cs typeface="Calibri" pitchFamily="34" charset="-120"/>
               </a:rPr>
-              <a:t>Grade 6 Science · Mr Zocchi</a:t>
-            </a:r>
-            <a:endParaRPr lang="en-US" sz="1600" dirty="0"/>
+              <a:t>Mr Zocchi · mrzocchi.com</a:t>
+            </a:r>
+            <a:endParaRPr lang="en-US" sz="1000" dirty="0"/>
           </a:p>
         </p:txBody>
       </p:sp>
@@ -1409,6 +1290,13 @@
 <file path=ppt/slides/slide2.xml><?xml version="1.0" encoding="utf-8"?>
 <p:sld xmlns:a="http://schemas.openxmlformats.org/drawingml/2006/main" xmlns:r="http://schemas.openxmlformats.org/officeDocument/2006/relationships" xmlns:p="http://schemas.openxmlformats.org/presentationml/2006/main">
   <p:cSld name="Slide 2">
+    <p:bg>
+      <p:bgPr>
+        <a:solidFill>
+          <a:srgbClr val="FFFFFF"/>
+        </a:solidFill>
+      </p:bgPr>
+    </p:bg>
     <p:spTree>
       <p:nvGrpSpPr>
         <p:cNvPr id="1" name=""/>
@@ -1432,13 +1320,13 @@
         <p:spPr>
           <a:xfrm>
             <a:off x="0" y="0"/>
-            <a:ext cx="9144000" cy="548640"/>
-          </a:xfrm>
-          <a:prstGeom prst="rect">
-            <a:avLst/>
-          </a:prstGeom>
-          <a:solidFill>
-            <a:srgbClr val="7C3AED"/>
+            <a:ext cx="9144000" cy="54864"/>
+          </a:xfrm>
+          <a:prstGeom prst="rect">
+            <a:avLst/>
+          </a:prstGeom>
+          <a:solidFill>
+            <a:srgbClr val="2A9D8F"/>
           </a:solidFill>
           <a:ln/>
         </p:spPr>
@@ -1451,8 +1339,8 @@
         </p:nvSpPr>
         <p:spPr>
           <a:xfrm>
-            <a:off x="457200" y="45720"/>
-            <a:ext cx="8229600" cy="457200"/>
+            <a:off x="548640" y="274320"/>
+            <a:ext cx="8046720" cy="640080"/>
           </a:xfrm>
           <a:prstGeom prst="rect">
             <a:avLst/>
@@ -1461,125 +1349,228 @@
           <a:ln/>
         </p:spPr>
         <p:txBody>
-          <a:bodyPr wrap="square" rtlCol="0" anchor="ctr"/>
+          <a:bodyPr wrap="square" lIns="0" tIns="0" rIns="0" bIns="0" rtlCol="0" anchor="ctr"/>
           <a:lstStyle/>
           <a:p>
             <a:pPr indent="0" marL="0">
               <a:buNone/>
             </a:pPr>
             <a:r>
-              <a:rPr lang="en-US" sz="1800" b="1" dirty="0">
-                <a:solidFill>
-                  <a:srgbClr val="FFFFFF"/>
+              <a:rPr lang="en-US" sz="2600" b="1" dirty="0">
+                <a:solidFill>
+                  <a:srgbClr val="1B2A4A"/>
+                </a:solidFill>
+                <a:latin typeface="Georgia" pitchFamily="34" charset="0"/>
+                <a:ea typeface="Georgia" pitchFamily="34" charset="-122"/>
+                <a:cs typeface="Georgia" pitchFamily="34" charset="-120"/>
+              </a:rPr>
+              <a:t>How States Change</a:t>
+            </a:r>
+            <a:endParaRPr lang="en-US" sz="2600" dirty="0"/>
+          </a:p>
+        </p:txBody>
+      </p:sp>
+      <p:sp>
+        <p:nvSpPr>
+          <p:cNvPr id="4" name="Text 2"/>
+          <p:cNvSpPr/>
+          <p:nvPr/>
+        </p:nvSpPr>
+        <p:spPr>
+          <a:xfrm>
+            <a:off x="548640" y="1097280"/>
+            <a:ext cx="8046720" cy="3474720"/>
+          </a:xfrm>
+          <a:prstGeom prst="rect">
+            <a:avLst/>
+          </a:prstGeom>
+          <a:noFill/>
+          <a:ln/>
+        </p:spPr>
+        <p:txBody>
+          <a:bodyPr wrap="square" rtlCol="0" anchor="t"/>
+          <a:lstStyle/>
+          <a:p>
+            <a:pPr marL="342900" indent="-342900">
+              <a:spcAft>
+                <a:spcPts val="800"/>
+              </a:spcAft>
+              <a:buSzPct val="100000"/>
+              <a:buChar char="•"/>
+            </a:pPr>
+            <a:r>
+              <a:rPr lang="en-US" sz="1500" dirty="0">
+                <a:solidFill>
+                  <a:srgbClr val="3D3A36"/>
                 </a:solidFill>
                 <a:latin typeface="Calibri" pitchFamily="34" charset="0"/>
                 <a:ea typeface="Calibri" pitchFamily="34" charset="-122"/>
                 <a:cs typeface="Calibri" pitchFamily="34" charset="-120"/>
               </a:rPr>
-              <a:t>Melting &amp; freezing</a:t>
-            </a:r>
-            <a:endParaRPr lang="en-US" sz="1800" dirty="0"/>
-          </a:p>
-        </p:txBody>
-      </p:sp>
-      <p:sp>
-        <p:nvSpPr>
-          <p:cNvPr id="4" name="Text 2"/>
-          <p:cNvSpPr/>
-          <p:nvPr/>
-        </p:nvSpPr>
-        <p:spPr>
-          <a:xfrm>
-            <a:off x="731520" y="1097280"/>
-            <a:ext cx="7680960" cy="3200400"/>
-          </a:xfrm>
-          <a:prstGeom prst="rect">
-            <a:avLst/>
-          </a:prstGeom>
-          <a:noFill/>
-          <a:ln/>
-        </p:spPr>
-        <p:txBody>
-          <a:bodyPr wrap="square" rtlCol="0" anchor="ctr"/>
-          <a:lstStyle/>
-          <a:p>
-            <a:pPr indent="0" marL="0">
-              <a:buNone/>
-            </a:pPr>
-            <a:r>
-              <a:rPr lang="en-US" sz="1600" dirty="0">
-                <a:solidFill>
-                  <a:srgbClr val="363636"/>
+              <a:t>Adding heat energy makes particles move faster → state changes</a:t>
+            </a:r>
+            <a:endParaRPr lang="en-US" sz="1500" dirty="0"/>
+          </a:p>
+          <a:p>
+            <a:pPr marL="342900" indent="-342900">
+              <a:spcAft>
+                <a:spcPts val="800"/>
+              </a:spcAft>
+              <a:buSzPct val="100000"/>
+              <a:buChar char="•"/>
+            </a:pPr>
+            <a:r>
+              <a:rPr lang="en-US" sz="1500" dirty="0">
+                <a:solidFill>
+                  <a:srgbClr val="3D3A36"/>
                 </a:solidFill>
                 <a:latin typeface="Calibri" pitchFamily="34" charset="0"/>
                 <a:ea typeface="Calibri" pitchFamily="34" charset="-122"/>
                 <a:cs typeface="Calibri" pitchFamily="34" charset="-120"/>
               </a:rPr>
-              <a:t>Content for: Melting &amp; freezing</a:t>
-            </a:r>
-            <a:endParaRPr lang="en-US" sz="1600" dirty="0"/>
-          </a:p>
-          <a:p>
-            <a:pPr indent="0" marL="0">
-              <a:buNone/>
-            </a:pPr>
-            <a:endParaRPr lang="en-US" sz="1600" dirty="0"/>
-          </a:p>
-          <a:p>
-            <a:pPr indent="0" marL="0">
-              <a:buNone/>
-            </a:pPr>
-            <a:r>
-              <a:rPr lang="en-US" sz="1600" dirty="0">
-                <a:solidFill>
-                  <a:srgbClr val="363636"/>
+              <a:t>Removing heat energy slows particles down → state changes</a:t>
+            </a:r>
+            <a:endParaRPr lang="en-US" sz="1500" dirty="0"/>
+          </a:p>
+          <a:p>
+            <a:pPr marL="342900" indent="-342900">
+              <a:spcAft>
+                <a:spcPts val="800"/>
+              </a:spcAft>
+              <a:buSzPct val="100000"/>
+              <a:buChar char="•"/>
+            </a:pPr>
+            <a:r>
+              <a:rPr lang="en-US" sz="1500" dirty="0">
+                <a:solidFill>
+                  <a:srgbClr val="3D3A36"/>
                 </a:solidFill>
                 <a:latin typeface="Calibri" pitchFamily="34" charset="0"/>
                 <a:ea typeface="Calibri" pitchFamily="34" charset="-122"/>
                 <a:cs typeface="Calibri" pitchFamily="34" charset="-120"/>
               </a:rPr>
-              <a:t>Key points will be covered in class.</a:t>
-            </a:r>
-            <a:endParaRPr lang="en-US" sz="1600" dirty="0"/>
-          </a:p>
-        </p:txBody>
-      </p:sp>
-      <p:sp>
-        <p:nvSpPr>
-          <p:cNvPr id="5" name="Text 3"/>
-          <p:cNvSpPr/>
-          <p:nvPr/>
-        </p:nvSpPr>
-        <p:spPr>
-          <a:xfrm>
-            <a:off x="7772400" y="4663440"/>
-            <a:ext cx="1097280" cy="365760"/>
-          </a:xfrm>
-          <a:prstGeom prst="rect">
-            <a:avLst/>
-          </a:prstGeom>
-          <a:noFill/>
-          <a:ln/>
-        </p:spPr>
-        <p:txBody>
-          <a:bodyPr wrap="square" rtlCol="0" anchor="ctr"/>
-          <a:lstStyle/>
-          <a:p>
-            <a:pPr algn="r" indent="0" marL="0">
-              <a:buNone/>
-            </a:pPr>
-            <a:r>
-              <a:rPr lang="en-US" sz="1000" dirty="0">
-                <a:solidFill>
-                  <a:srgbClr val="999999"/>
+              <a:t>Melting: solid → liquid (e.g., ice → water at 0°C)</a:t>
+            </a:r>
+            <a:endParaRPr lang="en-US" sz="1500" dirty="0"/>
+          </a:p>
+          <a:p>
+            <a:pPr marL="342900" indent="-342900">
+              <a:spcAft>
+                <a:spcPts val="800"/>
+              </a:spcAft>
+              <a:buSzPct val="100000"/>
+              <a:buChar char="•"/>
+            </a:pPr>
+            <a:r>
+              <a:rPr lang="en-US" sz="1500" dirty="0">
+                <a:solidFill>
+                  <a:srgbClr val="3D3A36"/>
                 </a:solidFill>
                 <a:latin typeface="Calibri" pitchFamily="34" charset="0"/>
                 <a:ea typeface="Calibri" pitchFamily="34" charset="-122"/>
                 <a:cs typeface="Calibri" pitchFamily="34" charset="-120"/>
               </a:rPr>
-              <a:t>2 / 6</a:t>
-            </a:r>
-            <a:endParaRPr lang="en-US" sz="1000" dirty="0"/>
+              <a:t>Boiling/Evaporation: liquid → gas (water → steam at 100°C)</a:t>
+            </a:r>
+            <a:endParaRPr lang="en-US" sz="1500" dirty="0"/>
+          </a:p>
+          <a:p>
+            <a:pPr marL="342900" indent="-342900">
+              <a:spcAft>
+                <a:spcPts val="800"/>
+              </a:spcAft>
+              <a:buSzPct val="100000"/>
+              <a:buChar char="•"/>
+            </a:pPr>
+            <a:r>
+              <a:rPr lang="en-US" sz="1500" dirty="0">
+                <a:solidFill>
+                  <a:srgbClr val="3D3A36"/>
+                </a:solidFill>
+                <a:latin typeface="Calibri" pitchFamily="34" charset="0"/>
+                <a:ea typeface="Calibri" pitchFamily="34" charset="-122"/>
+                <a:cs typeface="Calibri" pitchFamily="34" charset="-120"/>
+              </a:rPr>
+              <a:t>Condensation: gas → liquid (steam → water droplets)</a:t>
+            </a:r>
+            <a:endParaRPr lang="en-US" sz="1500" dirty="0"/>
+          </a:p>
+          <a:p>
+            <a:pPr marL="342900" indent="-342900">
+              <a:spcAft>
+                <a:spcPts val="800"/>
+              </a:spcAft>
+              <a:buSzPct val="100000"/>
+              <a:buChar char="•"/>
+            </a:pPr>
+            <a:r>
+              <a:rPr lang="en-US" sz="1500" dirty="0">
+                <a:solidFill>
+                  <a:srgbClr val="3D3A36"/>
+                </a:solidFill>
+                <a:latin typeface="Calibri" pitchFamily="34" charset="0"/>
+                <a:ea typeface="Calibri" pitchFamily="34" charset="-122"/>
+                <a:cs typeface="Calibri" pitchFamily="34" charset="-120"/>
+              </a:rPr>
+              <a:t>Freezing: liquid → solid (water → ice at 0°C)</a:t>
+            </a:r>
+            <a:endParaRPr lang="en-US" sz="1500" dirty="0"/>
+          </a:p>
+        </p:txBody>
+      </p:sp>
+      <p:sp>
+        <p:nvSpPr>
+          <p:cNvPr id="5" name="Shape 3"/>
+          <p:cNvSpPr/>
+          <p:nvPr/>
+        </p:nvSpPr>
+        <p:spPr>
+          <a:xfrm>
+            <a:off x="548640" y="4754880"/>
+            <a:ext cx="8046720" cy="9144"/>
+          </a:xfrm>
+          <a:prstGeom prst="rect">
+            <a:avLst/>
+          </a:prstGeom>
+          <a:solidFill>
+            <a:srgbClr val="F3F1EE"/>
+          </a:solidFill>
+          <a:ln/>
+        </p:spPr>
+      </p:sp>
+      <p:sp>
+        <p:nvSpPr>
+          <p:cNvPr id="6" name="Text 4"/>
+          <p:cNvSpPr/>
+          <p:nvPr/>
+        </p:nvSpPr>
+        <p:spPr>
+          <a:xfrm>
+            <a:off x="548640" y="4800600"/>
+            <a:ext cx="3657600" cy="274320"/>
+          </a:xfrm>
+          <a:prstGeom prst="rect">
+            <a:avLst/>
+          </a:prstGeom>
+          <a:noFill/>
+          <a:ln/>
+        </p:spPr>
+        <p:txBody>
+          <a:bodyPr wrap="square" rtlCol="0" anchor="ctr"/>
+          <a:lstStyle/>
+          <a:p>
+            <a:pPr indent="0" marL="0">
+              <a:buNone/>
+            </a:pPr>
+            <a:r>
+              <a:rPr lang="en-US" sz="800" dirty="0">
+                <a:solidFill>
+                  <a:srgbClr val="9B9690"/>
+                </a:solidFill>
+              </a:rPr>
+              <a:t>mrzocchi.com</a:t>
+            </a:r>
+            <a:endParaRPr lang="en-US" sz="800" dirty="0"/>
           </a:p>
         </p:txBody>
       </p:sp>
@@ -1594,6 +1585,13 @@
 <file path=ppt/slides/slide3.xml><?xml version="1.0" encoding="utf-8"?>
 <p:sld xmlns:a="http://schemas.openxmlformats.org/drawingml/2006/main" xmlns:r="http://schemas.openxmlformats.org/officeDocument/2006/relationships" xmlns:p="http://schemas.openxmlformats.org/presentationml/2006/main">
   <p:cSld name="Slide 3">
+    <p:bg>
+      <p:bgPr>
+        <a:solidFill>
+          <a:srgbClr val="FFFFFF"/>
+        </a:solidFill>
+      </p:bgPr>
+    </p:bg>
     <p:spTree>
       <p:nvGrpSpPr>
         <p:cNvPr id="1" name=""/>
@@ -1617,13 +1615,13 @@
         <p:spPr>
           <a:xfrm>
             <a:off x="0" y="0"/>
-            <a:ext cx="9144000" cy="548640"/>
-          </a:xfrm>
-          <a:prstGeom prst="rect">
-            <a:avLst/>
-          </a:prstGeom>
-          <a:solidFill>
-            <a:srgbClr val="7C3AED"/>
+            <a:ext cx="9144000" cy="54864"/>
+          </a:xfrm>
+          <a:prstGeom prst="rect">
+            <a:avLst/>
+          </a:prstGeom>
+          <a:solidFill>
+            <a:srgbClr val="2A9D8F"/>
           </a:solidFill>
           <a:ln/>
         </p:spPr>
@@ -1636,8 +1634,8 @@
         </p:nvSpPr>
         <p:spPr>
           <a:xfrm>
-            <a:off x="457200" y="45720"/>
-            <a:ext cx="8229600" cy="457200"/>
+            <a:off x="548640" y="274320"/>
+            <a:ext cx="8046720" cy="640080"/>
           </a:xfrm>
           <a:prstGeom prst="rect">
             <a:avLst/>
@@ -1646,6 +1644,72 @@
           <a:ln/>
         </p:spPr>
         <p:txBody>
+          <a:bodyPr wrap="square" lIns="0" tIns="0" rIns="0" bIns="0" rtlCol="0" anchor="ctr"/>
+          <a:lstStyle/>
+          <a:p>
+            <a:pPr indent="0" marL="0">
+              <a:buNone/>
+            </a:pPr>
+            <a:r>
+              <a:rPr lang="en-US" sz="2600" b="1" dirty="0">
+                <a:solidFill>
+                  <a:srgbClr val="1B2A4A"/>
+                </a:solidFill>
+                <a:latin typeface="Georgia" pitchFamily="34" charset="0"/>
+                <a:ea typeface="Georgia" pitchFamily="34" charset="-122"/>
+                <a:cs typeface="Georgia" pitchFamily="34" charset="-120"/>
+              </a:rPr>
+              <a:t>Heating vs Cooling</a:t>
+            </a:r>
+            <a:endParaRPr lang="en-US" sz="2600" dirty="0"/>
+          </a:p>
+        </p:txBody>
+      </p:sp>
+      <p:sp>
+        <p:nvSpPr>
+          <p:cNvPr id="4" name="Shape 2"/>
+          <p:cNvSpPr/>
+          <p:nvPr/>
+        </p:nvSpPr>
+        <p:spPr>
+          <a:xfrm>
+            <a:off x="457200" y="1097280"/>
+            <a:ext cx="3840480" cy="3474720"/>
+          </a:xfrm>
+          <a:prstGeom prst="rect">
+            <a:avLst/>
+          </a:prstGeom>
+          <a:solidFill>
+            <a:srgbClr val="F3F1EE"/>
+          </a:solidFill>
+          <a:ln/>
+          <a:effectLst>
+            <a:outerShdw sx="100000" sy="100000" kx="0" ky="0" algn="bl" rotWithShape="0" blurRad="50800" dist="25400" dir="8100000">
+              <a:srgbClr val="000000">
+                <a:alpha val="10000"/>
+              </a:srgbClr>
+            </a:outerShdw>
+          </a:effectLst>
+        </p:spPr>
+      </p:sp>
+      <p:sp>
+        <p:nvSpPr>
+          <p:cNvPr id="5" name="Text 3"/>
+          <p:cNvSpPr/>
+          <p:nvPr/>
+        </p:nvSpPr>
+        <p:spPr>
+          <a:xfrm>
+            <a:off x="640080" y="1234440"/>
+            <a:ext cx="3474720" cy="411480"/>
+          </a:xfrm>
+          <a:prstGeom prst="rect">
+            <a:avLst/>
+          </a:prstGeom>
+          <a:noFill/>
+          <a:ln/>
+        </p:spPr>
+        <p:txBody>
           <a:bodyPr wrap="square" rtlCol="0" anchor="ctr"/>
           <a:lstStyle/>
           <a:p>
@@ -1653,118 +1717,331 @@
               <a:buNone/>
             </a:pPr>
             <a:r>
-              <a:rPr lang="en-US" sz="1800" b="1" dirty="0">
-                <a:solidFill>
-                  <a:srgbClr val="FFFFFF"/>
+              <a:rPr lang="en-US" sz="1600" b="1" dirty="0">
+                <a:solidFill>
+                  <a:srgbClr val="1B2A4A"/>
+                </a:solidFill>
+                <a:latin typeface="Georgia" pitchFamily="34" charset="0"/>
+                <a:ea typeface="Georgia" pitchFamily="34" charset="-122"/>
+                <a:cs typeface="Georgia" pitchFamily="34" charset="-120"/>
+              </a:rPr>
+              <a:t>Adding Energy ↑</a:t>
+            </a:r>
+            <a:endParaRPr lang="en-US" sz="1600" dirty="0"/>
+          </a:p>
+        </p:txBody>
+      </p:sp>
+      <p:sp>
+        <p:nvSpPr>
+          <p:cNvPr id="6" name="Text 4"/>
+          <p:cNvSpPr/>
+          <p:nvPr/>
+        </p:nvSpPr>
+        <p:spPr>
+          <a:xfrm>
+            <a:off x="640080" y="1737360"/>
+            <a:ext cx="3474720" cy="2651760"/>
+          </a:xfrm>
+          <a:prstGeom prst="rect">
+            <a:avLst/>
+          </a:prstGeom>
+          <a:noFill/>
+          <a:ln/>
+        </p:spPr>
+        <p:txBody>
+          <a:bodyPr wrap="square" rtlCol="0" anchor="t"/>
+          <a:lstStyle/>
+          <a:p>
+            <a:pPr marL="342900" indent="-342900">
+              <a:spcAft>
+                <a:spcPts val="600"/>
+              </a:spcAft>
+              <a:buSzPct val="100000"/>
+              <a:buChar char="•"/>
+            </a:pPr>
+            <a:r>
+              <a:rPr lang="en-US" sz="1300" dirty="0">
+                <a:solidFill>
+                  <a:srgbClr val="3D3A36"/>
                 </a:solidFill>
                 <a:latin typeface="Calibri" pitchFamily="34" charset="0"/>
                 <a:ea typeface="Calibri" pitchFamily="34" charset="-122"/>
                 <a:cs typeface="Calibri" pitchFamily="34" charset="-120"/>
               </a:rPr>
-              <a:t>Evaporation &amp; condensation</a:t>
-            </a:r>
-            <a:endParaRPr lang="en-US" sz="1800" dirty="0"/>
-          </a:p>
-        </p:txBody>
-      </p:sp>
-      <p:sp>
-        <p:nvSpPr>
-          <p:cNvPr id="4" name="Text 2"/>
-          <p:cNvSpPr/>
-          <p:nvPr/>
-        </p:nvSpPr>
-        <p:spPr>
-          <a:xfrm>
-            <a:off x="731520" y="1097280"/>
-            <a:ext cx="7680960" cy="3200400"/>
-          </a:xfrm>
-          <a:prstGeom prst="rect">
-            <a:avLst/>
-          </a:prstGeom>
-          <a:noFill/>
-          <a:ln/>
-        </p:spPr>
-        <p:txBody>
-          <a:bodyPr wrap="square" rtlCol="0" anchor="ctr"/>
-          <a:lstStyle/>
-          <a:p>
-            <a:pPr indent="0" marL="0">
-              <a:buNone/>
-            </a:pPr>
-            <a:r>
-              <a:rPr lang="en-US" sz="1600" dirty="0">
-                <a:solidFill>
-                  <a:srgbClr val="363636"/>
+              <a:t>Particles speed up</a:t>
+            </a:r>
+            <a:endParaRPr lang="en-US" sz="1300" dirty="0"/>
+          </a:p>
+          <a:p>
+            <a:pPr marL="342900" indent="-342900">
+              <a:spcAft>
+                <a:spcPts val="600"/>
+              </a:spcAft>
+              <a:buSzPct val="100000"/>
+              <a:buChar char="•"/>
+            </a:pPr>
+            <a:r>
+              <a:rPr lang="en-US" sz="1300" dirty="0">
+                <a:solidFill>
+                  <a:srgbClr val="3D3A36"/>
                 </a:solidFill>
                 <a:latin typeface="Calibri" pitchFamily="34" charset="0"/>
                 <a:ea typeface="Calibri" pitchFamily="34" charset="-122"/>
                 <a:cs typeface="Calibri" pitchFamily="34" charset="-120"/>
               </a:rPr>
-              <a:t>Content for: Evaporation &amp; condensation</a:t>
-            </a:r>
-            <a:endParaRPr lang="en-US" sz="1600" dirty="0"/>
-          </a:p>
-          <a:p>
-            <a:pPr indent="0" marL="0">
-              <a:buNone/>
-            </a:pPr>
-            <a:endParaRPr lang="en-US" sz="1600" dirty="0"/>
-          </a:p>
-          <a:p>
-            <a:pPr indent="0" marL="0">
-              <a:buNone/>
-            </a:pPr>
-            <a:r>
-              <a:rPr lang="en-US" sz="1600" dirty="0">
-                <a:solidFill>
-                  <a:srgbClr val="363636"/>
+              <a:t>Solid → Liquid (melting)</a:t>
+            </a:r>
+            <a:endParaRPr lang="en-US" sz="1300" dirty="0"/>
+          </a:p>
+          <a:p>
+            <a:pPr marL="342900" indent="-342900">
+              <a:spcAft>
+                <a:spcPts val="600"/>
+              </a:spcAft>
+              <a:buSzPct val="100000"/>
+              <a:buChar char="•"/>
+            </a:pPr>
+            <a:r>
+              <a:rPr lang="en-US" sz="1300" dirty="0">
+                <a:solidFill>
+                  <a:srgbClr val="3D3A36"/>
                 </a:solidFill>
                 <a:latin typeface="Calibri" pitchFamily="34" charset="0"/>
                 <a:ea typeface="Calibri" pitchFamily="34" charset="-122"/>
                 <a:cs typeface="Calibri" pitchFamily="34" charset="-120"/>
               </a:rPr>
-              <a:t>Key points will be covered in class.</a:t>
-            </a:r>
-            <a:endParaRPr lang="en-US" sz="1600" dirty="0"/>
-          </a:p>
-        </p:txBody>
-      </p:sp>
-      <p:sp>
-        <p:nvSpPr>
-          <p:cNvPr id="5" name="Text 3"/>
-          <p:cNvSpPr/>
-          <p:nvPr/>
-        </p:nvSpPr>
-        <p:spPr>
-          <a:xfrm>
-            <a:off x="7772400" y="4663440"/>
-            <a:ext cx="1097280" cy="365760"/>
-          </a:xfrm>
-          <a:prstGeom prst="rect">
-            <a:avLst/>
-          </a:prstGeom>
-          <a:noFill/>
-          <a:ln/>
-        </p:spPr>
-        <p:txBody>
-          <a:bodyPr wrap="square" rtlCol="0" anchor="ctr"/>
-          <a:lstStyle/>
-          <a:p>
-            <a:pPr algn="r" indent="0" marL="0">
-              <a:buNone/>
-            </a:pPr>
-            <a:r>
-              <a:rPr lang="en-US" sz="1000" dirty="0">
-                <a:solidFill>
-                  <a:srgbClr val="999999"/>
+              <a:t>Liquid → Gas (boiling)</a:t>
+            </a:r>
+            <a:endParaRPr lang="en-US" sz="1300" dirty="0"/>
+          </a:p>
+          <a:p>
+            <a:pPr marL="342900" indent="-342900">
+              <a:spcAft>
+                <a:spcPts val="600"/>
+              </a:spcAft>
+              <a:buSzPct val="100000"/>
+              <a:buChar char="•"/>
+            </a:pPr>
+            <a:r>
+              <a:rPr lang="en-US" sz="1300" dirty="0">
+                <a:solidFill>
+                  <a:srgbClr val="3D3A36"/>
                 </a:solidFill>
                 <a:latin typeface="Calibri" pitchFamily="34" charset="0"/>
                 <a:ea typeface="Calibri" pitchFamily="34" charset="-122"/>
                 <a:cs typeface="Calibri" pitchFamily="34" charset="-120"/>
               </a:rPr>
-              <a:t>3 / 6</a:t>
-            </a:r>
-            <a:endParaRPr lang="en-US" sz="1000" dirty="0"/>
+              <a:t>Sublimation: solid → gas directly</a:t>
+            </a:r>
+            <a:endParaRPr lang="en-US" sz="1300" dirty="0"/>
+          </a:p>
+        </p:txBody>
+      </p:sp>
+      <p:sp>
+        <p:nvSpPr>
+          <p:cNvPr id="7" name="Shape 5"/>
+          <p:cNvSpPr/>
+          <p:nvPr/>
+        </p:nvSpPr>
+        <p:spPr>
+          <a:xfrm>
+            <a:off x="4846320" y="1097280"/>
+            <a:ext cx="3840480" cy="3474720"/>
+          </a:xfrm>
+          <a:prstGeom prst="rect">
+            <a:avLst/>
+          </a:prstGeom>
+          <a:solidFill>
+            <a:srgbClr val="F3F1EE"/>
+          </a:solidFill>
+          <a:ln/>
+          <a:effectLst>
+            <a:outerShdw sx="100000" sy="100000" kx="0" ky="0" algn="bl" rotWithShape="0" blurRad="50800" dist="25400" dir="8100000">
+              <a:srgbClr val="000000">
+                <a:alpha val="10000"/>
+              </a:srgbClr>
+            </a:outerShdw>
+          </a:effectLst>
+        </p:spPr>
+      </p:sp>
+      <p:sp>
+        <p:nvSpPr>
+          <p:cNvPr id="8" name="Text 6"/>
+          <p:cNvSpPr/>
+          <p:nvPr/>
+        </p:nvSpPr>
+        <p:spPr>
+          <a:xfrm>
+            <a:off x="5029200" y="1234440"/>
+            <a:ext cx="3474720" cy="411480"/>
+          </a:xfrm>
+          <a:prstGeom prst="rect">
+            <a:avLst/>
+          </a:prstGeom>
+          <a:noFill/>
+          <a:ln/>
+        </p:spPr>
+        <p:txBody>
+          <a:bodyPr wrap="square" rtlCol="0" anchor="ctr"/>
+          <a:lstStyle/>
+          <a:p>
+            <a:pPr indent="0" marL="0">
+              <a:buNone/>
+            </a:pPr>
+            <a:r>
+              <a:rPr lang="en-US" sz="1600" b="1" dirty="0">
+                <a:solidFill>
+                  <a:srgbClr val="1B2A4A"/>
+                </a:solidFill>
+                <a:latin typeface="Georgia" pitchFamily="34" charset="0"/>
+                <a:ea typeface="Georgia" pitchFamily="34" charset="-122"/>
+                <a:cs typeface="Georgia" pitchFamily="34" charset="-120"/>
+              </a:rPr>
+              <a:t>Removing Energy ↓</a:t>
+            </a:r>
+            <a:endParaRPr lang="en-US" sz="1600" dirty="0"/>
+          </a:p>
+        </p:txBody>
+      </p:sp>
+      <p:sp>
+        <p:nvSpPr>
+          <p:cNvPr id="9" name="Text 7"/>
+          <p:cNvSpPr/>
+          <p:nvPr/>
+        </p:nvSpPr>
+        <p:spPr>
+          <a:xfrm>
+            <a:off x="5029200" y="1737360"/>
+            <a:ext cx="3474720" cy="2651760"/>
+          </a:xfrm>
+          <a:prstGeom prst="rect">
+            <a:avLst/>
+          </a:prstGeom>
+          <a:noFill/>
+          <a:ln/>
+        </p:spPr>
+        <p:txBody>
+          <a:bodyPr wrap="square" rtlCol="0" anchor="t"/>
+          <a:lstStyle/>
+          <a:p>
+            <a:pPr marL="342900" indent="-342900">
+              <a:spcAft>
+                <a:spcPts val="600"/>
+              </a:spcAft>
+              <a:buSzPct val="100000"/>
+              <a:buChar char="•"/>
+            </a:pPr>
+            <a:r>
+              <a:rPr lang="en-US" sz="1300" dirty="0">
+                <a:solidFill>
+                  <a:srgbClr val="3D3A36"/>
+                </a:solidFill>
+                <a:latin typeface="Calibri" pitchFamily="34" charset="0"/>
+                <a:ea typeface="Calibri" pitchFamily="34" charset="-122"/>
+                <a:cs typeface="Calibri" pitchFamily="34" charset="-120"/>
+              </a:rPr>
+              <a:t>Particles slow down</a:t>
+            </a:r>
+            <a:endParaRPr lang="en-US" sz="1300" dirty="0"/>
+          </a:p>
+          <a:p>
+            <a:pPr marL="342900" indent="-342900">
+              <a:spcAft>
+                <a:spcPts val="600"/>
+              </a:spcAft>
+              <a:buSzPct val="100000"/>
+              <a:buChar char="•"/>
+            </a:pPr>
+            <a:r>
+              <a:rPr lang="en-US" sz="1300" dirty="0">
+                <a:solidFill>
+                  <a:srgbClr val="3D3A36"/>
+                </a:solidFill>
+                <a:latin typeface="Calibri" pitchFamily="34" charset="0"/>
+                <a:ea typeface="Calibri" pitchFamily="34" charset="-122"/>
+                <a:cs typeface="Calibri" pitchFamily="34" charset="-120"/>
+              </a:rPr>
+              <a:t>Gas → Liquid (condensation)</a:t>
+            </a:r>
+            <a:endParaRPr lang="en-US" sz="1300" dirty="0"/>
+          </a:p>
+          <a:p>
+            <a:pPr marL="342900" indent="-342900">
+              <a:spcAft>
+                <a:spcPts val="600"/>
+              </a:spcAft>
+              <a:buSzPct val="100000"/>
+              <a:buChar char="•"/>
+            </a:pPr>
+            <a:r>
+              <a:rPr lang="en-US" sz="1300" dirty="0">
+                <a:solidFill>
+                  <a:srgbClr val="3D3A36"/>
+                </a:solidFill>
+                <a:latin typeface="Calibri" pitchFamily="34" charset="0"/>
+                <a:ea typeface="Calibri" pitchFamily="34" charset="-122"/>
+                <a:cs typeface="Calibri" pitchFamily="34" charset="-120"/>
+              </a:rPr>
+              <a:t>Liquid → Solid (freezing)</a:t>
+            </a:r>
+            <a:endParaRPr lang="en-US" sz="1300" dirty="0"/>
+          </a:p>
+          <a:p>
+            <a:pPr marL="342900" indent="-342900">
+              <a:spcAft>
+                <a:spcPts val="600"/>
+              </a:spcAft>
+              <a:buSzPct val="100000"/>
+              <a:buChar char="•"/>
+            </a:pPr>
+            <a:r>
+              <a:rPr lang="en-US" sz="1300" dirty="0">
+                <a:solidFill>
+                  <a:srgbClr val="3D3A36"/>
+                </a:solidFill>
+                <a:latin typeface="Calibri" pitchFamily="34" charset="0"/>
+                <a:ea typeface="Calibri" pitchFamily="34" charset="-122"/>
+                <a:cs typeface="Calibri" pitchFamily="34" charset="-120"/>
+              </a:rPr>
+              <a:t>Temperature stays constant DURING state change</a:t>
+            </a:r>
+            <a:endParaRPr lang="en-US" sz="1300" dirty="0"/>
+          </a:p>
+        </p:txBody>
+      </p:sp>
+      <p:sp>
+        <p:nvSpPr>
+          <p:cNvPr id="10" name="Text 8"/>
+          <p:cNvSpPr/>
+          <p:nvPr/>
+        </p:nvSpPr>
+        <p:spPr>
+          <a:xfrm>
+            <a:off x="548640" y="4800600"/>
+            <a:ext cx="3657600" cy="274320"/>
+          </a:xfrm>
+          <a:prstGeom prst="rect">
+            <a:avLst/>
+          </a:prstGeom>
+          <a:noFill/>
+          <a:ln/>
+        </p:spPr>
+        <p:txBody>
+          <a:bodyPr wrap="square" rtlCol="0" anchor="ctr"/>
+          <a:lstStyle/>
+          <a:p>
+            <a:pPr indent="0" marL="0">
+              <a:buNone/>
+            </a:pPr>
+            <a:r>
+              <a:rPr lang="en-US" sz="800" dirty="0">
+                <a:solidFill>
+                  <a:srgbClr val="9B9690"/>
+                </a:solidFill>
+              </a:rPr>
+              <a:t>mrzocchi.com</a:t>
+            </a:r>
+            <a:endParaRPr lang="en-US" sz="800" dirty="0"/>
           </a:p>
         </p:txBody>
       </p:sp>
@@ -1779,6 +2056,13 @@
 <file path=ppt/slides/slide4.xml><?xml version="1.0" encoding="utf-8"?>
 <p:sld xmlns:a="http://schemas.openxmlformats.org/drawingml/2006/main" xmlns:r="http://schemas.openxmlformats.org/officeDocument/2006/relationships" xmlns:p="http://schemas.openxmlformats.org/presentationml/2006/main">
   <p:cSld name="Slide 4">
+    <p:bg>
+      <p:bgPr>
+        <a:solidFill>
+          <a:srgbClr val="1B2A4A"/>
+        </a:solidFill>
+      </p:bgPr>
+    </p:bg>
     <p:spTree>
       <p:nvGrpSpPr>
         <p:cNvPr id="1" name=""/>
@@ -1802,13 +2086,13 @@
         <p:spPr>
           <a:xfrm>
             <a:off x="0" y="0"/>
-            <a:ext cx="9144000" cy="548640"/>
-          </a:xfrm>
-          <a:prstGeom prst="rect">
-            <a:avLst/>
-          </a:prstGeom>
-          <a:solidFill>
-            <a:srgbClr val="7C3AED"/>
+            <a:ext cx="9144000" cy="54864"/>
+          </a:xfrm>
+          <a:prstGeom prst="rect">
+            <a:avLst/>
+          </a:prstGeom>
+          <a:solidFill>
+            <a:srgbClr val="2A9D8F"/>
           </a:solidFill>
           <a:ln/>
         </p:spPr>
@@ -1821,8 +2105,8 @@
         </p:nvSpPr>
         <p:spPr>
           <a:xfrm>
-            <a:off x="457200" y="45720"/>
-            <a:ext cx="8229600" cy="457200"/>
+            <a:off x="548640" y="457200"/>
+            <a:ext cx="8046720" cy="640080"/>
           </a:xfrm>
           <a:prstGeom prst="rect">
             <a:avLst/>
@@ -1838,77 +2122,121 @@
               <a:buNone/>
             </a:pPr>
             <a:r>
-              <a:rPr lang="en-US" sz="1800" b="1" dirty="0">
+              <a:rPr lang="en-US" sz="2800" b="1" dirty="0">
                 <a:solidFill>
                   <a:srgbClr val="FFFFFF"/>
+                </a:solidFill>
+                <a:latin typeface="Georgia" pitchFamily="34" charset="0"/>
+                <a:ea typeface="Georgia" pitchFamily="34" charset="-122"/>
+                <a:cs typeface="Georgia" pitchFamily="34" charset="-120"/>
+              </a:rPr>
+              <a:t>Key Takeaways</a:t>
+            </a:r>
+            <a:endParaRPr lang="en-US" sz="2800" dirty="0"/>
+          </a:p>
+        </p:txBody>
+      </p:sp>
+      <p:sp>
+        <p:nvSpPr>
+          <p:cNvPr id="4" name="Text 2"/>
+          <p:cNvSpPr/>
+          <p:nvPr/>
+        </p:nvSpPr>
+        <p:spPr>
+          <a:xfrm>
+            <a:off x="731520" y="1371600"/>
+            <a:ext cx="7680960" cy="3200400"/>
+          </a:xfrm>
+          <a:prstGeom prst="rect">
+            <a:avLst/>
+          </a:prstGeom>
+          <a:noFill/>
+          <a:ln/>
+        </p:spPr>
+        <p:txBody>
+          <a:bodyPr wrap="square" rtlCol="0" anchor="t"/>
+          <a:lstStyle/>
+          <a:p>
+            <a:pPr marL="342900" indent="-342900">
+              <a:spcAft>
+                <a:spcPts val="1000"/>
+              </a:spcAft>
+              <a:buSzPct val="100000"/>
+              <a:buChar char="•"/>
+            </a:pPr>
+            <a:r>
+              <a:rPr lang="en-US" sz="1600" dirty="0">
+                <a:solidFill>
+                  <a:srgbClr val="CADCFC"/>
                 </a:solidFill>
                 <a:latin typeface="Calibri" pitchFamily="34" charset="0"/>
                 <a:ea typeface="Calibri" pitchFamily="34" charset="-122"/>
                 <a:cs typeface="Calibri" pitchFamily="34" charset="-120"/>
               </a:rPr>
-              <a:t>Sublimation</a:t>
-            </a:r>
-            <a:endParaRPr lang="en-US" sz="1800" dirty="0"/>
-          </a:p>
-        </p:txBody>
-      </p:sp>
-      <p:sp>
-        <p:nvSpPr>
-          <p:cNvPr id="4" name="Text 2"/>
-          <p:cNvSpPr/>
-          <p:nvPr/>
-        </p:nvSpPr>
-        <p:spPr>
-          <a:xfrm>
-            <a:off x="731520" y="1097280"/>
-            <a:ext cx="7680960" cy="3200400"/>
-          </a:xfrm>
-          <a:prstGeom prst="rect">
-            <a:avLst/>
-          </a:prstGeom>
-          <a:noFill/>
-          <a:ln/>
-        </p:spPr>
-        <p:txBody>
-          <a:bodyPr wrap="square" rtlCol="0" anchor="ctr"/>
-          <a:lstStyle/>
-          <a:p>
-            <a:pPr indent="0" marL="0">
-              <a:buNone/>
+              <a:t>State changes happen when energy is added or removed</a:t>
+            </a:r>
+            <a:endParaRPr lang="en-US" sz="1600" dirty="0"/>
+          </a:p>
+          <a:p>
+            <a:pPr marL="342900" indent="-342900">
+              <a:spcAft>
+                <a:spcPts val="1000"/>
+              </a:spcAft>
+              <a:buSzPct val="100000"/>
+              <a:buChar char="•"/>
             </a:pPr>
             <a:r>
               <a:rPr lang="en-US" sz="1600" dirty="0">
                 <a:solidFill>
-                  <a:srgbClr val="363636"/>
+                  <a:srgbClr val="CADCFC"/>
                 </a:solidFill>
                 <a:latin typeface="Calibri" pitchFamily="34" charset="0"/>
                 <a:ea typeface="Calibri" pitchFamily="34" charset="-122"/>
                 <a:cs typeface="Calibri" pitchFamily="34" charset="-120"/>
               </a:rPr>
-              <a:t>Content for: Sublimation</a:t>
+              <a:t>Melting, boiling, evaporation = adding energy</a:t>
             </a:r>
             <a:endParaRPr lang="en-US" sz="1600" dirty="0"/>
           </a:p>
           <a:p>
-            <a:pPr indent="0" marL="0">
-              <a:buNone/>
-            </a:pPr>
-            <a:endParaRPr lang="en-US" sz="1600" dirty="0"/>
-          </a:p>
-          <a:p>
-            <a:pPr indent="0" marL="0">
-              <a:buNone/>
+            <a:pPr marL="342900" indent="-342900">
+              <a:spcAft>
+                <a:spcPts val="1000"/>
+              </a:spcAft>
+              <a:buSzPct val="100000"/>
+              <a:buChar char="•"/>
             </a:pPr>
             <a:r>
               <a:rPr lang="en-US" sz="1600" dirty="0">
                 <a:solidFill>
-                  <a:srgbClr val="363636"/>
+                  <a:srgbClr val="CADCFC"/>
                 </a:solidFill>
                 <a:latin typeface="Calibri" pitchFamily="34" charset="0"/>
                 <a:ea typeface="Calibri" pitchFamily="34" charset="-122"/>
                 <a:cs typeface="Calibri" pitchFamily="34" charset="-120"/>
               </a:rPr>
-              <a:t>Key points will be covered in class.</a:t>
+              <a:t>Freezing, condensation = removing energy</a:t>
+            </a:r>
+            <a:endParaRPr lang="en-US" sz="1600" dirty="0"/>
+          </a:p>
+          <a:p>
+            <a:pPr marL="342900" indent="-342900">
+              <a:spcAft>
+                <a:spcPts val="1000"/>
+              </a:spcAft>
+              <a:buSzPct val="100000"/>
+              <a:buChar char="•"/>
+            </a:pPr>
+            <a:r>
+              <a:rPr lang="en-US" sz="1600" dirty="0">
+                <a:solidFill>
+                  <a:srgbClr val="CADCFC"/>
+                </a:solidFill>
+                <a:latin typeface="Calibri" pitchFamily="34" charset="0"/>
+                <a:ea typeface="Calibri" pitchFamily="34" charset="-122"/>
+                <a:cs typeface="Calibri" pitchFamily="34" charset="-120"/>
+              </a:rPr>
+              <a:t>During a state change, temperature stays constant (energy breaks bonds)</a:t>
             </a:r>
             <a:endParaRPr lang="en-US" sz="1600" dirty="0"/>
           </a:p>
@@ -1922,8 +2250,8 @@
         </p:nvSpPr>
         <p:spPr>
           <a:xfrm>
-            <a:off x="7772400" y="4663440"/>
-            <a:ext cx="1097280" cy="365760"/>
+            <a:off x="548640" y="4572000"/>
+            <a:ext cx="3657600" cy="274320"/>
           </a:xfrm>
           <a:prstGeom prst="rect">
             <a:avLst/>
@@ -1935,389 +2263,16 @@
           <a:bodyPr wrap="square" rtlCol="0" anchor="ctr"/>
           <a:lstStyle/>
           <a:p>
-            <a:pPr algn="r" indent="0" marL="0">
-              <a:buNone/>
-            </a:pPr>
-            <a:r>
-              <a:rPr lang="en-US" sz="1000" dirty="0">
-                <a:solidFill>
-                  <a:srgbClr val="999999"/>
-                </a:solidFill>
-                <a:latin typeface="Calibri" pitchFamily="34" charset="0"/>
-                <a:ea typeface="Calibri" pitchFamily="34" charset="-122"/>
-                <a:cs typeface="Calibri" pitchFamily="34" charset="-120"/>
-              </a:rPr>
-              <a:t>4 / 6</a:t>
-            </a:r>
-            <a:endParaRPr lang="en-US" sz="1000" dirty="0"/>
-          </a:p>
-        </p:txBody>
-      </p:sp>
-    </p:spTree>
-  </p:cSld>
-  <p:clrMapOvr>
-    <a:masterClrMapping/>
-  </p:clrMapOvr>
-</p:sld>
-</file>
-
-<file path=ppt/slides/slide5.xml><?xml version="1.0" encoding="utf-8"?>
-<p:sld xmlns:a="http://schemas.openxmlformats.org/drawingml/2006/main" xmlns:r="http://schemas.openxmlformats.org/officeDocument/2006/relationships" xmlns:p="http://schemas.openxmlformats.org/presentationml/2006/main">
-  <p:cSld name="Slide 5">
-    <p:spTree>
-      <p:nvGrpSpPr>
-        <p:cNvPr id="1" name=""/>
-        <p:cNvGrpSpPr/>
-        <p:nvPr/>
-      </p:nvGrpSpPr>
-      <p:grpSpPr>
-        <a:xfrm>
-          <a:off x="0" y="0"/>
-          <a:ext cx="0" cy="0"/>
-          <a:chOff x="0" y="0"/>
-          <a:chExt cx="0" cy="0"/>
-        </a:xfrm>
-      </p:grpSpPr>
-      <p:sp>
-        <p:nvSpPr>
-          <p:cNvPr id="2" name="Shape 0"/>
-          <p:cNvSpPr/>
-          <p:nvPr/>
-        </p:nvSpPr>
-        <p:spPr>
-          <a:xfrm>
-            <a:off x="0" y="0"/>
-            <a:ext cx="9144000" cy="548640"/>
-          </a:xfrm>
-          <a:prstGeom prst="rect">
-            <a:avLst/>
-          </a:prstGeom>
-          <a:solidFill>
-            <a:srgbClr val="7C3AED"/>
-          </a:solidFill>
-          <a:ln/>
-        </p:spPr>
-      </p:sp>
-      <p:sp>
-        <p:nvSpPr>
-          <p:cNvPr id="3" name="Text 1"/>
-          <p:cNvSpPr/>
-          <p:nvPr/>
-        </p:nvSpPr>
-        <p:spPr>
-          <a:xfrm>
-            <a:off x="457200" y="45720"/>
-            <a:ext cx="8229600" cy="457200"/>
-          </a:xfrm>
-          <a:prstGeom prst="rect">
-            <a:avLst/>
-          </a:prstGeom>
-          <a:noFill/>
-          <a:ln/>
-        </p:spPr>
-        <p:txBody>
-          <a:bodyPr wrap="square" rtlCol="0" anchor="ctr"/>
-          <a:lstStyle/>
-          <a:p>
             <a:pPr indent="0" marL="0">
               <a:buNone/>
             </a:pPr>
             <a:r>
-              <a:rPr lang="en-US" sz="1800" b="1" dirty="0">
-                <a:solidFill>
-                  <a:srgbClr val="FFFFFF"/>
-                </a:solidFill>
-                <a:latin typeface="Calibri" pitchFamily="34" charset="0"/>
-                <a:ea typeface="Calibri" pitchFamily="34" charset="-122"/>
-                <a:cs typeface="Calibri" pitchFamily="34" charset="-120"/>
-              </a:rPr>
-              <a:t>Heating &amp; cooling curves</a:t>
-            </a:r>
-            <a:endParaRPr lang="en-US" sz="1800" dirty="0"/>
-          </a:p>
-        </p:txBody>
-      </p:sp>
-      <p:sp>
-        <p:nvSpPr>
-          <p:cNvPr id="4" name="Text 2"/>
-          <p:cNvSpPr/>
-          <p:nvPr/>
-        </p:nvSpPr>
-        <p:spPr>
-          <a:xfrm>
-            <a:off x="731520" y="1097280"/>
-            <a:ext cx="7680960" cy="3200400"/>
-          </a:xfrm>
-          <a:prstGeom prst="rect">
-            <a:avLst/>
-          </a:prstGeom>
-          <a:noFill/>
-          <a:ln/>
-        </p:spPr>
-        <p:txBody>
-          <a:bodyPr wrap="square" rtlCol="0" anchor="ctr"/>
-          <a:lstStyle/>
-          <a:p>
-            <a:pPr indent="0" marL="0">
-              <a:buNone/>
-            </a:pPr>
-            <a:r>
-              <a:rPr lang="en-US" sz="1600" dirty="0">
-                <a:solidFill>
-                  <a:srgbClr val="363636"/>
-                </a:solidFill>
-                <a:latin typeface="Calibri" pitchFamily="34" charset="0"/>
-                <a:ea typeface="Calibri" pitchFamily="34" charset="-122"/>
-                <a:cs typeface="Calibri" pitchFamily="34" charset="-120"/>
-              </a:rPr>
-              <a:t>Content for: Heating &amp; cooling curves</a:t>
-            </a:r>
-            <a:endParaRPr lang="en-US" sz="1600" dirty="0"/>
-          </a:p>
-          <a:p>
-            <a:pPr indent="0" marL="0">
-              <a:buNone/>
-            </a:pPr>
-            <a:endParaRPr lang="en-US" sz="1600" dirty="0"/>
-          </a:p>
-          <a:p>
-            <a:pPr indent="0" marL="0">
-              <a:buNone/>
-            </a:pPr>
-            <a:r>
-              <a:rPr lang="en-US" sz="1600" dirty="0">
-                <a:solidFill>
-                  <a:srgbClr val="363636"/>
-                </a:solidFill>
-                <a:latin typeface="Calibri" pitchFamily="34" charset="0"/>
-                <a:ea typeface="Calibri" pitchFamily="34" charset="-122"/>
-                <a:cs typeface="Calibri" pitchFamily="34" charset="-120"/>
-              </a:rPr>
-              <a:t>Key points will be covered in class.</a:t>
-            </a:r>
-            <a:endParaRPr lang="en-US" sz="1600" dirty="0"/>
-          </a:p>
-        </p:txBody>
-      </p:sp>
-      <p:sp>
-        <p:nvSpPr>
-          <p:cNvPr id="5" name="Text 3"/>
-          <p:cNvSpPr/>
-          <p:nvPr/>
-        </p:nvSpPr>
-        <p:spPr>
-          <a:xfrm>
-            <a:off x="7772400" y="4663440"/>
-            <a:ext cx="1097280" cy="365760"/>
-          </a:xfrm>
-          <a:prstGeom prst="rect">
-            <a:avLst/>
-          </a:prstGeom>
-          <a:noFill/>
-          <a:ln/>
-        </p:spPr>
-        <p:txBody>
-          <a:bodyPr wrap="square" rtlCol="0" anchor="ctr"/>
-          <a:lstStyle/>
-          <a:p>
-            <a:pPr algn="r" indent="0" marL="0">
-              <a:buNone/>
-            </a:pPr>
-            <a:r>
               <a:rPr lang="en-US" sz="1000" dirty="0">
                 <a:solidFill>
-                  <a:srgbClr val="999999"/>
-                </a:solidFill>
-                <a:latin typeface="Calibri" pitchFamily="34" charset="0"/>
-                <a:ea typeface="Calibri" pitchFamily="34" charset="-122"/>
-                <a:cs typeface="Calibri" pitchFamily="34" charset="-120"/>
-              </a:rPr>
-              <a:t>5 / 6</a:t>
-            </a:r>
-            <a:endParaRPr lang="en-US" sz="1000" dirty="0"/>
-          </a:p>
-        </p:txBody>
-      </p:sp>
-    </p:spTree>
-  </p:cSld>
-  <p:clrMapOvr>
-    <a:masterClrMapping/>
-  </p:clrMapOvr>
-</p:sld>
-</file>
-
-<file path=ppt/slides/slide6.xml><?xml version="1.0" encoding="utf-8"?>
-<p:sld xmlns:a="http://schemas.openxmlformats.org/drawingml/2006/main" xmlns:r="http://schemas.openxmlformats.org/officeDocument/2006/relationships" xmlns:p="http://schemas.openxmlformats.org/presentationml/2006/main">
-  <p:cSld name="Slide 6">
-    <p:spTree>
-      <p:nvGrpSpPr>
-        <p:cNvPr id="1" name=""/>
-        <p:cNvGrpSpPr/>
-        <p:nvPr/>
-      </p:nvGrpSpPr>
-      <p:grpSpPr>
-        <a:xfrm>
-          <a:off x="0" y="0"/>
-          <a:ext cx="0" cy="0"/>
-          <a:chOff x="0" y="0"/>
-          <a:chExt cx="0" cy="0"/>
-        </a:xfrm>
-      </p:grpSpPr>
-      <p:sp>
-        <p:nvSpPr>
-          <p:cNvPr id="2" name="Shape 0"/>
-          <p:cNvSpPr/>
-          <p:nvPr/>
-        </p:nvSpPr>
-        <p:spPr>
-          <a:xfrm>
-            <a:off x="0" y="0"/>
-            <a:ext cx="9144000" cy="548640"/>
-          </a:xfrm>
-          <a:prstGeom prst="rect">
-            <a:avLst/>
-          </a:prstGeom>
-          <a:solidFill>
-            <a:srgbClr val="7C3AED"/>
-          </a:solidFill>
-          <a:ln/>
-        </p:spPr>
-      </p:sp>
-      <p:sp>
-        <p:nvSpPr>
-          <p:cNvPr id="3" name="Text 1"/>
-          <p:cNvSpPr/>
-          <p:nvPr/>
-        </p:nvSpPr>
-        <p:spPr>
-          <a:xfrm>
-            <a:off x="457200" y="45720"/>
-            <a:ext cx="8229600" cy="457200"/>
-          </a:xfrm>
-          <a:prstGeom prst="rect">
-            <a:avLst/>
-          </a:prstGeom>
-          <a:noFill/>
-          <a:ln/>
-        </p:spPr>
-        <p:txBody>
-          <a:bodyPr wrap="square" rtlCol="0" anchor="ctr"/>
-          <a:lstStyle/>
-          <a:p>
-            <a:pPr indent="0" marL="0">
-              <a:buNone/>
-            </a:pPr>
-            <a:r>
-              <a:rPr lang="en-US" sz="1800" b="1" dirty="0">
-                <a:solidFill>
-                  <a:srgbClr val="FFFFFF"/>
-                </a:solidFill>
-                <a:latin typeface="Calibri" pitchFamily="34" charset="0"/>
-                <a:ea typeface="Calibri" pitchFamily="34" charset="-122"/>
-                <a:cs typeface="Calibri" pitchFamily="34" charset="-120"/>
-              </a:rPr>
-              <a:t>Energy and state changes</a:t>
-            </a:r>
-            <a:endParaRPr lang="en-US" sz="1800" dirty="0"/>
-          </a:p>
-        </p:txBody>
-      </p:sp>
-      <p:sp>
-        <p:nvSpPr>
-          <p:cNvPr id="4" name="Text 2"/>
-          <p:cNvSpPr/>
-          <p:nvPr/>
-        </p:nvSpPr>
-        <p:spPr>
-          <a:xfrm>
-            <a:off x="731520" y="1097280"/>
-            <a:ext cx="7680960" cy="3200400"/>
-          </a:xfrm>
-          <a:prstGeom prst="rect">
-            <a:avLst/>
-          </a:prstGeom>
-          <a:noFill/>
-          <a:ln/>
-        </p:spPr>
-        <p:txBody>
-          <a:bodyPr wrap="square" rtlCol="0" anchor="ctr"/>
-          <a:lstStyle/>
-          <a:p>
-            <a:pPr indent="0" marL="0">
-              <a:buNone/>
-            </a:pPr>
-            <a:r>
-              <a:rPr lang="en-US" sz="1600" dirty="0">
-                <a:solidFill>
-                  <a:srgbClr val="363636"/>
-                </a:solidFill>
-                <a:latin typeface="Calibri" pitchFamily="34" charset="0"/>
-                <a:ea typeface="Calibri" pitchFamily="34" charset="-122"/>
-                <a:cs typeface="Calibri" pitchFamily="34" charset="-120"/>
-              </a:rPr>
-              <a:t>Content for: Energy and state changes</a:t>
-            </a:r>
-            <a:endParaRPr lang="en-US" sz="1600" dirty="0"/>
-          </a:p>
-          <a:p>
-            <a:pPr indent="0" marL="0">
-              <a:buNone/>
-            </a:pPr>
-            <a:endParaRPr lang="en-US" sz="1600" dirty="0"/>
-          </a:p>
-          <a:p>
-            <a:pPr indent="0" marL="0">
-              <a:buNone/>
-            </a:pPr>
-            <a:r>
-              <a:rPr lang="en-US" sz="1600" dirty="0">
-                <a:solidFill>
-                  <a:srgbClr val="363636"/>
-                </a:solidFill>
-                <a:latin typeface="Calibri" pitchFamily="34" charset="0"/>
-                <a:ea typeface="Calibri" pitchFamily="34" charset="-122"/>
-                <a:cs typeface="Calibri" pitchFamily="34" charset="-120"/>
-              </a:rPr>
-              <a:t>Key points will be covered in class.</a:t>
-            </a:r>
-            <a:endParaRPr lang="en-US" sz="1600" dirty="0"/>
-          </a:p>
-        </p:txBody>
-      </p:sp>
-      <p:sp>
-        <p:nvSpPr>
-          <p:cNvPr id="5" name="Text 3"/>
-          <p:cNvSpPr/>
-          <p:nvPr/>
-        </p:nvSpPr>
-        <p:spPr>
-          <a:xfrm>
-            <a:off x="7772400" y="4663440"/>
-            <a:ext cx="1097280" cy="365760"/>
-          </a:xfrm>
-          <a:prstGeom prst="rect">
-            <a:avLst/>
-          </a:prstGeom>
-          <a:noFill/>
-          <a:ln/>
-        </p:spPr>
-        <p:txBody>
-          <a:bodyPr wrap="square" rtlCol="0" anchor="ctr"/>
-          <a:lstStyle/>
-          <a:p>
-            <a:pPr algn="r" indent="0" marL="0">
-              <a:buNone/>
-            </a:pPr>
-            <a:r>
-              <a:rPr lang="en-US" sz="1000" dirty="0">
-                <a:solidFill>
-                  <a:srgbClr val="999999"/>
-                </a:solidFill>
-                <a:latin typeface="Calibri" pitchFamily="34" charset="0"/>
-                <a:ea typeface="Calibri" pitchFamily="34" charset="-122"/>
-                <a:cs typeface="Calibri" pitchFamily="34" charset="-120"/>
-              </a:rPr>
-              <a:t>6 / 6</a:t>
+                  <a:srgbClr val="6B6660"/>
+                </a:solidFill>
+              </a:rPr>
+              <a:t>mrzocchi.com</a:t>
             </a:r>
             <a:endParaRPr lang="en-US" sz="1000" dirty="0"/>
           </a:p>

--- a/static/ppts/G6_Sci_T2_Changes_of_State.pptx
+++ b/static/ppts/G6_Sci_T2_Changes_of_State.pptx
@@ -9,9 +9,10 @@
     <p:sldId id="257" r:id="rId3"/>
     <p:sldId id="258" r:id="rId4"/>
     <p:sldId id="259" r:id="rId5"/>
+    <p:sldId id="260" r:id="rId6"/>
   </p:sldIdLst>
   <p:notesMasterIdLst>
-    <p:notesMasterId r:id="rId6"/>
+    <p:notesMasterId r:id="rId7"/>
   </p:notesMasterIdLst>
   <p:sldSz cx="9144000" cy="5143500"/>
   <p:notesSz cx="5143500" cy="9144000"/>
@@ -811,6 +812,94 @@
 </p:notes>
 </file>
 
+<file path=ppt/notesSlides/notesSlide5.xml><?xml version="1.0" encoding="utf-8"?>
+<p:notes xmlns:a="http://schemas.openxmlformats.org/drawingml/2006/main" xmlns:r="http://schemas.openxmlformats.org/officeDocument/2006/relationships" xmlns:p="http://schemas.openxmlformats.org/presentationml/2006/main">
+  <p:cSld>
+    <p:spTree>
+      <p:nvGrpSpPr>
+        <p:cNvPr id="1" name=""/>
+        <p:cNvGrpSpPr/>
+        <p:nvPr/>
+      </p:nvGrpSpPr>
+      <p:grpSpPr>
+        <a:xfrm>
+          <a:off x="0" y="0"/>
+          <a:ext cx="0" cy="0"/>
+          <a:chOff x="0" y="0"/>
+          <a:chExt cx="0" cy="0"/>
+        </a:xfrm>
+      </p:grpSpPr>
+      <p:sp>
+        <p:nvSpPr>
+          <p:cNvPr id="2" name="Slide Image Placeholder 1"/>
+          <p:cNvSpPr>
+            <a:spLocks noGrp="1" noRot="1" noChangeAspect="1"/>
+          </p:cNvSpPr>
+          <p:nvPr>
+            <p:ph type="sldImg"/>
+          </p:nvPr>
+        </p:nvSpPr>
+        <p:spPr/>
+      </p:sp>
+      <p:sp>
+        <p:nvSpPr>
+          <p:cNvPr id="3" name="Notes Placeholder 2"/>
+          <p:cNvSpPr>
+            <a:spLocks noGrp="1"/>
+          </p:cNvSpPr>
+          <p:nvPr>
+            <p:ph type="body" idx="1"/>
+          </p:nvPr>
+        </p:nvSpPr>
+        <p:spPr/>
+        <p:txBody>
+          <a:bodyPr/>
+          <a:lstStyle/>
+          <a:p>
+            <a:r>
+              <a:rPr lang="en-US" dirty="0"/>
+              <a:t/>
+            </a:r>
+            <a:endParaRPr lang="en-US" dirty="0"/>
+          </a:p>
+        </p:txBody>
+      </p:sp>
+      <p:sp>
+        <p:nvSpPr>
+          <p:cNvPr id="4" name="Slide Number Placeholder 3"/>
+          <p:cNvSpPr>
+            <a:spLocks noGrp="1"/>
+          </p:cNvSpPr>
+          <p:nvPr>
+            <p:ph type="sldNum" sz="quarter" idx="10"/>
+          </p:nvPr>
+        </p:nvSpPr>
+        <p:spPr/>
+        <p:txBody>
+          <a:bodyPr/>
+          <a:lstStyle/>
+          <a:p>
+            <a:fld id="{F7021451-1387-4CA6-816F-3879F97B5CBC}" type="slidenum">
+              <a:rPr lang="en-US"/>
+              <a:t>5</a:t>
+            </a:fld>
+            <a:endParaRPr lang="en-US"/>
+          </a:p>
+        </p:txBody>
+      </p:sp>
+    </p:spTree>
+    <p:extLst>
+      <p:ext uri="{BB962C8B-B14F-4D97-AF65-F5344CB8AC3E}">
+        <p14:creationId xmlns:p14="http://schemas.microsoft.com/office/powerpoint/2010/main" val="1024086991"/>
+      </p:ext>
+    </p:extLst>
+  </p:cSld>
+  <p:clrMapOvr>
+    <a:masterClrMapping/>
+  </p:clrMapOvr>
+</p:notes>
+</file>
+
 <file path=ppt/slideLayouts/slideLayout1.xml><?xml version="1.0" encoding="utf-8"?>
 <p:sldLayout xmlns:a="http://schemas.openxmlformats.org/drawingml/2006/main" xmlns:r="http://schemas.openxmlformats.org/officeDocument/2006/relationships" xmlns:p="http://schemas.openxmlformats.org/presentationml/2006/main" preserve="1">
   <p:cSld name="DEFAULT">
@@ -1170,7 +1259,7 @@
         </p:nvSpPr>
         <p:spPr>
           <a:xfrm>
-            <a:off x="731520" y="1280160"/>
+            <a:off x="731520" y="1097280"/>
             <a:ext cx="7772400" cy="1371600"/>
           </a:xfrm>
           <a:prstGeom prst="rect">
@@ -1187,7 +1276,7 @@
               <a:buNone/>
             </a:pPr>
             <a:r>
-              <a:rPr lang="en-US" sz="3600" b="1" dirty="0">
+              <a:rPr lang="en-US" sz="4000" b="1" dirty="0">
                 <a:solidFill>
                   <a:srgbClr val="FFFFFF"/>
                 </a:solidFill>
@@ -1197,7 +1286,7 @@
               </a:rPr>
               <a:t>Changes of State</a:t>
             </a:r>
-            <a:endParaRPr lang="en-US" sz="3600" dirty="0"/>
+            <a:endParaRPr lang="en-US" sz="4000" dirty="0"/>
           </a:p>
         </p:txBody>
       </p:sp>
@@ -1209,7 +1298,7 @@
         </p:nvSpPr>
         <p:spPr>
           <a:xfrm>
-            <a:off x="731520" y="2743200"/>
+            <a:off x="731520" y="2560320"/>
             <a:ext cx="7772400" cy="548640"/>
           </a:xfrm>
           <a:prstGeom prst="rect">
@@ -1228,13 +1317,13 @@
             <a:r>
               <a:rPr lang="en-US" sz="1600" dirty="0">
                 <a:solidFill>
-                  <a:srgbClr val="9B9690"/>
+                  <a:srgbClr val="E9C46A"/>
                 </a:solidFill>
                 <a:latin typeface="Calibri" pitchFamily="34" charset="0"/>
                 <a:ea typeface="Calibri" pitchFamily="34" charset="-122"/>
                 <a:cs typeface="Calibri" pitchFamily="34" charset="-120"/>
               </a:rPr>
-              <a:t>G6 Science · Chemistry</a:t>
+              <a:t>Grade 6 Science · Mr Zocchi</a:t>
             </a:r>
             <a:endParaRPr lang="en-US" sz="1600" dirty="0"/>
           </a:p>
@@ -1242,14 +1331,36 @@
       </p:sp>
       <p:sp>
         <p:nvSpPr>
-          <p:cNvPr id="5" name="Text 3"/>
-          <p:cNvSpPr/>
-          <p:nvPr/>
-        </p:nvSpPr>
-        <p:spPr>
-          <a:xfrm>
-            <a:off x="731520" y="4389120"/>
-            <a:ext cx="7772400" cy="457200"/>
+          <p:cNvPr id="5" name="Shape 3"/>
+          <p:cNvSpPr/>
+          <p:nvPr/>
+        </p:nvSpPr>
+        <p:spPr>
+          <a:xfrm>
+            <a:off x="731520" y="3474720"/>
+            <a:ext cx="2011680" cy="411480"/>
+          </a:xfrm>
+          <a:prstGeom prst="roundRect">
+            <a:avLst>
+              <a:gd name="adj" fmla="val 17778"/>
+            </a:avLst>
+          </a:prstGeom>
+          <a:solidFill>
+            <a:srgbClr val="2A9D8F"/>
+          </a:solidFill>
+          <a:ln/>
+        </p:spPr>
+      </p:sp>
+      <p:sp>
+        <p:nvSpPr>
+          <p:cNvPr id="6" name="Text 4"/>
+          <p:cNvSpPr/>
+          <p:nvPr/>
+        </p:nvSpPr>
+        <p:spPr>
+          <a:xfrm>
+            <a:off x="731520" y="3474720"/>
+            <a:ext cx="2011680" cy="411480"/>
           </a:xfrm>
           <a:prstGeom prst="rect">
             <a:avLst/>
@@ -1261,21 +1372,21 @@
           <a:bodyPr wrap="square" rtlCol="0" anchor="ctr"/>
           <a:lstStyle/>
           <a:p>
-            <a:pPr indent="0" marL="0">
+            <a:pPr algn="ctr" indent="0" marL="0">
               <a:buNone/>
             </a:pPr>
             <a:r>
-              <a:rPr lang="en-US" sz="1000" dirty="0">
-                <a:solidFill>
-                  <a:srgbClr val="6B6660"/>
+              <a:rPr lang="en-US" sz="1200" b="1" dirty="0">
+                <a:solidFill>
+                  <a:srgbClr val="FFFFFF"/>
                 </a:solidFill>
                 <a:latin typeface="Calibri" pitchFamily="34" charset="0"/>
                 <a:ea typeface="Calibri" pitchFamily="34" charset="-122"/>
                 <a:cs typeface="Calibri" pitchFamily="34" charset="-120"/>
               </a:rPr>
-              <a:t>Mr Zocchi · mrzocchi.com</a:t>
-            </a:r>
-            <a:endParaRPr lang="en-US" sz="1000" dirty="0"/>
+              <a:t>Term 2 · Chemistry</a:t>
+            </a:r>
+            <a:endParaRPr lang="en-US" sz="1200" dirty="0"/>
           </a:p>
         </p:txBody>
       </p:sp>
@@ -1293,7 +1404,7 @@
     <p:bg>
       <p:bgPr>
         <a:solidFill>
-          <a:srgbClr val="FFFFFF"/>
+          <a:srgbClr val="FAF8F5"/>
         </a:solidFill>
       </p:bgPr>
     </p:bg>
@@ -1339,8 +1450,8 @@
         </p:nvSpPr>
         <p:spPr>
           <a:xfrm>
-            <a:off x="548640" y="274320"/>
-            <a:ext cx="8046720" cy="640080"/>
+            <a:off x="7772400" y="4709160"/>
+            <a:ext cx="1097280" cy="320040"/>
           </a:xfrm>
           <a:prstGeom prst="rect">
             <a:avLst/>
@@ -1349,14 +1460,105 @@
           <a:ln/>
         </p:spPr>
         <p:txBody>
-          <a:bodyPr wrap="square" lIns="0" tIns="0" rIns="0" bIns="0" rtlCol="0" anchor="ctr"/>
+          <a:bodyPr wrap="square" rtlCol="0" anchor="ctr"/>
+          <a:lstStyle/>
+          <a:p>
+            <a:pPr algn="r" indent="0" marL="0">
+              <a:buNone/>
+            </a:pPr>
+            <a:r>
+              <a:rPr lang="en-US" sz="900" dirty="0">
+                <a:solidFill>
+                  <a:srgbClr val="6B6660"/>
+                </a:solidFill>
+                <a:latin typeface="Calibri" pitchFamily="34" charset="0"/>
+                <a:ea typeface="Calibri" pitchFamily="34" charset="-122"/>
+                <a:cs typeface="Calibri" pitchFamily="34" charset="-120"/>
+              </a:rPr>
+              <a:t>2 / 5</a:t>
+            </a:r>
+            <a:endParaRPr lang="en-US" sz="900" dirty="0"/>
+          </a:p>
+        </p:txBody>
+      </p:sp>
+      <p:sp>
+        <p:nvSpPr>
+          <p:cNvPr id="4" name="Shape 2"/>
+          <p:cNvSpPr/>
+          <p:nvPr/>
+        </p:nvSpPr>
+        <p:spPr>
+          <a:xfrm>
+            <a:off x="1371600" y="914400"/>
+            <a:ext cx="6400800" cy="3200400"/>
+          </a:xfrm>
+          <a:prstGeom prst="rect">
+            <a:avLst/>
+          </a:prstGeom>
+          <a:solidFill>
+            <a:srgbClr val="FFFFFF"/>
+          </a:solidFill>
+          <a:ln w="12700">
+            <a:solidFill>
+              <a:srgbClr val="E5E2DC"/>
+            </a:solidFill>
+            <a:prstDash val="solid"/>
+          </a:ln>
+          <a:effectLst>
+            <a:outerShdw sx="100000" sy="100000" kx="0" ky="0" algn="bl" rotWithShape="0" blurRad="50800" dist="25400" dir="8100000">
+              <a:srgbClr val="000000">
+                <a:alpha val="10000"/>
+              </a:srgbClr>
+            </a:outerShdw>
+          </a:effectLst>
+        </p:spPr>
+      </p:sp>
+      <p:sp>
+        <p:nvSpPr>
+          <p:cNvPr id="5" name="Shape 3"/>
+          <p:cNvSpPr/>
+          <p:nvPr/>
+        </p:nvSpPr>
+        <p:spPr>
+          <a:xfrm>
+            <a:off x="1371600" y="914400"/>
+            <a:ext cx="91440" cy="3200400"/>
+          </a:xfrm>
+          <a:prstGeom prst="rect">
+            <a:avLst/>
+          </a:prstGeom>
+          <a:solidFill>
+            <a:srgbClr val="2A9D8F"/>
+          </a:solidFill>
+          <a:ln/>
+        </p:spPr>
+      </p:sp>
+      <p:sp>
+        <p:nvSpPr>
+          <p:cNvPr id="6" name="Text 4"/>
+          <p:cNvSpPr/>
+          <p:nvPr/>
+        </p:nvSpPr>
+        <p:spPr>
+          <a:xfrm>
+            <a:off x="1828800" y="1097280"/>
+            <a:ext cx="5669280" cy="640080"/>
+          </a:xfrm>
+          <a:prstGeom prst="rect">
+            <a:avLst/>
+          </a:prstGeom>
+          <a:noFill/>
+          <a:ln/>
+        </p:spPr>
+        <p:txBody>
+          <a:bodyPr wrap="square" rtlCol="0" anchor="ctr"/>
           <a:lstStyle/>
           <a:p>
             <a:pPr indent="0" marL="0">
               <a:buNone/>
             </a:pPr>
             <a:r>
-              <a:rPr lang="en-US" sz="2600" b="1" dirty="0">
+              <a:rPr lang="en-US" sz="2400" b="1" dirty="0">
                 <a:solidFill>
                   <a:srgbClr val="1B2A4A"/>
                 </a:solidFill>
@@ -1364,22 +1566,22 @@
                 <a:ea typeface="Georgia" pitchFamily="34" charset="-122"/>
                 <a:cs typeface="Georgia" pitchFamily="34" charset="-120"/>
               </a:rPr>
-              <a:t>How States Change</a:t>
-            </a:r>
-            <a:endParaRPr lang="en-US" sz="2600" dirty="0"/>
-          </a:p>
-        </p:txBody>
-      </p:sp>
-      <p:sp>
-        <p:nvSpPr>
-          <p:cNvPr id="4" name="Text 2"/>
-          <p:cNvSpPr/>
-          <p:nvPr/>
-        </p:nvSpPr>
-        <p:spPr>
-          <a:xfrm>
-            <a:off x="548640" y="1097280"/>
-            <a:ext cx="8046720" cy="3474720"/>
+              <a:t>Changing Between States</a:t>
+            </a:r>
+            <a:endParaRPr lang="en-US" sz="2400" dirty="0"/>
+          </a:p>
+        </p:txBody>
+      </p:sp>
+      <p:sp>
+        <p:nvSpPr>
+          <p:cNvPr id="7" name="Text 5"/>
+          <p:cNvSpPr/>
+          <p:nvPr/>
+        </p:nvSpPr>
+        <p:spPr>
+          <a:xfrm>
+            <a:off x="1828800" y="1828800"/>
+            <a:ext cx="5669280" cy="2011680"/>
           </a:xfrm>
           <a:prstGeom prst="rect">
             <a:avLst/>
@@ -1391,12 +1593,11 @@
           <a:bodyPr wrap="square" rtlCol="0" anchor="t"/>
           <a:lstStyle/>
           <a:p>
-            <a:pPr marL="342900" indent="-342900">
-              <a:spcAft>
-                <a:spcPts val="800"/>
-              </a:spcAft>
-              <a:buSzPct val="100000"/>
-              <a:buChar char="•"/>
+            <a:pPr indent="0" marL="0">
+              <a:lnSpc>
+                <a:spcPct val="130000"/>
+              </a:lnSpc>
+              <a:buNone/>
             </a:pPr>
             <a:r>
               <a:rPr lang="en-US" sz="1500" dirty="0">
@@ -1407,170 +1608,9 @@
                 <a:ea typeface="Calibri" pitchFamily="34" charset="-122"/>
                 <a:cs typeface="Calibri" pitchFamily="34" charset="-120"/>
               </a:rPr>
-              <a:t>Adding heat energy makes particles move faster → state changes</a:t>
+              <a:t>Matter can change from one state to another by adding or removing energy (usually heat). These are physical changes — the substance stays the same, only the arrangement and energy of the particles changes. No new substances are formed.</a:t>
             </a:r>
             <a:endParaRPr lang="en-US" sz="1500" dirty="0"/>
-          </a:p>
-          <a:p>
-            <a:pPr marL="342900" indent="-342900">
-              <a:spcAft>
-                <a:spcPts val="800"/>
-              </a:spcAft>
-              <a:buSzPct val="100000"/>
-              <a:buChar char="•"/>
-            </a:pPr>
-            <a:r>
-              <a:rPr lang="en-US" sz="1500" dirty="0">
-                <a:solidFill>
-                  <a:srgbClr val="3D3A36"/>
-                </a:solidFill>
-                <a:latin typeface="Calibri" pitchFamily="34" charset="0"/>
-                <a:ea typeface="Calibri" pitchFamily="34" charset="-122"/>
-                <a:cs typeface="Calibri" pitchFamily="34" charset="-120"/>
-              </a:rPr>
-              <a:t>Removing heat energy slows particles down → state changes</a:t>
-            </a:r>
-            <a:endParaRPr lang="en-US" sz="1500" dirty="0"/>
-          </a:p>
-          <a:p>
-            <a:pPr marL="342900" indent="-342900">
-              <a:spcAft>
-                <a:spcPts val="800"/>
-              </a:spcAft>
-              <a:buSzPct val="100000"/>
-              <a:buChar char="•"/>
-            </a:pPr>
-            <a:r>
-              <a:rPr lang="en-US" sz="1500" dirty="0">
-                <a:solidFill>
-                  <a:srgbClr val="3D3A36"/>
-                </a:solidFill>
-                <a:latin typeface="Calibri" pitchFamily="34" charset="0"/>
-                <a:ea typeface="Calibri" pitchFamily="34" charset="-122"/>
-                <a:cs typeface="Calibri" pitchFamily="34" charset="-120"/>
-              </a:rPr>
-              <a:t>Melting: solid → liquid (e.g., ice → water at 0°C)</a:t>
-            </a:r>
-            <a:endParaRPr lang="en-US" sz="1500" dirty="0"/>
-          </a:p>
-          <a:p>
-            <a:pPr marL="342900" indent="-342900">
-              <a:spcAft>
-                <a:spcPts val="800"/>
-              </a:spcAft>
-              <a:buSzPct val="100000"/>
-              <a:buChar char="•"/>
-            </a:pPr>
-            <a:r>
-              <a:rPr lang="en-US" sz="1500" dirty="0">
-                <a:solidFill>
-                  <a:srgbClr val="3D3A36"/>
-                </a:solidFill>
-                <a:latin typeface="Calibri" pitchFamily="34" charset="0"/>
-                <a:ea typeface="Calibri" pitchFamily="34" charset="-122"/>
-                <a:cs typeface="Calibri" pitchFamily="34" charset="-120"/>
-              </a:rPr>
-              <a:t>Boiling/Evaporation: liquid → gas (water → steam at 100°C)</a:t>
-            </a:r>
-            <a:endParaRPr lang="en-US" sz="1500" dirty="0"/>
-          </a:p>
-          <a:p>
-            <a:pPr marL="342900" indent="-342900">
-              <a:spcAft>
-                <a:spcPts val="800"/>
-              </a:spcAft>
-              <a:buSzPct val="100000"/>
-              <a:buChar char="•"/>
-            </a:pPr>
-            <a:r>
-              <a:rPr lang="en-US" sz="1500" dirty="0">
-                <a:solidFill>
-                  <a:srgbClr val="3D3A36"/>
-                </a:solidFill>
-                <a:latin typeface="Calibri" pitchFamily="34" charset="0"/>
-                <a:ea typeface="Calibri" pitchFamily="34" charset="-122"/>
-                <a:cs typeface="Calibri" pitchFamily="34" charset="-120"/>
-              </a:rPr>
-              <a:t>Condensation: gas → liquid (steam → water droplets)</a:t>
-            </a:r>
-            <a:endParaRPr lang="en-US" sz="1500" dirty="0"/>
-          </a:p>
-          <a:p>
-            <a:pPr marL="342900" indent="-342900">
-              <a:spcAft>
-                <a:spcPts val="800"/>
-              </a:spcAft>
-              <a:buSzPct val="100000"/>
-              <a:buChar char="•"/>
-            </a:pPr>
-            <a:r>
-              <a:rPr lang="en-US" sz="1500" dirty="0">
-                <a:solidFill>
-                  <a:srgbClr val="3D3A36"/>
-                </a:solidFill>
-                <a:latin typeface="Calibri" pitchFamily="34" charset="0"/>
-                <a:ea typeface="Calibri" pitchFamily="34" charset="-122"/>
-                <a:cs typeface="Calibri" pitchFamily="34" charset="-120"/>
-              </a:rPr>
-              <a:t>Freezing: liquid → solid (water → ice at 0°C)</a:t>
-            </a:r>
-            <a:endParaRPr lang="en-US" sz="1500" dirty="0"/>
-          </a:p>
-        </p:txBody>
-      </p:sp>
-      <p:sp>
-        <p:nvSpPr>
-          <p:cNvPr id="5" name="Shape 3"/>
-          <p:cNvSpPr/>
-          <p:nvPr/>
-        </p:nvSpPr>
-        <p:spPr>
-          <a:xfrm>
-            <a:off x="548640" y="4754880"/>
-            <a:ext cx="8046720" cy="9144"/>
-          </a:xfrm>
-          <a:prstGeom prst="rect">
-            <a:avLst/>
-          </a:prstGeom>
-          <a:solidFill>
-            <a:srgbClr val="F3F1EE"/>
-          </a:solidFill>
-          <a:ln/>
-        </p:spPr>
-      </p:sp>
-      <p:sp>
-        <p:nvSpPr>
-          <p:cNvPr id="6" name="Text 4"/>
-          <p:cNvSpPr/>
-          <p:nvPr/>
-        </p:nvSpPr>
-        <p:spPr>
-          <a:xfrm>
-            <a:off x="548640" y="4800600"/>
-            <a:ext cx="3657600" cy="274320"/>
-          </a:xfrm>
-          <a:prstGeom prst="rect">
-            <a:avLst/>
-          </a:prstGeom>
-          <a:noFill/>
-          <a:ln/>
-        </p:spPr>
-        <p:txBody>
-          <a:bodyPr wrap="square" rtlCol="0" anchor="ctr"/>
-          <a:lstStyle/>
-          <a:p>
-            <a:pPr indent="0" marL="0">
-              <a:buNone/>
-            </a:pPr>
-            <a:r>
-              <a:rPr lang="en-US" sz="800" dirty="0">
-                <a:solidFill>
-                  <a:srgbClr val="9B9690"/>
-                </a:solidFill>
-              </a:rPr>
-              <a:t>mrzocchi.com</a:t>
-            </a:r>
-            <a:endParaRPr lang="en-US" sz="800" dirty="0"/>
           </a:p>
         </p:txBody>
       </p:sp>
@@ -1588,7 +1628,7 @@
     <p:bg>
       <p:bgPr>
         <a:solidFill>
-          <a:srgbClr val="FFFFFF"/>
+          <a:srgbClr val="FAF8F5"/>
         </a:solidFill>
       </p:bgPr>
     </p:bg>
@@ -1634,8 +1674,8 @@
         </p:nvSpPr>
         <p:spPr>
           <a:xfrm>
-            <a:off x="548640" y="274320"/>
-            <a:ext cx="8046720" cy="640080"/>
+            <a:off x="7772400" y="4709160"/>
+            <a:ext cx="1097280" cy="320040"/>
           </a:xfrm>
           <a:prstGeom prst="rect">
             <a:avLst/>
@@ -1644,7 +1684,46 @@
           <a:ln/>
         </p:spPr>
         <p:txBody>
-          <a:bodyPr wrap="square" lIns="0" tIns="0" rIns="0" bIns="0" rtlCol="0" anchor="ctr"/>
+          <a:bodyPr wrap="square" rtlCol="0" anchor="ctr"/>
+          <a:lstStyle/>
+          <a:p>
+            <a:pPr algn="r" indent="0" marL="0">
+              <a:buNone/>
+            </a:pPr>
+            <a:r>
+              <a:rPr lang="en-US" sz="900" dirty="0">
+                <a:solidFill>
+                  <a:srgbClr val="6B6660"/>
+                </a:solidFill>
+                <a:latin typeface="Calibri" pitchFamily="34" charset="0"/>
+                <a:ea typeface="Calibri" pitchFamily="34" charset="-122"/>
+                <a:cs typeface="Calibri" pitchFamily="34" charset="-120"/>
+              </a:rPr>
+              <a:t>3 / 5</a:t>
+            </a:r>
+            <a:endParaRPr lang="en-US" sz="900" dirty="0"/>
+          </a:p>
+        </p:txBody>
+      </p:sp>
+      <p:sp>
+        <p:nvSpPr>
+          <p:cNvPr id="4" name="Text 2"/>
+          <p:cNvSpPr/>
+          <p:nvPr/>
+        </p:nvSpPr>
+        <p:spPr>
+          <a:xfrm>
+            <a:off x="457200" y="274320"/>
+            <a:ext cx="8229600" cy="640080"/>
+          </a:xfrm>
+          <a:prstGeom prst="rect">
+            <a:avLst/>
+          </a:prstGeom>
+          <a:noFill/>
+          <a:ln/>
+        </p:spPr>
+        <p:txBody>
+          <a:bodyPr wrap="square" rtlCol="0" anchor="ctr"/>
           <a:lstStyle/>
           <a:p>
             <a:pPr indent="0" marL="0">
@@ -1659,7 +1738,7 @@
                 <a:ea typeface="Georgia" pitchFamily="34" charset="-122"/>
                 <a:cs typeface="Georgia" pitchFamily="34" charset="-120"/>
               </a:rPr>
-              <a:t>Heating vs Cooling</a:t>
+              <a:t>The Six Changes of State</a:t>
             </a:r>
             <a:endParaRPr lang="en-US" sz="2600" dirty="0"/>
           </a:p>
@@ -1667,22 +1746,27 @@
       </p:sp>
       <p:sp>
         <p:nvSpPr>
-          <p:cNvPr id="4" name="Shape 2"/>
-          <p:cNvSpPr/>
-          <p:nvPr/>
-        </p:nvSpPr>
-        <p:spPr>
-          <a:xfrm>
-            <a:off x="457200" y="1097280"/>
-            <a:ext cx="3840480" cy="3474720"/>
-          </a:xfrm>
-          <a:prstGeom prst="rect">
-            <a:avLst/>
-          </a:prstGeom>
-          <a:solidFill>
-            <a:srgbClr val="F3F1EE"/>
-          </a:solidFill>
-          <a:ln/>
+          <p:cNvPr id="5" name="Shape 3"/>
+          <p:cNvSpPr/>
+          <p:nvPr/>
+        </p:nvSpPr>
+        <p:spPr>
+          <a:xfrm>
+            <a:off x="457200" y="1188720"/>
+            <a:ext cx="2560320" cy="1828800"/>
+          </a:xfrm>
+          <a:prstGeom prst="rect">
+            <a:avLst/>
+          </a:prstGeom>
+          <a:solidFill>
+            <a:srgbClr val="FFFFFF"/>
+          </a:solidFill>
+          <a:ln w="12700">
+            <a:solidFill>
+              <a:srgbClr val="E5E2DC"/>
+            </a:solidFill>
+            <a:prstDash val="solid"/>
+          </a:ln>
           <a:effectLst>
             <a:outerShdw sx="100000" sy="100000" kx="0" ky="0" algn="bl" rotWithShape="0" blurRad="50800" dist="25400" dir="8100000">
               <a:srgbClr val="000000">
@@ -1694,14 +1778,34 @@
       </p:sp>
       <p:sp>
         <p:nvSpPr>
-          <p:cNvPr id="5" name="Text 3"/>
-          <p:cNvSpPr/>
-          <p:nvPr/>
-        </p:nvSpPr>
-        <p:spPr>
-          <a:xfrm>
-            <a:off x="640080" y="1234440"/>
-            <a:ext cx="3474720" cy="411480"/>
+          <p:cNvPr id="6" name="Shape 4"/>
+          <p:cNvSpPr/>
+          <p:nvPr/>
+        </p:nvSpPr>
+        <p:spPr>
+          <a:xfrm>
+            <a:off x="457200" y="1188720"/>
+            <a:ext cx="2560320" cy="54864"/>
+          </a:xfrm>
+          <a:prstGeom prst="rect">
+            <a:avLst/>
+          </a:prstGeom>
+          <a:solidFill>
+            <a:srgbClr val="2A9D8F"/>
+          </a:solidFill>
+          <a:ln/>
+        </p:spPr>
+      </p:sp>
+      <p:sp>
+        <p:nvSpPr>
+          <p:cNvPr id="7" name="Text 5"/>
+          <p:cNvSpPr/>
+          <p:nvPr/>
+        </p:nvSpPr>
+        <p:spPr>
+          <a:xfrm>
+            <a:off x="594360" y="1325880"/>
+            <a:ext cx="2286000" cy="365760"/>
           </a:xfrm>
           <a:prstGeom prst="rect">
             <a:avLst/>
@@ -1717,71 +1821,46 @@
               <a:buNone/>
             </a:pPr>
             <a:r>
-              <a:rPr lang="en-US" sz="1600" b="1" dirty="0">
+              <a:rPr lang="en-US" sz="1400" b="1" dirty="0">
                 <a:solidFill>
                   <a:srgbClr val="1B2A4A"/>
-                </a:solidFill>
-                <a:latin typeface="Georgia" pitchFamily="34" charset="0"/>
-                <a:ea typeface="Georgia" pitchFamily="34" charset="-122"/>
-                <a:cs typeface="Georgia" pitchFamily="34" charset="-120"/>
-              </a:rPr>
-              <a:t>Adding Energy ↑</a:t>
-            </a:r>
-            <a:endParaRPr lang="en-US" sz="1600" dirty="0"/>
-          </a:p>
-        </p:txBody>
-      </p:sp>
-      <p:sp>
-        <p:nvSpPr>
-          <p:cNvPr id="6" name="Text 4"/>
-          <p:cNvSpPr/>
-          <p:nvPr/>
-        </p:nvSpPr>
-        <p:spPr>
-          <a:xfrm>
-            <a:off x="640080" y="1737360"/>
-            <a:ext cx="3474720" cy="2651760"/>
-          </a:xfrm>
-          <a:prstGeom prst="rect">
-            <a:avLst/>
-          </a:prstGeom>
-          <a:noFill/>
-          <a:ln/>
-        </p:spPr>
-        <p:txBody>
-          <a:bodyPr wrap="square" rtlCol="0" anchor="t"/>
-          <a:lstStyle/>
-          <a:p>
-            <a:pPr marL="342900" indent="-342900">
-              <a:spcAft>
-                <a:spcPts val="600"/>
-              </a:spcAft>
-              <a:buSzPct val="100000"/>
-              <a:buChar char="•"/>
-            </a:pPr>
-            <a:r>
-              <a:rPr lang="en-US" sz="1300" dirty="0">
-                <a:solidFill>
-                  <a:srgbClr val="3D3A36"/>
                 </a:solidFill>
                 <a:latin typeface="Calibri" pitchFamily="34" charset="0"/>
                 <a:ea typeface="Calibri" pitchFamily="34" charset="-122"/>
                 <a:cs typeface="Calibri" pitchFamily="34" charset="-120"/>
               </a:rPr>
-              <a:t>Particles speed up</a:t>
-            </a:r>
-            <a:endParaRPr lang="en-US" sz="1300" dirty="0"/>
-          </a:p>
-          <a:p>
-            <a:pPr marL="342900" indent="-342900">
-              <a:spcAft>
-                <a:spcPts val="600"/>
-              </a:spcAft>
-              <a:buSzPct val="100000"/>
-              <a:buChar char="•"/>
-            </a:pPr>
-            <a:r>
-              <a:rPr lang="en-US" sz="1300" dirty="0">
+              <a:t>Melting &amp; Freezing</a:t>
+            </a:r>
+            <a:endParaRPr lang="en-US" sz="1400" dirty="0"/>
+          </a:p>
+        </p:txBody>
+      </p:sp>
+      <p:sp>
+        <p:nvSpPr>
+          <p:cNvPr id="8" name="Text 6"/>
+          <p:cNvSpPr/>
+          <p:nvPr/>
+        </p:nvSpPr>
+        <p:spPr>
+          <a:xfrm>
+            <a:off x="594360" y="1737360"/>
+            <a:ext cx="2286000" cy="1097280"/>
+          </a:xfrm>
+          <a:prstGeom prst="rect">
+            <a:avLst/>
+          </a:prstGeom>
+          <a:noFill/>
+          <a:ln/>
+        </p:spPr>
+        <p:txBody>
+          <a:bodyPr wrap="square" rtlCol="0" anchor="t"/>
+          <a:lstStyle/>
+          <a:p>
+            <a:pPr indent="0" marL="0">
+              <a:buNone/>
+            </a:pPr>
+            <a:r>
+              <a:rPr lang="en-US" sz="1100" dirty="0">
                 <a:solidFill>
                   <a:srgbClr val="3D3A36"/>
                 </a:solidFill>
@@ -1789,72 +1868,35 @@
                 <a:ea typeface="Calibri" pitchFamily="34" charset="-122"/>
                 <a:cs typeface="Calibri" pitchFamily="34" charset="-120"/>
               </a:rPr>
-              <a:t>Solid → Liquid (melting)</a:t>
-            </a:r>
-            <a:endParaRPr lang="en-US" sz="1300" dirty="0"/>
-          </a:p>
-          <a:p>
-            <a:pPr marL="342900" indent="-342900">
-              <a:spcAft>
-                <a:spcPts val="600"/>
-              </a:spcAft>
-              <a:buSzPct val="100000"/>
-              <a:buChar char="•"/>
-            </a:pPr>
-            <a:r>
-              <a:rPr lang="en-US" sz="1300" dirty="0">
-                <a:solidFill>
-                  <a:srgbClr val="3D3A36"/>
-                </a:solidFill>
-                <a:latin typeface="Calibri" pitchFamily="34" charset="0"/>
-                <a:ea typeface="Calibri" pitchFamily="34" charset="-122"/>
-                <a:cs typeface="Calibri" pitchFamily="34" charset="-120"/>
-              </a:rPr>
-              <a:t>Liquid → Gas (boiling)</a:t>
-            </a:r>
-            <a:endParaRPr lang="en-US" sz="1300" dirty="0"/>
-          </a:p>
-          <a:p>
-            <a:pPr marL="342900" indent="-342900">
-              <a:spcAft>
-                <a:spcPts val="600"/>
-              </a:spcAft>
-              <a:buSzPct val="100000"/>
-              <a:buChar char="•"/>
-            </a:pPr>
-            <a:r>
-              <a:rPr lang="en-US" sz="1300" dirty="0">
-                <a:solidFill>
-                  <a:srgbClr val="3D3A36"/>
-                </a:solidFill>
-                <a:latin typeface="Calibri" pitchFamily="34" charset="0"/>
-                <a:ea typeface="Calibri" pitchFamily="34" charset="-122"/>
-                <a:cs typeface="Calibri" pitchFamily="34" charset="-120"/>
-              </a:rPr>
-              <a:t>Sublimation: solid → gas directly</a:t>
-            </a:r>
-            <a:endParaRPr lang="en-US" sz="1300" dirty="0"/>
-          </a:p>
-        </p:txBody>
-      </p:sp>
-      <p:sp>
-        <p:nvSpPr>
-          <p:cNvPr id="7" name="Shape 5"/>
-          <p:cNvSpPr/>
-          <p:nvPr/>
-        </p:nvSpPr>
-        <p:spPr>
-          <a:xfrm>
-            <a:off x="4846320" y="1097280"/>
-            <a:ext cx="3840480" cy="3474720"/>
-          </a:xfrm>
-          <a:prstGeom prst="rect">
-            <a:avLst/>
-          </a:prstGeom>
-          <a:solidFill>
-            <a:srgbClr val="F3F1EE"/>
-          </a:solidFill>
-          <a:ln/>
+              <a:t>Melting: solid → liquid (add heat). Freezing: liquid → solid (remove heat). Water melts/freezes at 0°C. Particles gain/lose energy to break/form bonds.</a:t>
+            </a:r>
+            <a:endParaRPr lang="en-US" sz="1100" dirty="0"/>
+          </a:p>
+        </p:txBody>
+      </p:sp>
+      <p:sp>
+        <p:nvSpPr>
+          <p:cNvPr id="9" name="Shape 7"/>
+          <p:cNvSpPr/>
+          <p:nvPr/>
+        </p:nvSpPr>
+        <p:spPr>
+          <a:xfrm>
+            <a:off x="3291840" y="1188720"/>
+            <a:ext cx="2560320" cy="1828800"/>
+          </a:xfrm>
+          <a:prstGeom prst="rect">
+            <a:avLst/>
+          </a:prstGeom>
+          <a:solidFill>
+            <a:srgbClr val="FFFFFF"/>
+          </a:solidFill>
+          <a:ln w="12700">
+            <a:solidFill>
+              <a:srgbClr val="E5E2DC"/>
+            </a:solidFill>
+            <a:prstDash val="solid"/>
+          </a:ln>
           <a:effectLst>
             <a:outerShdw sx="100000" sy="100000" kx="0" ky="0" algn="bl" rotWithShape="0" blurRad="50800" dist="25400" dir="8100000">
               <a:srgbClr val="000000">
@@ -1866,14 +1908,34 @@
       </p:sp>
       <p:sp>
         <p:nvSpPr>
-          <p:cNvPr id="8" name="Text 6"/>
-          <p:cNvSpPr/>
-          <p:nvPr/>
-        </p:nvSpPr>
-        <p:spPr>
-          <a:xfrm>
-            <a:off x="5029200" y="1234440"/>
-            <a:ext cx="3474720" cy="411480"/>
+          <p:cNvPr id="10" name="Shape 8"/>
+          <p:cNvSpPr/>
+          <p:nvPr/>
+        </p:nvSpPr>
+        <p:spPr>
+          <a:xfrm>
+            <a:off x="3291840" y="1188720"/>
+            <a:ext cx="2560320" cy="54864"/>
+          </a:xfrm>
+          <a:prstGeom prst="rect">
+            <a:avLst/>
+          </a:prstGeom>
+          <a:solidFill>
+            <a:srgbClr val="2A9D8F"/>
+          </a:solidFill>
+          <a:ln/>
+        </p:spPr>
+      </p:sp>
+      <p:sp>
+        <p:nvSpPr>
+          <p:cNvPr id="11" name="Text 9"/>
+          <p:cNvSpPr/>
+          <p:nvPr/>
+        </p:nvSpPr>
+        <p:spPr>
+          <a:xfrm>
+            <a:off x="3429000" y="1325880"/>
+            <a:ext cx="2286000" cy="365760"/>
           </a:xfrm>
           <a:prstGeom prst="rect">
             <a:avLst/>
@@ -1889,71 +1951,46 @@
               <a:buNone/>
             </a:pPr>
             <a:r>
-              <a:rPr lang="en-US" sz="1600" b="1" dirty="0">
+              <a:rPr lang="en-US" sz="1400" b="1" dirty="0">
                 <a:solidFill>
                   <a:srgbClr val="1B2A4A"/>
-                </a:solidFill>
-                <a:latin typeface="Georgia" pitchFamily="34" charset="0"/>
-                <a:ea typeface="Georgia" pitchFamily="34" charset="-122"/>
-                <a:cs typeface="Georgia" pitchFamily="34" charset="-120"/>
-              </a:rPr>
-              <a:t>Removing Energy ↓</a:t>
-            </a:r>
-            <a:endParaRPr lang="en-US" sz="1600" dirty="0"/>
-          </a:p>
-        </p:txBody>
-      </p:sp>
-      <p:sp>
-        <p:nvSpPr>
-          <p:cNvPr id="9" name="Text 7"/>
-          <p:cNvSpPr/>
-          <p:nvPr/>
-        </p:nvSpPr>
-        <p:spPr>
-          <a:xfrm>
-            <a:off x="5029200" y="1737360"/>
-            <a:ext cx="3474720" cy="2651760"/>
-          </a:xfrm>
-          <a:prstGeom prst="rect">
-            <a:avLst/>
-          </a:prstGeom>
-          <a:noFill/>
-          <a:ln/>
-        </p:spPr>
-        <p:txBody>
-          <a:bodyPr wrap="square" rtlCol="0" anchor="t"/>
-          <a:lstStyle/>
-          <a:p>
-            <a:pPr marL="342900" indent="-342900">
-              <a:spcAft>
-                <a:spcPts val="600"/>
-              </a:spcAft>
-              <a:buSzPct val="100000"/>
-              <a:buChar char="•"/>
-            </a:pPr>
-            <a:r>
-              <a:rPr lang="en-US" sz="1300" dirty="0">
-                <a:solidFill>
-                  <a:srgbClr val="3D3A36"/>
                 </a:solidFill>
                 <a:latin typeface="Calibri" pitchFamily="34" charset="0"/>
                 <a:ea typeface="Calibri" pitchFamily="34" charset="-122"/>
                 <a:cs typeface="Calibri" pitchFamily="34" charset="-120"/>
               </a:rPr>
-              <a:t>Particles slow down</a:t>
-            </a:r>
-            <a:endParaRPr lang="en-US" sz="1300" dirty="0"/>
-          </a:p>
-          <a:p>
-            <a:pPr marL="342900" indent="-342900">
-              <a:spcAft>
-                <a:spcPts val="600"/>
-              </a:spcAft>
-              <a:buSzPct val="100000"/>
-              <a:buChar char="•"/>
-            </a:pPr>
-            <a:r>
-              <a:rPr lang="en-US" sz="1300" dirty="0">
+              <a:t>Evaporation &amp; Condensation</a:t>
+            </a:r>
+            <a:endParaRPr lang="en-US" sz="1400" dirty="0"/>
+          </a:p>
+        </p:txBody>
+      </p:sp>
+      <p:sp>
+        <p:nvSpPr>
+          <p:cNvPr id="12" name="Text 10"/>
+          <p:cNvSpPr/>
+          <p:nvPr/>
+        </p:nvSpPr>
+        <p:spPr>
+          <a:xfrm>
+            <a:off x="3429000" y="1737360"/>
+            <a:ext cx="2286000" cy="1097280"/>
+          </a:xfrm>
+          <a:prstGeom prst="rect">
+            <a:avLst/>
+          </a:prstGeom>
+          <a:noFill/>
+          <a:ln/>
+        </p:spPr>
+        <p:txBody>
+          <a:bodyPr wrap="square" rtlCol="0" anchor="t"/>
+          <a:lstStyle/>
+          <a:p>
+            <a:pPr indent="0" marL="0">
+              <a:buNone/>
+            </a:pPr>
+            <a:r>
+              <a:rPr lang="en-US" sz="1100" dirty="0">
                 <a:solidFill>
                   <a:srgbClr val="3D3A36"/>
                 </a:solidFill>
@@ -1961,41 +1998,129 @@
                 <a:ea typeface="Calibri" pitchFamily="34" charset="-122"/>
                 <a:cs typeface="Calibri" pitchFamily="34" charset="-120"/>
               </a:rPr>
-              <a:t>Gas → Liquid (condensation)</a:t>
-            </a:r>
-            <a:endParaRPr lang="en-US" sz="1300" dirty="0"/>
-          </a:p>
-          <a:p>
-            <a:pPr marL="342900" indent="-342900">
-              <a:spcAft>
-                <a:spcPts val="600"/>
-              </a:spcAft>
-              <a:buSzPct val="100000"/>
-              <a:buChar char="•"/>
-            </a:pPr>
-            <a:r>
-              <a:rPr lang="en-US" sz="1300" dirty="0">
-                <a:solidFill>
-                  <a:srgbClr val="3D3A36"/>
+              <a:t>Evaporation: liquid → gas (add heat). Condensation: gas → liquid (remove heat). Water boils at 100°C. Evaporation happens at ANY temperature from the surface.</a:t>
+            </a:r>
+            <a:endParaRPr lang="en-US" sz="1100" dirty="0"/>
+          </a:p>
+        </p:txBody>
+      </p:sp>
+      <p:sp>
+        <p:nvSpPr>
+          <p:cNvPr id="13" name="Shape 11"/>
+          <p:cNvSpPr/>
+          <p:nvPr/>
+        </p:nvSpPr>
+        <p:spPr>
+          <a:xfrm>
+            <a:off x="6126480" y="1188720"/>
+            <a:ext cx="2560320" cy="1828800"/>
+          </a:xfrm>
+          <a:prstGeom prst="rect">
+            <a:avLst/>
+          </a:prstGeom>
+          <a:solidFill>
+            <a:srgbClr val="FFFFFF"/>
+          </a:solidFill>
+          <a:ln w="12700">
+            <a:solidFill>
+              <a:srgbClr val="E5E2DC"/>
+            </a:solidFill>
+            <a:prstDash val="solid"/>
+          </a:ln>
+          <a:effectLst>
+            <a:outerShdw sx="100000" sy="100000" kx="0" ky="0" algn="bl" rotWithShape="0" blurRad="50800" dist="25400" dir="8100000">
+              <a:srgbClr val="000000">
+                <a:alpha val="10000"/>
+              </a:srgbClr>
+            </a:outerShdw>
+          </a:effectLst>
+        </p:spPr>
+      </p:sp>
+      <p:sp>
+        <p:nvSpPr>
+          <p:cNvPr id="14" name="Shape 12"/>
+          <p:cNvSpPr/>
+          <p:nvPr/>
+        </p:nvSpPr>
+        <p:spPr>
+          <a:xfrm>
+            <a:off x="6126480" y="1188720"/>
+            <a:ext cx="2560320" cy="54864"/>
+          </a:xfrm>
+          <a:prstGeom prst="rect">
+            <a:avLst/>
+          </a:prstGeom>
+          <a:solidFill>
+            <a:srgbClr val="2A9D8F"/>
+          </a:solidFill>
+          <a:ln/>
+        </p:spPr>
+      </p:sp>
+      <p:sp>
+        <p:nvSpPr>
+          <p:cNvPr id="15" name="Text 13"/>
+          <p:cNvSpPr/>
+          <p:nvPr/>
+        </p:nvSpPr>
+        <p:spPr>
+          <a:xfrm>
+            <a:off x="6263640" y="1325880"/>
+            <a:ext cx="2286000" cy="365760"/>
+          </a:xfrm>
+          <a:prstGeom prst="rect">
+            <a:avLst/>
+          </a:prstGeom>
+          <a:noFill/>
+          <a:ln/>
+        </p:spPr>
+        <p:txBody>
+          <a:bodyPr wrap="square" rtlCol="0" anchor="ctr"/>
+          <a:lstStyle/>
+          <a:p>
+            <a:pPr indent="0" marL="0">
+              <a:buNone/>
+            </a:pPr>
+            <a:r>
+              <a:rPr lang="en-US" sz="1400" b="1" dirty="0">
+                <a:solidFill>
+                  <a:srgbClr val="1B2A4A"/>
                 </a:solidFill>
                 <a:latin typeface="Calibri" pitchFamily="34" charset="0"/>
                 <a:ea typeface="Calibri" pitchFamily="34" charset="-122"/>
                 <a:cs typeface="Calibri" pitchFamily="34" charset="-120"/>
               </a:rPr>
-              <a:t>Liquid → Solid (freezing)</a:t>
-            </a:r>
-            <a:endParaRPr lang="en-US" sz="1300" dirty="0"/>
-          </a:p>
-          <a:p>
-            <a:pPr marL="342900" indent="-342900">
-              <a:spcAft>
-                <a:spcPts val="600"/>
-              </a:spcAft>
-              <a:buSzPct val="100000"/>
-              <a:buChar char="•"/>
-            </a:pPr>
-            <a:r>
-              <a:rPr lang="en-US" sz="1300" dirty="0">
+              <a:t>Sublimation &amp; Deposition</a:t>
+            </a:r>
+            <a:endParaRPr lang="en-US" sz="1400" dirty="0"/>
+          </a:p>
+        </p:txBody>
+      </p:sp>
+      <p:sp>
+        <p:nvSpPr>
+          <p:cNvPr id="16" name="Text 14"/>
+          <p:cNvSpPr/>
+          <p:nvPr/>
+        </p:nvSpPr>
+        <p:spPr>
+          <a:xfrm>
+            <a:off x="6263640" y="1737360"/>
+            <a:ext cx="2286000" cy="1097280"/>
+          </a:xfrm>
+          <a:prstGeom prst="rect">
+            <a:avLst/>
+          </a:prstGeom>
+          <a:noFill/>
+          <a:ln/>
+        </p:spPr>
+        <p:txBody>
+          <a:bodyPr wrap="square" rtlCol="0" anchor="t"/>
+          <a:lstStyle/>
+          <a:p>
+            <a:pPr indent="0" marL="0">
+              <a:buNone/>
+            </a:pPr>
+            <a:r>
+              <a:rPr lang="en-US" sz="1100" dirty="0">
                 <a:solidFill>
                   <a:srgbClr val="3D3A36"/>
                 </a:solidFill>
@@ -2003,45 +2128,9 @@
                 <a:ea typeface="Calibri" pitchFamily="34" charset="-122"/>
                 <a:cs typeface="Calibri" pitchFamily="34" charset="-120"/>
               </a:rPr>
-              <a:t>Temperature stays constant DURING state change</a:t>
-            </a:r>
-            <a:endParaRPr lang="en-US" sz="1300" dirty="0"/>
-          </a:p>
-        </p:txBody>
-      </p:sp>
-      <p:sp>
-        <p:nvSpPr>
-          <p:cNvPr id="10" name="Text 8"/>
-          <p:cNvSpPr/>
-          <p:nvPr/>
-        </p:nvSpPr>
-        <p:spPr>
-          <a:xfrm>
-            <a:off x="548640" y="4800600"/>
-            <a:ext cx="3657600" cy="274320"/>
-          </a:xfrm>
-          <a:prstGeom prst="rect">
-            <a:avLst/>
-          </a:prstGeom>
-          <a:noFill/>
-          <a:ln/>
-        </p:spPr>
-        <p:txBody>
-          <a:bodyPr wrap="square" rtlCol="0" anchor="ctr"/>
-          <a:lstStyle/>
-          <a:p>
-            <a:pPr indent="0" marL="0">
-              <a:buNone/>
-            </a:pPr>
-            <a:r>
-              <a:rPr lang="en-US" sz="800" dirty="0">
-                <a:solidFill>
-                  <a:srgbClr val="9B9690"/>
-                </a:solidFill>
-              </a:rPr>
-              <a:t>mrzocchi.com</a:t>
-            </a:r>
-            <a:endParaRPr lang="en-US" sz="800" dirty="0"/>
+              <a:t>Sublimation: solid → gas directly (skips liquid). Deposition: gas → solid directly. Example: dry ice (solid CO₂) sublimes. Frost forms by deposition.</a:t>
+            </a:r>
+            <a:endParaRPr lang="en-US" sz="1100" dirty="0"/>
           </a:p>
         </p:txBody>
       </p:sp>
@@ -2056,6 +2145,466 @@
 <file path=ppt/slides/slide4.xml><?xml version="1.0" encoding="utf-8"?>
 <p:sld xmlns:a="http://schemas.openxmlformats.org/drawingml/2006/main" xmlns:r="http://schemas.openxmlformats.org/officeDocument/2006/relationships" xmlns:p="http://schemas.openxmlformats.org/presentationml/2006/main">
   <p:cSld name="Slide 4">
+    <p:bg>
+      <p:bgPr>
+        <a:solidFill>
+          <a:srgbClr val="FAF8F5"/>
+        </a:solidFill>
+      </p:bgPr>
+    </p:bg>
+    <p:spTree>
+      <p:nvGrpSpPr>
+        <p:cNvPr id="1" name=""/>
+        <p:cNvGrpSpPr/>
+        <p:nvPr/>
+      </p:nvGrpSpPr>
+      <p:grpSpPr>
+        <a:xfrm>
+          <a:off x="0" y="0"/>
+          <a:ext cx="0" cy="0"/>
+          <a:chOff x="0" y="0"/>
+          <a:chExt cx="0" cy="0"/>
+        </a:xfrm>
+      </p:grpSpPr>
+      <p:sp>
+        <p:nvSpPr>
+          <p:cNvPr id="2" name="Shape 0"/>
+          <p:cNvSpPr/>
+          <p:nvPr/>
+        </p:nvSpPr>
+        <p:spPr>
+          <a:xfrm>
+            <a:off x="0" y="0"/>
+            <a:ext cx="9144000" cy="54864"/>
+          </a:xfrm>
+          <a:prstGeom prst="rect">
+            <a:avLst/>
+          </a:prstGeom>
+          <a:solidFill>
+            <a:srgbClr val="2A9D8F"/>
+          </a:solidFill>
+          <a:ln/>
+        </p:spPr>
+      </p:sp>
+      <p:sp>
+        <p:nvSpPr>
+          <p:cNvPr id="3" name="Text 1"/>
+          <p:cNvSpPr/>
+          <p:nvPr/>
+        </p:nvSpPr>
+        <p:spPr>
+          <a:xfrm>
+            <a:off x="7772400" y="4709160"/>
+            <a:ext cx="1097280" cy="320040"/>
+          </a:xfrm>
+          <a:prstGeom prst="rect">
+            <a:avLst/>
+          </a:prstGeom>
+          <a:noFill/>
+          <a:ln/>
+        </p:spPr>
+        <p:txBody>
+          <a:bodyPr wrap="square" rtlCol="0" anchor="ctr"/>
+          <a:lstStyle/>
+          <a:p>
+            <a:pPr algn="r" indent="0" marL="0">
+              <a:buNone/>
+            </a:pPr>
+            <a:r>
+              <a:rPr lang="en-US" sz="900" dirty="0">
+                <a:solidFill>
+                  <a:srgbClr val="6B6660"/>
+                </a:solidFill>
+                <a:latin typeface="Calibri" pitchFamily="34" charset="0"/>
+                <a:ea typeface="Calibri" pitchFamily="34" charset="-122"/>
+                <a:cs typeface="Calibri" pitchFamily="34" charset="-120"/>
+              </a:rPr>
+              <a:t>4 / 5</a:t>
+            </a:r>
+            <a:endParaRPr lang="en-US" sz="900" dirty="0"/>
+          </a:p>
+        </p:txBody>
+      </p:sp>
+      <p:sp>
+        <p:nvSpPr>
+          <p:cNvPr id="4" name="Text 2"/>
+          <p:cNvSpPr/>
+          <p:nvPr/>
+        </p:nvSpPr>
+        <p:spPr>
+          <a:xfrm>
+            <a:off x="457200" y="274320"/>
+            <a:ext cx="8229600" cy="640080"/>
+          </a:xfrm>
+          <a:prstGeom prst="rect">
+            <a:avLst/>
+          </a:prstGeom>
+          <a:noFill/>
+          <a:ln/>
+        </p:spPr>
+        <p:txBody>
+          <a:bodyPr wrap="square" rtlCol="0" anchor="ctr"/>
+          <a:lstStyle/>
+          <a:p>
+            <a:pPr indent="0" marL="0">
+              <a:buNone/>
+            </a:pPr>
+            <a:r>
+              <a:rPr lang="en-US" sz="2600" b="1" dirty="0">
+                <a:solidFill>
+                  <a:srgbClr val="1B2A4A"/>
+                </a:solidFill>
+                <a:latin typeface="Georgia" pitchFamily="34" charset="0"/>
+                <a:ea typeface="Georgia" pitchFamily="34" charset="-122"/>
+                <a:cs typeface="Georgia" pitchFamily="34" charset="-120"/>
+              </a:rPr>
+              <a:t>Heating and Cooling Curves</a:t>
+            </a:r>
+            <a:endParaRPr lang="en-US" sz="2600" dirty="0"/>
+          </a:p>
+        </p:txBody>
+      </p:sp>
+      <p:sp>
+        <p:nvSpPr>
+          <p:cNvPr id="5" name="Text 3"/>
+          <p:cNvSpPr/>
+          <p:nvPr/>
+        </p:nvSpPr>
+        <p:spPr>
+          <a:xfrm>
+            <a:off x="457200" y="1188720"/>
+            <a:ext cx="3840480" cy="3474720"/>
+          </a:xfrm>
+          <a:prstGeom prst="rect">
+            <a:avLst/>
+          </a:prstGeom>
+          <a:noFill/>
+          <a:ln/>
+        </p:spPr>
+        <p:txBody>
+          <a:bodyPr wrap="square" rtlCol="0" anchor="t"/>
+          <a:lstStyle/>
+          <a:p>
+            <a:pPr marL="342900" indent="-342900">
+              <a:spcAft>
+                <a:spcPts val="600"/>
+              </a:spcAft>
+              <a:buSzPct val="100000"/>
+              <a:buChar char="•"/>
+            </a:pPr>
+            <a:r>
+              <a:rPr lang="en-US" sz="1400" dirty="0">
+                <a:solidFill>
+                  <a:srgbClr val="3D3A36"/>
+                </a:solidFill>
+                <a:latin typeface="Calibri" pitchFamily="34" charset="0"/>
+                <a:ea typeface="Calibri" pitchFamily="34" charset="-122"/>
+                <a:cs typeface="Calibri" pitchFamily="34" charset="-120"/>
+              </a:rPr>
+              <a:t>When you heat a substance, temperature rises steadily</a:t>
+            </a:r>
+            <a:endParaRPr lang="en-US" sz="1400" dirty="0"/>
+          </a:p>
+          <a:p>
+            <a:pPr marL="342900" indent="-342900">
+              <a:spcAft>
+                <a:spcPts val="600"/>
+              </a:spcAft>
+              <a:buSzPct val="100000"/>
+              <a:buChar char="•"/>
+            </a:pPr>
+            <a:r>
+              <a:rPr lang="en-US" sz="1400" dirty="0">
+                <a:solidFill>
+                  <a:srgbClr val="3D3A36"/>
+                </a:solidFill>
+                <a:latin typeface="Calibri" pitchFamily="34" charset="0"/>
+                <a:ea typeface="Calibri" pitchFamily="34" charset="-122"/>
+                <a:cs typeface="Calibri" pitchFamily="34" charset="-120"/>
+              </a:rPr>
+              <a:t>At the melting point, temperature STOPS rising — energy breaks bonds instead</a:t>
+            </a:r>
+            <a:endParaRPr lang="en-US" sz="1400" dirty="0"/>
+          </a:p>
+          <a:p>
+            <a:pPr marL="342900" indent="-342900">
+              <a:spcAft>
+                <a:spcPts val="600"/>
+              </a:spcAft>
+              <a:buSzPct val="100000"/>
+              <a:buChar char="•"/>
+            </a:pPr>
+            <a:r>
+              <a:rPr lang="en-US" sz="1400" dirty="0">
+                <a:solidFill>
+                  <a:srgbClr val="3D3A36"/>
+                </a:solidFill>
+                <a:latin typeface="Calibri" pitchFamily="34" charset="0"/>
+                <a:ea typeface="Calibri" pitchFamily="34" charset="-122"/>
+                <a:cs typeface="Calibri" pitchFamily="34" charset="-120"/>
+              </a:rPr>
+              <a:t>Once all solid has melted, temperature rises again</a:t>
+            </a:r>
+            <a:endParaRPr lang="en-US" sz="1400" dirty="0"/>
+          </a:p>
+          <a:p>
+            <a:pPr marL="342900" indent="-342900">
+              <a:spcAft>
+                <a:spcPts val="600"/>
+              </a:spcAft>
+              <a:buSzPct val="100000"/>
+              <a:buChar char="•"/>
+            </a:pPr>
+            <a:r>
+              <a:rPr lang="en-US" sz="1400" dirty="0">
+                <a:solidFill>
+                  <a:srgbClr val="3D3A36"/>
+                </a:solidFill>
+                <a:latin typeface="Calibri" pitchFamily="34" charset="0"/>
+                <a:ea typeface="Calibri" pitchFamily="34" charset="-122"/>
+                <a:cs typeface="Calibri" pitchFamily="34" charset="-120"/>
+              </a:rPr>
+              <a:t>Same flat section at the boiling point</a:t>
+            </a:r>
+            <a:endParaRPr lang="en-US" sz="1400" dirty="0"/>
+          </a:p>
+          <a:p>
+            <a:pPr marL="342900" indent="-342900">
+              <a:spcAft>
+                <a:spcPts val="600"/>
+              </a:spcAft>
+              <a:buSzPct val="100000"/>
+              <a:buChar char="•"/>
+            </a:pPr>
+            <a:r>
+              <a:rPr lang="en-US" sz="1400" dirty="0">
+                <a:solidFill>
+                  <a:srgbClr val="3D3A36"/>
+                </a:solidFill>
+                <a:latin typeface="Calibri" pitchFamily="34" charset="0"/>
+                <a:ea typeface="Calibri" pitchFamily="34" charset="-122"/>
+                <a:cs typeface="Calibri" pitchFamily="34" charset="-120"/>
+              </a:rPr>
+              <a:t>The flat sections are where changes of state happen</a:t>
+            </a:r>
+            <a:endParaRPr lang="en-US" sz="1400" dirty="0"/>
+          </a:p>
+        </p:txBody>
+      </p:sp>
+      <p:sp>
+        <p:nvSpPr>
+          <p:cNvPr id="6" name="Shape 4"/>
+          <p:cNvSpPr/>
+          <p:nvPr/>
+        </p:nvSpPr>
+        <p:spPr>
+          <a:xfrm>
+            <a:off x="4846320" y="1188720"/>
+            <a:ext cx="3840480" cy="3474720"/>
+          </a:xfrm>
+          <a:prstGeom prst="rect">
+            <a:avLst/>
+          </a:prstGeom>
+          <a:solidFill>
+            <a:srgbClr val="FFFFFF"/>
+          </a:solidFill>
+          <a:ln w="12700">
+            <a:solidFill>
+              <a:srgbClr val="E5E2DC"/>
+            </a:solidFill>
+            <a:prstDash val="solid"/>
+          </a:ln>
+          <a:effectLst>
+            <a:outerShdw sx="100000" sy="100000" kx="0" ky="0" algn="bl" rotWithShape="0" blurRad="50800" dist="25400" dir="8100000">
+              <a:srgbClr val="000000">
+                <a:alpha val="10000"/>
+              </a:srgbClr>
+            </a:outerShdw>
+          </a:effectLst>
+        </p:spPr>
+      </p:sp>
+      <p:sp>
+        <p:nvSpPr>
+          <p:cNvPr id="7" name="Shape 5"/>
+          <p:cNvSpPr/>
+          <p:nvPr/>
+        </p:nvSpPr>
+        <p:spPr>
+          <a:xfrm>
+            <a:off x="4846320" y="1188720"/>
+            <a:ext cx="3840480" cy="54864"/>
+          </a:xfrm>
+          <a:prstGeom prst="rect">
+            <a:avLst/>
+          </a:prstGeom>
+          <a:solidFill>
+            <a:srgbClr val="2A9D8F"/>
+          </a:solidFill>
+          <a:ln/>
+        </p:spPr>
+      </p:sp>
+      <p:sp>
+        <p:nvSpPr>
+          <p:cNvPr id="8" name="Text 6"/>
+          <p:cNvSpPr/>
+          <p:nvPr/>
+        </p:nvSpPr>
+        <p:spPr>
+          <a:xfrm>
+            <a:off x="5120640" y="1371600"/>
+            <a:ext cx="3291840" cy="3108960"/>
+          </a:xfrm>
+          <a:prstGeom prst="rect">
+            <a:avLst/>
+          </a:prstGeom>
+          <a:noFill/>
+          <a:ln/>
+        </p:spPr>
+        <p:txBody>
+          <a:bodyPr wrap="square" rtlCol="0" anchor="t"/>
+          <a:lstStyle/>
+          <a:p>
+            <a:pPr indent="0" marL="0">
+              <a:spcAft>
+                <a:spcPts val="400"/>
+              </a:spcAft>
+              <a:buNone/>
+            </a:pPr>
+            <a:r>
+              <a:rPr lang="en-US" sz="1600" b="1" dirty="0">
+                <a:solidFill>
+                  <a:srgbClr val="1B2A4A"/>
+                </a:solidFill>
+                <a:latin typeface="Calibri" pitchFamily="34" charset="0"/>
+                <a:ea typeface="Calibri" pitchFamily="34" charset="-122"/>
+                <a:cs typeface="Calibri" pitchFamily="34" charset="-120"/>
+              </a:rPr>
+              <a:t>Physical vs Chemical Change</a:t>
+            </a:r>
+            <a:endParaRPr lang="en-US" sz="1600" dirty="0"/>
+          </a:p>
+          <a:p>
+            <a:pPr indent="0" marL="0">
+              <a:spcAft>
+                <a:spcPts val="400"/>
+              </a:spcAft>
+              <a:buNone/>
+            </a:pPr>
+            <a:endParaRPr lang="en-US" sz="1600" dirty="0"/>
+          </a:p>
+          <a:p>
+            <a:pPr indent="0" marL="0">
+              <a:spcAft>
+                <a:spcPts val="400"/>
+              </a:spcAft>
+              <a:buNone/>
+            </a:pPr>
+            <a:r>
+              <a:rPr lang="en-US" sz="1300" dirty="0">
+                <a:solidFill>
+                  <a:srgbClr val="3D3A36"/>
+                </a:solidFill>
+                <a:latin typeface="Calibri" pitchFamily="34" charset="0"/>
+                <a:ea typeface="Calibri" pitchFamily="34" charset="-122"/>
+                <a:cs typeface="Calibri" pitchFamily="34" charset="-120"/>
+              </a:rPr>
+              <a:t>Changes of state are PHYSICAL changes</a:t>
+            </a:r>
+            <a:endParaRPr lang="en-US" sz="1600" dirty="0"/>
+          </a:p>
+          <a:p>
+            <a:pPr indent="0" marL="0">
+              <a:spcAft>
+                <a:spcPts val="400"/>
+              </a:spcAft>
+              <a:buNone/>
+            </a:pPr>
+            <a:r>
+              <a:rPr lang="en-US" sz="1300" dirty="0">
+                <a:solidFill>
+                  <a:srgbClr val="3D3A36"/>
+                </a:solidFill>
+                <a:latin typeface="Calibri" pitchFamily="34" charset="0"/>
+                <a:ea typeface="Calibri" pitchFamily="34" charset="-122"/>
+                <a:cs typeface="Calibri" pitchFamily="34" charset="-120"/>
+              </a:rPr>
+              <a:t>The substance is still the same (water is still H₂O)</a:t>
+            </a:r>
+            <a:endParaRPr lang="en-US" sz="1600" dirty="0"/>
+          </a:p>
+          <a:p>
+            <a:pPr indent="0" marL="0">
+              <a:spcAft>
+                <a:spcPts val="400"/>
+              </a:spcAft>
+              <a:buNone/>
+            </a:pPr>
+            <a:r>
+              <a:rPr lang="en-US" sz="1300" dirty="0">
+                <a:solidFill>
+                  <a:srgbClr val="3D3A36"/>
+                </a:solidFill>
+                <a:latin typeface="Calibri" pitchFamily="34" charset="0"/>
+                <a:ea typeface="Calibri" pitchFamily="34" charset="-122"/>
+                <a:cs typeface="Calibri" pitchFamily="34" charset="-120"/>
+              </a:rPr>
+              <a:t>Physical changes are reversible</a:t>
+            </a:r>
+            <a:endParaRPr lang="en-US" sz="1600" dirty="0"/>
+          </a:p>
+          <a:p>
+            <a:pPr indent="0" marL="0">
+              <a:spcAft>
+                <a:spcPts val="400"/>
+              </a:spcAft>
+              <a:buNone/>
+            </a:pPr>
+            <a:r>
+              <a:rPr lang="en-US" sz="1300" dirty="0">
+                <a:solidFill>
+                  <a:srgbClr val="3D3A36"/>
+                </a:solidFill>
+                <a:latin typeface="Calibri" pitchFamily="34" charset="0"/>
+                <a:ea typeface="Calibri" pitchFamily="34" charset="-122"/>
+                <a:cs typeface="Calibri" pitchFamily="34" charset="-120"/>
+              </a:rPr>
+              <a:t>Chemical changes form NEW substances (irreversible)</a:t>
+            </a:r>
+            <a:endParaRPr lang="en-US" sz="1600" dirty="0"/>
+          </a:p>
+          <a:p>
+            <a:pPr indent="0" marL="0">
+              <a:spcAft>
+                <a:spcPts val="400"/>
+              </a:spcAft>
+              <a:buNone/>
+            </a:pPr>
+            <a:r>
+              <a:rPr lang="en-US" sz="1300" dirty="0">
+                <a:solidFill>
+                  <a:srgbClr val="3D3A36"/>
+                </a:solidFill>
+                <a:latin typeface="Calibri" pitchFamily="34" charset="0"/>
+                <a:ea typeface="Calibri" pitchFamily="34" charset="-122"/>
+                <a:cs typeface="Calibri" pitchFamily="34" charset="-120"/>
+              </a:rPr>
+              <a:t>Examples of chemical changes: burning, rusting, cooking</a:t>
+            </a:r>
+            <a:endParaRPr lang="en-US" sz="1600" dirty="0"/>
+          </a:p>
+        </p:txBody>
+      </p:sp>
+    </p:spTree>
+  </p:cSld>
+  <p:clrMapOvr>
+    <a:masterClrMapping/>
+  </p:clrMapOvr>
+</p:sld>
+</file>
+
+<file path=ppt/slides/slide5.xml><?xml version="1.0" encoding="utf-8"?>
+<p:sld xmlns:a="http://schemas.openxmlformats.org/drawingml/2006/main" xmlns:r="http://schemas.openxmlformats.org/officeDocument/2006/relationships" xmlns:p="http://schemas.openxmlformats.org/presentationml/2006/main">
+  <p:cSld name="Slide 5">
     <p:bg>
       <p:bgPr>
         <a:solidFill>
@@ -2086,13 +2635,13 @@
         <p:spPr>
           <a:xfrm>
             <a:off x="0" y="0"/>
-            <a:ext cx="9144000" cy="54864"/>
-          </a:xfrm>
-          <a:prstGeom prst="rect">
-            <a:avLst/>
-          </a:prstGeom>
-          <a:solidFill>
-            <a:srgbClr val="2A9D8F"/>
+            <a:ext cx="109728" cy="5143500"/>
+          </a:xfrm>
+          <a:prstGeom prst="rect">
+            <a:avLst/>
+          </a:prstGeom>
+          <a:solidFill>
+            <a:srgbClr val="E9C46A"/>
           </a:solidFill>
           <a:ln/>
         </p:spPr>
@@ -2105,8 +2654,8 @@
         </p:nvSpPr>
         <p:spPr>
           <a:xfrm>
-            <a:off x="548640" y="457200"/>
-            <a:ext cx="8046720" cy="640080"/>
+            <a:off x="731520" y="457200"/>
+            <a:ext cx="7772400" cy="731520"/>
           </a:xfrm>
           <a:prstGeom prst="rect">
             <a:avLst/>
@@ -2122,7 +2671,7 @@
               <a:buNone/>
             </a:pPr>
             <a:r>
-              <a:rPr lang="en-US" sz="2800" b="1" dirty="0">
+              <a:rPr lang="en-US" sz="3200" b="1" dirty="0">
                 <a:solidFill>
                   <a:srgbClr val="FFFFFF"/>
                 </a:solidFill>
@@ -2132,7 +2681,7 @@
               </a:rPr>
               <a:t>Key Takeaways</a:t>
             </a:r>
-            <a:endParaRPr lang="en-US" sz="2800" dirty="0"/>
+            <a:endParaRPr lang="en-US" sz="3200" dirty="0"/>
           </a:p>
         </p:txBody>
       </p:sp>
@@ -2144,8 +2693,8 @@
         </p:nvSpPr>
         <p:spPr>
           <a:xfrm>
-            <a:off x="731520" y="1371600"/>
-            <a:ext cx="7680960" cy="3200400"/>
+            <a:off x="731520" y="1463040"/>
+            <a:ext cx="7772400" cy="3200400"/>
           </a:xfrm>
           <a:prstGeom prst="rect">
             <a:avLst/>
@@ -2165,7 +2714,7 @@
               <a:buChar char="•"/>
             </a:pPr>
             <a:r>
-              <a:rPr lang="en-US" sz="1600" dirty="0">
+              <a:rPr lang="en-US" sz="1500" dirty="0">
                 <a:solidFill>
                   <a:srgbClr val="CADCFC"/>
                 </a:solidFill>
@@ -2173,9 +2722,9 @@
                 <a:ea typeface="Calibri" pitchFamily="34" charset="-122"/>
                 <a:cs typeface="Calibri" pitchFamily="34" charset="-120"/>
               </a:rPr>
-              <a:t>State changes happen when energy is added or removed</a:t>
-            </a:r>
-            <a:endParaRPr lang="en-US" sz="1600" dirty="0"/>
+              <a:t>Melting, freezing, evaporation, condensation, sublimation, deposition</a:t>
+            </a:r>
+            <a:endParaRPr lang="en-US" sz="1500" dirty="0"/>
           </a:p>
           <a:p>
             <a:pPr marL="342900" indent="-342900">
@@ -2186,7 +2735,7 @@
               <a:buChar char="•"/>
             </a:pPr>
             <a:r>
-              <a:rPr lang="en-US" sz="1600" dirty="0">
+              <a:rPr lang="en-US" sz="1500" dirty="0">
                 <a:solidFill>
                   <a:srgbClr val="CADCFC"/>
                 </a:solidFill>
@@ -2194,9 +2743,9 @@
                 <a:ea typeface="Calibri" pitchFamily="34" charset="-122"/>
                 <a:cs typeface="Calibri" pitchFamily="34" charset="-120"/>
               </a:rPr>
-              <a:t>Melting, boiling, evaporation = adding energy</a:t>
-            </a:r>
-            <a:endParaRPr lang="en-US" sz="1600" dirty="0"/>
+              <a:t>Changes of state are physical changes — reversible, no new substances</a:t>
+            </a:r>
+            <a:endParaRPr lang="en-US" sz="1500" dirty="0"/>
           </a:p>
           <a:p>
             <a:pPr marL="342900" indent="-342900">
@@ -2207,7 +2756,7 @@
               <a:buChar char="•"/>
             </a:pPr>
             <a:r>
-              <a:rPr lang="en-US" sz="1600" dirty="0">
+              <a:rPr lang="en-US" sz="1500" dirty="0">
                 <a:solidFill>
                   <a:srgbClr val="CADCFC"/>
                 </a:solidFill>
@@ -2215,9 +2764,9 @@
                 <a:ea typeface="Calibri" pitchFamily="34" charset="-122"/>
                 <a:cs typeface="Calibri" pitchFamily="34" charset="-120"/>
               </a:rPr>
-              <a:t>Freezing, condensation = removing energy</a:t>
-            </a:r>
-            <a:endParaRPr lang="en-US" sz="1600" dirty="0"/>
+              <a:t>Energy is added to melt/evaporate, removed to freeze/condense</a:t>
+            </a:r>
+            <a:endParaRPr lang="en-US" sz="1500" dirty="0"/>
           </a:p>
           <a:p>
             <a:pPr marL="342900" indent="-342900">
@@ -2228,7 +2777,7 @@
               <a:buChar char="•"/>
             </a:pPr>
             <a:r>
-              <a:rPr lang="en-US" sz="1600" dirty="0">
+              <a:rPr lang="en-US" sz="1500" dirty="0">
                 <a:solidFill>
                   <a:srgbClr val="CADCFC"/>
                 </a:solidFill>
@@ -2236,9 +2785,30 @@
                 <a:ea typeface="Calibri" pitchFamily="34" charset="-122"/>
                 <a:cs typeface="Calibri" pitchFamily="34" charset="-120"/>
               </a:rPr>
-              <a:t>During a state change, temperature stays constant (energy breaks bonds)</a:t>
-            </a:r>
-            <a:endParaRPr lang="en-US" sz="1600" dirty="0"/>
+              <a:t>Temperature stays flat during a change of state (energy breaks bonds)</a:t>
+            </a:r>
+            <a:endParaRPr lang="en-US" sz="1500" dirty="0"/>
+          </a:p>
+          <a:p>
+            <a:pPr marL="342900" indent="-342900">
+              <a:spcAft>
+                <a:spcPts val="1000"/>
+              </a:spcAft>
+              <a:buSzPct val="100000"/>
+              <a:buChar char="•"/>
+            </a:pPr>
+            <a:r>
+              <a:rPr lang="en-US" sz="1500" dirty="0">
+                <a:solidFill>
+                  <a:srgbClr val="CADCFC"/>
+                </a:solidFill>
+                <a:latin typeface="Calibri" pitchFamily="34" charset="0"/>
+                <a:ea typeface="Calibri" pitchFamily="34" charset="-122"/>
+                <a:cs typeface="Calibri" pitchFamily="34" charset="-120"/>
+              </a:rPr>
+              <a:t>Evaporation happens at the surface at any temperature; boiling happens throughout at boiling point</a:t>
+            </a:r>
+            <a:endParaRPr lang="en-US" sz="1500" dirty="0"/>
           </a:p>
         </p:txBody>
       </p:sp>
@@ -2250,8 +2820,8 @@
         </p:nvSpPr>
         <p:spPr>
           <a:xfrm>
-            <a:off x="548640" y="4572000"/>
-            <a:ext cx="3657600" cy="274320"/>
+            <a:off x="731520" y="4572000"/>
+            <a:ext cx="7772400" cy="365760"/>
           </a:xfrm>
           <a:prstGeom prst="rect">
             <a:avLst/>
@@ -2267,14 +2837,17 @@
               <a:buNone/>
             </a:pPr>
             <a:r>
-              <a:rPr lang="en-US" sz="1000" dirty="0">
-                <a:solidFill>
-                  <a:srgbClr val="6B6660"/>
-                </a:solidFill>
+              <a:rPr lang="en-US" sz="1100" dirty="0">
+                <a:solidFill>
+                  <a:srgbClr val="E9C46A"/>
+                </a:solidFill>
+                <a:latin typeface="Calibri" pitchFamily="34" charset="0"/>
+                <a:ea typeface="Calibri" pitchFamily="34" charset="-122"/>
+                <a:cs typeface="Calibri" pitchFamily="34" charset="-120"/>
               </a:rPr>
               <a:t>mrzocchi.com</a:t>
             </a:r>
-            <a:endParaRPr lang="en-US" sz="1000" dirty="0"/>
+            <a:endParaRPr lang="en-US" sz="1100" dirty="0"/>
           </a:p>
         </p:txBody>
       </p:sp>

--- a/static/ppts/G6_Sci_T2_Changes_of_State.pptx
+++ b/static/ppts/G6_Sci_T2_Changes_of_State.pptx
@@ -10,9 +10,12 @@
     <p:sldId id="258" r:id="rId4"/>
     <p:sldId id="259" r:id="rId5"/>
     <p:sldId id="260" r:id="rId6"/>
+    <p:sldId id="261" r:id="rId7"/>
+    <p:sldId id="262" r:id="rId8"/>
+    <p:sldId id="263" r:id="rId9"/>
   </p:sldIdLst>
   <p:notesMasterIdLst>
-    <p:notesMasterId r:id="rId7"/>
+    <p:notesMasterId r:id="rId10"/>
   </p:notesMasterIdLst>
   <p:sldSz cx="9144000" cy="5143500"/>
   <p:notesSz cx="5143500" cy="9144000"/>
@@ -900,6 +903,270 @@
 </p:notes>
 </file>
 
+<file path=ppt/notesSlides/notesSlide6.xml><?xml version="1.0" encoding="utf-8"?>
+<p:notes xmlns:a="http://schemas.openxmlformats.org/drawingml/2006/main" xmlns:r="http://schemas.openxmlformats.org/officeDocument/2006/relationships" xmlns:p="http://schemas.openxmlformats.org/presentationml/2006/main">
+  <p:cSld>
+    <p:spTree>
+      <p:nvGrpSpPr>
+        <p:cNvPr id="1" name=""/>
+        <p:cNvGrpSpPr/>
+        <p:nvPr/>
+      </p:nvGrpSpPr>
+      <p:grpSpPr>
+        <a:xfrm>
+          <a:off x="0" y="0"/>
+          <a:ext cx="0" cy="0"/>
+          <a:chOff x="0" y="0"/>
+          <a:chExt cx="0" cy="0"/>
+        </a:xfrm>
+      </p:grpSpPr>
+      <p:sp>
+        <p:nvSpPr>
+          <p:cNvPr id="2" name="Slide Image Placeholder 1"/>
+          <p:cNvSpPr>
+            <a:spLocks noGrp="1" noRot="1" noChangeAspect="1"/>
+          </p:cNvSpPr>
+          <p:nvPr>
+            <p:ph type="sldImg"/>
+          </p:nvPr>
+        </p:nvSpPr>
+        <p:spPr/>
+      </p:sp>
+      <p:sp>
+        <p:nvSpPr>
+          <p:cNvPr id="3" name="Notes Placeholder 2"/>
+          <p:cNvSpPr>
+            <a:spLocks noGrp="1"/>
+          </p:cNvSpPr>
+          <p:nvPr>
+            <p:ph type="body" idx="1"/>
+          </p:nvPr>
+        </p:nvSpPr>
+        <p:spPr/>
+        <p:txBody>
+          <a:bodyPr/>
+          <a:lstStyle/>
+          <a:p>
+            <a:r>
+              <a:rPr lang="en-US" dirty="0"/>
+              <a:t/>
+            </a:r>
+            <a:endParaRPr lang="en-US" dirty="0"/>
+          </a:p>
+        </p:txBody>
+      </p:sp>
+      <p:sp>
+        <p:nvSpPr>
+          <p:cNvPr id="4" name="Slide Number Placeholder 3"/>
+          <p:cNvSpPr>
+            <a:spLocks noGrp="1"/>
+          </p:cNvSpPr>
+          <p:nvPr>
+            <p:ph type="sldNum" sz="quarter" idx="10"/>
+          </p:nvPr>
+        </p:nvSpPr>
+        <p:spPr/>
+        <p:txBody>
+          <a:bodyPr/>
+          <a:lstStyle/>
+          <a:p>
+            <a:fld id="{F7021451-1387-4CA6-816F-3879F97B5CBC}" type="slidenum">
+              <a:rPr lang="en-US"/>
+              <a:t>6</a:t>
+            </a:fld>
+            <a:endParaRPr lang="en-US"/>
+          </a:p>
+        </p:txBody>
+      </p:sp>
+    </p:spTree>
+    <p:extLst>
+      <p:ext uri="{BB962C8B-B14F-4D97-AF65-F5344CB8AC3E}">
+        <p14:creationId xmlns:p14="http://schemas.microsoft.com/office/powerpoint/2010/main" val="1024086991"/>
+      </p:ext>
+    </p:extLst>
+  </p:cSld>
+  <p:clrMapOvr>
+    <a:masterClrMapping/>
+  </p:clrMapOvr>
+</p:notes>
+</file>
+
+<file path=ppt/notesSlides/notesSlide7.xml><?xml version="1.0" encoding="utf-8"?>
+<p:notes xmlns:a="http://schemas.openxmlformats.org/drawingml/2006/main" xmlns:r="http://schemas.openxmlformats.org/officeDocument/2006/relationships" xmlns:p="http://schemas.openxmlformats.org/presentationml/2006/main">
+  <p:cSld>
+    <p:spTree>
+      <p:nvGrpSpPr>
+        <p:cNvPr id="1" name=""/>
+        <p:cNvGrpSpPr/>
+        <p:nvPr/>
+      </p:nvGrpSpPr>
+      <p:grpSpPr>
+        <a:xfrm>
+          <a:off x="0" y="0"/>
+          <a:ext cx="0" cy="0"/>
+          <a:chOff x="0" y="0"/>
+          <a:chExt cx="0" cy="0"/>
+        </a:xfrm>
+      </p:grpSpPr>
+      <p:sp>
+        <p:nvSpPr>
+          <p:cNvPr id="2" name="Slide Image Placeholder 1"/>
+          <p:cNvSpPr>
+            <a:spLocks noGrp="1" noRot="1" noChangeAspect="1"/>
+          </p:cNvSpPr>
+          <p:nvPr>
+            <p:ph type="sldImg"/>
+          </p:nvPr>
+        </p:nvSpPr>
+        <p:spPr/>
+      </p:sp>
+      <p:sp>
+        <p:nvSpPr>
+          <p:cNvPr id="3" name="Notes Placeholder 2"/>
+          <p:cNvSpPr>
+            <a:spLocks noGrp="1"/>
+          </p:cNvSpPr>
+          <p:nvPr>
+            <p:ph type="body" idx="1"/>
+          </p:nvPr>
+        </p:nvSpPr>
+        <p:spPr/>
+        <p:txBody>
+          <a:bodyPr/>
+          <a:lstStyle/>
+          <a:p>
+            <a:r>
+              <a:rPr lang="en-US" dirty="0"/>
+              <a:t/>
+            </a:r>
+            <a:endParaRPr lang="en-US" dirty="0"/>
+          </a:p>
+        </p:txBody>
+      </p:sp>
+      <p:sp>
+        <p:nvSpPr>
+          <p:cNvPr id="4" name="Slide Number Placeholder 3"/>
+          <p:cNvSpPr>
+            <a:spLocks noGrp="1"/>
+          </p:cNvSpPr>
+          <p:nvPr>
+            <p:ph type="sldNum" sz="quarter" idx="10"/>
+          </p:nvPr>
+        </p:nvSpPr>
+        <p:spPr/>
+        <p:txBody>
+          <a:bodyPr/>
+          <a:lstStyle/>
+          <a:p>
+            <a:fld id="{F7021451-1387-4CA6-816F-3879F97B5CBC}" type="slidenum">
+              <a:rPr lang="en-US"/>
+              <a:t>7</a:t>
+            </a:fld>
+            <a:endParaRPr lang="en-US"/>
+          </a:p>
+        </p:txBody>
+      </p:sp>
+    </p:spTree>
+    <p:extLst>
+      <p:ext uri="{BB962C8B-B14F-4D97-AF65-F5344CB8AC3E}">
+        <p14:creationId xmlns:p14="http://schemas.microsoft.com/office/powerpoint/2010/main" val="1024086991"/>
+      </p:ext>
+    </p:extLst>
+  </p:cSld>
+  <p:clrMapOvr>
+    <a:masterClrMapping/>
+  </p:clrMapOvr>
+</p:notes>
+</file>
+
+<file path=ppt/notesSlides/notesSlide8.xml><?xml version="1.0" encoding="utf-8"?>
+<p:notes xmlns:a="http://schemas.openxmlformats.org/drawingml/2006/main" xmlns:r="http://schemas.openxmlformats.org/officeDocument/2006/relationships" xmlns:p="http://schemas.openxmlformats.org/presentationml/2006/main">
+  <p:cSld>
+    <p:spTree>
+      <p:nvGrpSpPr>
+        <p:cNvPr id="1" name=""/>
+        <p:cNvGrpSpPr/>
+        <p:nvPr/>
+      </p:nvGrpSpPr>
+      <p:grpSpPr>
+        <a:xfrm>
+          <a:off x="0" y="0"/>
+          <a:ext cx="0" cy="0"/>
+          <a:chOff x="0" y="0"/>
+          <a:chExt cx="0" cy="0"/>
+        </a:xfrm>
+      </p:grpSpPr>
+      <p:sp>
+        <p:nvSpPr>
+          <p:cNvPr id="2" name="Slide Image Placeholder 1"/>
+          <p:cNvSpPr>
+            <a:spLocks noGrp="1" noRot="1" noChangeAspect="1"/>
+          </p:cNvSpPr>
+          <p:nvPr>
+            <p:ph type="sldImg"/>
+          </p:nvPr>
+        </p:nvSpPr>
+        <p:spPr/>
+      </p:sp>
+      <p:sp>
+        <p:nvSpPr>
+          <p:cNvPr id="3" name="Notes Placeholder 2"/>
+          <p:cNvSpPr>
+            <a:spLocks noGrp="1"/>
+          </p:cNvSpPr>
+          <p:nvPr>
+            <p:ph type="body" idx="1"/>
+          </p:nvPr>
+        </p:nvSpPr>
+        <p:spPr/>
+        <p:txBody>
+          <a:bodyPr/>
+          <a:lstStyle/>
+          <a:p>
+            <a:r>
+              <a:rPr lang="en-US" dirty="0"/>
+              <a:t/>
+            </a:r>
+            <a:endParaRPr lang="en-US" dirty="0"/>
+          </a:p>
+        </p:txBody>
+      </p:sp>
+      <p:sp>
+        <p:nvSpPr>
+          <p:cNvPr id="4" name="Slide Number Placeholder 3"/>
+          <p:cNvSpPr>
+            <a:spLocks noGrp="1"/>
+          </p:cNvSpPr>
+          <p:nvPr>
+            <p:ph type="sldNum" sz="quarter" idx="10"/>
+          </p:nvPr>
+        </p:nvSpPr>
+        <p:spPr/>
+        <p:txBody>
+          <a:bodyPr/>
+          <a:lstStyle/>
+          <a:p>
+            <a:fld id="{F7021451-1387-4CA6-816F-3879F97B5CBC}" type="slidenum">
+              <a:rPr lang="en-US"/>
+              <a:t>8</a:t>
+            </a:fld>
+            <a:endParaRPr lang="en-US"/>
+          </a:p>
+        </p:txBody>
+      </p:sp>
+    </p:spTree>
+    <p:extLst>
+      <p:ext uri="{BB962C8B-B14F-4D97-AF65-F5344CB8AC3E}">
+        <p14:creationId xmlns:p14="http://schemas.microsoft.com/office/powerpoint/2010/main" val="1024086991"/>
+      </p:ext>
+    </p:extLst>
+  </p:cSld>
+  <p:clrMapOvr>
+    <a:masterClrMapping/>
+  </p:clrMapOvr>
+</p:notes>
+</file>
+
 <file path=ppt/slideLayouts/slideLayout1.xml><?xml version="1.0" encoding="utf-8"?>
 <p:sldLayout xmlns:a="http://schemas.openxmlformats.org/drawingml/2006/main" xmlns:r="http://schemas.openxmlformats.org/officeDocument/2006/relationships" xmlns:p="http://schemas.openxmlformats.org/presentationml/2006/main" preserve="1">
   <p:cSld name="DEFAULT">
@@ -1210,13 +1477,6 @@
 <file path=ppt/slides/slide1.xml><?xml version="1.0" encoding="utf-8"?>
 <p:sld xmlns:a="http://schemas.openxmlformats.org/drawingml/2006/main" xmlns:r="http://schemas.openxmlformats.org/officeDocument/2006/relationships" xmlns:p="http://schemas.openxmlformats.org/presentationml/2006/main">
   <p:cSld name="Slide 1">
-    <p:bg>
-      <p:bgPr>
-        <a:solidFill>
-          <a:srgbClr val="1B2A4A"/>
-        </a:solidFill>
-      </p:bgPr>
-    </p:bg>
     <p:spTree>
       <p:nvGrpSpPr>
         <p:cNvPr id="1" name=""/>
@@ -1240,7 +1500,27 @@
         <p:spPr>
           <a:xfrm>
             <a:off x="0" y="0"/>
-            <a:ext cx="109728" cy="5143500"/>
+            <a:ext cx="9144000" cy="5143500"/>
+          </a:xfrm>
+          <a:prstGeom prst="rect">
+            <a:avLst/>
+          </a:prstGeom>
+          <a:solidFill>
+            <a:srgbClr val="1B2A4A"/>
+          </a:solidFill>
+          <a:ln/>
+        </p:spPr>
+      </p:sp>
+      <p:sp>
+        <p:nvSpPr>
+          <p:cNvPr id="3" name="Shape 1"/>
+          <p:cNvSpPr/>
+          <p:nvPr/>
+        </p:nvSpPr>
+        <p:spPr>
+          <a:xfrm>
+            <a:off x="0" y="4777740"/>
+            <a:ext cx="9144000" cy="365760"/>
           </a:xfrm>
           <a:prstGeom prst="rect">
             <a:avLst/>
@@ -1253,14 +1533,36 @@
       </p:sp>
       <p:sp>
         <p:nvSpPr>
-          <p:cNvPr id="3" name="Text 1"/>
-          <p:cNvSpPr/>
-          <p:nvPr/>
-        </p:nvSpPr>
-        <p:spPr>
-          <a:xfrm>
-            <a:off x="731520" y="1097280"/>
-            <a:ext cx="7772400" cy="1371600"/>
+          <p:cNvPr id="4" name="Shape 2"/>
+          <p:cNvSpPr/>
+          <p:nvPr/>
+        </p:nvSpPr>
+        <p:spPr>
+          <a:xfrm>
+            <a:off x="6858000" y="-1371600"/>
+            <a:ext cx="4572000" cy="4572000"/>
+          </a:xfrm>
+          <a:prstGeom prst="ellipse">
+            <a:avLst/>
+          </a:prstGeom>
+          <a:solidFill>
+            <a:srgbClr val="2A9D8F">
+              <a:alpha val="12000"/>
+            </a:srgbClr>
+          </a:solidFill>
+          <a:ln/>
+        </p:spPr>
+      </p:sp>
+      <p:sp>
+        <p:nvSpPr>
+          <p:cNvPr id="5" name="Text 3"/>
+          <p:cNvSpPr/>
+          <p:nvPr/>
+        </p:nvSpPr>
+        <p:spPr>
+          <a:xfrm>
+            <a:off x="731520" y="914400"/>
+            <a:ext cx="7680960" cy="457200"/>
           </a:xfrm>
           <a:prstGeom prst="rect">
             <a:avLst/>
@@ -1276,7 +1578,46 @@
               <a:buNone/>
             </a:pPr>
             <a:r>
-              <a:rPr lang="en-US" sz="4000" b="1" dirty="0">
+              <a:rPr lang="en-US" sz="1300" b="1" spc="500" kern="0" dirty="0">
+                <a:solidFill>
+                  <a:srgbClr val="2A9D8F"/>
+                </a:solidFill>
+                <a:latin typeface="Calibri" pitchFamily="34" charset="0"/>
+                <a:ea typeface="Calibri" pitchFamily="34" charset="-122"/>
+                <a:cs typeface="Calibri" pitchFamily="34" charset="-120"/>
+              </a:rPr>
+              <a:t>GRADE 6 SCIENCE</a:t>
+            </a:r>
+            <a:endParaRPr lang="en-US" sz="1300" dirty="0"/>
+          </a:p>
+        </p:txBody>
+      </p:sp>
+      <p:sp>
+        <p:nvSpPr>
+          <p:cNvPr id="6" name="Text 4"/>
+          <p:cNvSpPr/>
+          <p:nvPr/>
+        </p:nvSpPr>
+        <p:spPr>
+          <a:xfrm>
+            <a:off x="731520" y="1463040"/>
+            <a:ext cx="6858000" cy="1645920"/>
+          </a:xfrm>
+          <a:prstGeom prst="rect">
+            <a:avLst/>
+          </a:prstGeom>
+          <a:noFill/>
+          <a:ln/>
+        </p:spPr>
+        <p:txBody>
+          <a:bodyPr wrap="square" rtlCol="0" anchor="t"/>
+          <a:lstStyle/>
+          <a:p>
+            <a:pPr indent="0" marL="0">
+              <a:buNone/>
+            </a:pPr>
+            <a:r>
+              <a:rPr lang="en-US" sz="3800" b="1" dirty="0">
                 <a:solidFill>
                   <a:srgbClr val="FFFFFF"/>
                 </a:solidFill>
@@ -1286,20 +1627,20 @@
               </a:rPr>
               <a:t>Changes of State</a:t>
             </a:r>
-            <a:endParaRPr lang="en-US" sz="4000" dirty="0"/>
-          </a:p>
-        </p:txBody>
-      </p:sp>
-      <p:sp>
-        <p:nvSpPr>
-          <p:cNvPr id="4" name="Text 2"/>
-          <p:cNvSpPr/>
-          <p:nvPr/>
-        </p:nvSpPr>
-        <p:spPr>
-          <a:xfrm>
-            <a:off x="731520" y="2560320"/>
-            <a:ext cx="7772400" cy="548640"/>
+            <a:endParaRPr lang="en-US" sz="3800" dirty="0"/>
+          </a:p>
+        </p:txBody>
+      </p:sp>
+      <p:sp>
+        <p:nvSpPr>
+          <p:cNvPr id="7" name="Text 5"/>
+          <p:cNvSpPr/>
+          <p:nvPr/>
+        </p:nvSpPr>
+        <p:spPr>
+          <a:xfrm>
+            <a:off x="731520" y="3200400"/>
+            <a:ext cx="6400800" cy="548640"/>
           </a:xfrm>
           <a:prstGeom prst="rect">
             <a:avLst/>
@@ -1315,15 +1656,15 @@
               <a:buNone/>
             </a:pPr>
             <a:r>
-              <a:rPr lang="en-US" sz="1600" dirty="0">
-                <a:solidFill>
-                  <a:srgbClr val="E9C46A"/>
+              <a:rPr lang="en-US" sz="1600" i="1" dirty="0">
+                <a:solidFill>
+                  <a:srgbClr val="9B9690"/>
                 </a:solidFill>
                 <a:latin typeface="Calibri" pitchFamily="34" charset="0"/>
                 <a:ea typeface="Calibri" pitchFamily="34" charset="-122"/>
                 <a:cs typeface="Calibri" pitchFamily="34" charset="-120"/>
               </a:rPr>
-              <a:t>Grade 6 Science · Mr Zocchi</a:t>
+              <a:t>What happens when matter changes from one state to another</a:t>
             </a:r>
             <a:endParaRPr lang="en-US" sz="1600" dirty="0"/>
           </a:p>
@@ -1331,36 +1672,14 @@
       </p:sp>
       <p:sp>
         <p:nvSpPr>
-          <p:cNvPr id="5" name="Shape 3"/>
-          <p:cNvSpPr/>
-          <p:nvPr/>
-        </p:nvSpPr>
-        <p:spPr>
-          <a:xfrm>
-            <a:off x="731520" y="3474720"/>
-            <a:ext cx="2011680" cy="411480"/>
-          </a:xfrm>
-          <a:prstGeom prst="roundRect">
-            <a:avLst>
-              <a:gd name="adj" fmla="val 17778"/>
-            </a:avLst>
-          </a:prstGeom>
-          <a:solidFill>
-            <a:srgbClr val="2A9D8F"/>
-          </a:solidFill>
-          <a:ln/>
-        </p:spPr>
-      </p:sp>
-      <p:sp>
-        <p:nvSpPr>
-          <p:cNvPr id="6" name="Text 4"/>
-          <p:cNvSpPr/>
-          <p:nvPr/>
-        </p:nvSpPr>
-        <p:spPr>
-          <a:xfrm>
-            <a:off x="731520" y="3474720"/>
-            <a:ext cx="2011680" cy="411480"/>
+          <p:cNvPr id="8" name="Text 6"/>
+          <p:cNvSpPr/>
+          <p:nvPr/>
+        </p:nvSpPr>
+        <p:spPr>
+          <a:xfrm>
+            <a:off x="731520" y="4297680"/>
+            <a:ext cx="2743200" cy="365760"/>
           </a:xfrm>
           <a:prstGeom prst="rect">
             <a:avLst/>
@@ -1372,21 +1691,21 @@
           <a:bodyPr wrap="square" rtlCol="0" anchor="ctr"/>
           <a:lstStyle/>
           <a:p>
-            <a:pPr algn="ctr" indent="0" marL="0">
+            <a:pPr indent="0" marL="0">
               <a:buNone/>
             </a:pPr>
             <a:r>
-              <a:rPr lang="en-US" sz="1200" b="1" dirty="0">
-                <a:solidFill>
-                  <a:srgbClr val="FFFFFF"/>
+              <a:rPr lang="en-US" sz="1100" dirty="0">
+                <a:solidFill>
+                  <a:srgbClr val="9B9690"/>
                 </a:solidFill>
                 <a:latin typeface="Calibri" pitchFamily="34" charset="0"/>
                 <a:ea typeface="Calibri" pitchFamily="34" charset="-122"/>
                 <a:cs typeface="Calibri" pitchFamily="34" charset="-120"/>
               </a:rPr>
-              <a:t>Term 2 · Chemistry</a:t>
-            </a:r>
-            <a:endParaRPr lang="en-US" sz="1200" dirty="0"/>
+              <a:t>mrzocchi.com</a:t>
+            </a:r>
+            <a:endParaRPr lang="en-US" sz="1100" dirty="0"/>
           </a:p>
         </p:txBody>
       </p:sp>
@@ -1431,7 +1750,47 @@
         <p:spPr>
           <a:xfrm>
             <a:off x="0" y="0"/>
-            <a:ext cx="9144000" cy="54864"/>
+            <a:ext cx="9144000" cy="822960"/>
+          </a:xfrm>
+          <a:prstGeom prst="rect">
+            <a:avLst/>
+          </a:prstGeom>
+          <a:solidFill>
+            <a:srgbClr val="FFFFFF"/>
+          </a:solidFill>
+          <a:ln/>
+        </p:spPr>
+      </p:sp>
+      <p:sp>
+        <p:nvSpPr>
+          <p:cNvPr id="3" name="Shape 1"/>
+          <p:cNvSpPr/>
+          <p:nvPr/>
+        </p:nvSpPr>
+        <p:spPr>
+          <a:xfrm>
+            <a:off x="0" y="804672"/>
+            <a:ext cx="9144000" cy="27432"/>
+          </a:xfrm>
+          <a:prstGeom prst="rect">
+            <a:avLst/>
+          </a:prstGeom>
+          <a:solidFill>
+            <a:srgbClr val="E5E2DC"/>
+          </a:solidFill>
+          <a:ln/>
+        </p:spPr>
+      </p:sp>
+      <p:sp>
+        <p:nvSpPr>
+          <p:cNvPr id="4" name="Shape 2"/>
+          <p:cNvSpPr/>
+          <p:nvPr/>
+        </p:nvSpPr>
+        <p:spPr>
+          <a:xfrm>
+            <a:off x="548640" y="201168"/>
+            <a:ext cx="54864" cy="420624"/>
           </a:xfrm>
           <a:prstGeom prst="rect">
             <a:avLst/>
@@ -1444,14 +1803,14 @@
       </p:sp>
       <p:sp>
         <p:nvSpPr>
-          <p:cNvPr id="3" name="Text 1"/>
-          <p:cNvSpPr/>
-          <p:nvPr/>
-        </p:nvSpPr>
-        <p:spPr>
-          <a:xfrm>
-            <a:off x="7772400" y="4709160"/>
-            <a:ext cx="1097280" cy="320040"/>
+          <p:cNvPr id="5" name="Text 3"/>
+          <p:cNvSpPr/>
+          <p:nvPr/>
+        </p:nvSpPr>
+        <p:spPr>
+          <a:xfrm>
+            <a:off x="777240" y="137160"/>
+            <a:ext cx="7772400" cy="548640"/>
           </a:xfrm>
           <a:prstGeom prst="rect">
             <a:avLst/>
@@ -1460,37 +1819,37 @@
           <a:ln/>
         </p:spPr>
         <p:txBody>
-          <a:bodyPr wrap="square" rtlCol="0" anchor="ctr"/>
-          <a:lstStyle/>
-          <a:p>
-            <a:pPr algn="r" indent="0" marL="0">
+          <a:bodyPr wrap="square" lIns="0" tIns="0" rIns="0" bIns="0" rtlCol="0" anchor="ctr"/>
+          <a:lstStyle/>
+          <a:p>
+            <a:pPr indent="0" marL="0">
               <a:buNone/>
             </a:pPr>
             <a:r>
-              <a:rPr lang="en-US" sz="900" dirty="0">
-                <a:solidFill>
-                  <a:srgbClr val="6B6660"/>
-                </a:solidFill>
-                <a:latin typeface="Calibri" pitchFamily="34" charset="0"/>
-                <a:ea typeface="Calibri" pitchFamily="34" charset="-122"/>
-                <a:cs typeface="Calibri" pitchFamily="34" charset="-120"/>
-              </a:rPr>
-              <a:t>2 / 5</a:t>
-            </a:r>
-            <a:endParaRPr lang="en-US" sz="900" dirty="0"/>
-          </a:p>
-        </p:txBody>
-      </p:sp>
-      <p:sp>
-        <p:nvSpPr>
-          <p:cNvPr id="4" name="Shape 2"/>
-          <p:cNvSpPr/>
-          <p:nvPr/>
-        </p:nvSpPr>
-        <p:spPr>
-          <a:xfrm>
-            <a:off x="1371600" y="914400"/>
-            <a:ext cx="6400800" cy="3200400"/>
+              <a:rPr lang="en-US" sz="2000" b="1" dirty="0">
+                <a:solidFill>
+                  <a:srgbClr val="1B2A4A"/>
+                </a:solidFill>
+                <a:latin typeface="Georgia" pitchFamily="34" charset="0"/>
+                <a:ea typeface="Georgia" pitchFamily="34" charset="-122"/>
+                <a:cs typeface="Georgia" pitchFamily="34" charset="-120"/>
+              </a:rPr>
+              <a:t>Key Vocabulary</a:t>
+            </a:r>
+            <a:endParaRPr lang="en-US" sz="2000" dirty="0"/>
+          </a:p>
+        </p:txBody>
+      </p:sp>
+      <p:sp>
+        <p:nvSpPr>
+          <p:cNvPr id="6" name="Shape 4"/>
+          <p:cNvSpPr/>
+          <p:nvPr/>
+        </p:nvSpPr>
+        <p:spPr>
+          <a:xfrm>
+            <a:off x="731520" y="1051560"/>
+            <a:ext cx="3657600" cy="658368"/>
           </a:xfrm>
           <a:prstGeom prst="rect">
             <a:avLst/>
@@ -1498,12 +1857,7 @@
           <a:solidFill>
             <a:srgbClr val="FFFFFF"/>
           </a:solidFill>
-          <a:ln w="12700">
-            <a:solidFill>
-              <a:srgbClr val="E5E2DC"/>
-            </a:solidFill>
-            <a:prstDash val="solid"/>
-          </a:ln>
+          <a:ln/>
           <a:effectLst>
             <a:outerShdw sx="100000" sy="100000" kx="0" ky="0" algn="bl" rotWithShape="0" blurRad="50800" dist="25400" dir="8100000">
               <a:srgbClr val="000000">
@@ -1515,14 +1869,14 @@
       </p:sp>
       <p:sp>
         <p:nvSpPr>
-          <p:cNvPr id="5" name="Shape 3"/>
-          <p:cNvSpPr/>
-          <p:nvPr/>
-        </p:nvSpPr>
-        <p:spPr>
-          <a:xfrm>
-            <a:off x="1371600" y="914400"/>
-            <a:ext cx="91440" cy="3200400"/>
+          <p:cNvPr id="7" name="Shape 5"/>
+          <p:cNvSpPr/>
+          <p:nvPr/>
+        </p:nvSpPr>
+        <p:spPr>
+          <a:xfrm>
+            <a:off x="731520" y="1051560"/>
+            <a:ext cx="54864" cy="658368"/>
           </a:xfrm>
           <a:prstGeom prst="rect">
             <a:avLst/>
@@ -1535,14 +1889,14 @@
       </p:sp>
       <p:sp>
         <p:nvSpPr>
-          <p:cNvPr id="6" name="Text 4"/>
-          <p:cNvSpPr/>
-          <p:nvPr/>
-        </p:nvSpPr>
-        <p:spPr>
-          <a:xfrm>
-            <a:off x="1828800" y="1097280"/>
-            <a:ext cx="5669280" cy="640080"/>
+          <p:cNvPr id="8" name="Text 6"/>
+          <p:cNvSpPr/>
+          <p:nvPr/>
+        </p:nvSpPr>
+        <p:spPr>
+          <a:xfrm>
+            <a:off x="914400" y="1051560"/>
+            <a:ext cx="1463040" cy="658368"/>
           </a:xfrm>
           <a:prstGeom prst="rect">
             <a:avLst/>
@@ -1551,14 +1905,14 @@
           <a:ln/>
         </p:spPr>
         <p:txBody>
-          <a:bodyPr wrap="square" rtlCol="0" anchor="ctr"/>
+          <a:bodyPr wrap="square" lIns="0" tIns="0" rIns="0" bIns="0" rtlCol="0" anchor="ctr"/>
           <a:lstStyle/>
           <a:p>
             <a:pPr indent="0" marL="0">
               <a:buNone/>
             </a:pPr>
             <a:r>
-              <a:rPr lang="en-US" sz="2400" b="1" dirty="0">
+              <a:rPr lang="en-US" sz="1300" b="1" dirty="0">
                 <a:solidFill>
                   <a:srgbClr val="1B2A4A"/>
                 </a:solidFill>
@@ -1566,22 +1920,22 @@
                 <a:ea typeface="Georgia" pitchFamily="34" charset="-122"/>
                 <a:cs typeface="Georgia" pitchFamily="34" charset="-120"/>
               </a:rPr>
-              <a:t>Changing Between States</a:t>
-            </a:r>
-            <a:endParaRPr lang="en-US" sz="2400" dirty="0"/>
-          </a:p>
-        </p:txBody>
-      </p:sp>
-      <p:sp>
-        <p:nvSpPr>
-          <p:cNvPr id="7" name="Text 5"/>
-          <p:cNvSpPr/>
-          <p:nvPr/>
-        </p:nvSpPr>
-        <p:spPr>
-          <a:xfrm>
-            <a:off x="1828800" y="1828800"/>
-            <a:ext cx="5669280" cy="2011680"/>
+              <a:t>Melting</a:t>
+            </a:r>
+            <a:endParaRPr lang="en-US" sz="1300" dirty="0"/>
+          </a:p>
+        </p:txBody>
+      </p:sp>
+      <p:sp>
+        <p:nvSpPr>
+          <p:cNvPr id="9" name="Text 7"/>
+          <p:cNvSpPr/>
+          <p:nvPr/>
+        </p:nvSpPr>
+        <p:spPr>
+          <a:xfrm>
+            <a:off x="2377440" y="1051560"/>
+            <a:ext cx="1920240" cy="658368"/>
           </a:xfrm>
           <a:prstGeom prst="rect">
             <a:avLst/>
@@ -1590,27 +1944,649 @@
           <a:ln/>
         </p:spPr>
         <p:txBody>
-          <a:bodyPr wrap="square" rtlCol="0" anchor="t"/>
+          <a:bodyPr wrap="square" lIns="0" tIns="0" rIns="0" bIns="0" rtlCol="0" anchor="ctr"/>
           <a:lstStyle/>
           <a:p>
             <a:pPr indent="0" marL="0">
-              <a:lnSpc>
-                <a:spcPct val="130000"/>
-              </a:lnSpc>
               <a:buNone/>
             </a:pPr>
             <a:r>
-              <a:rPr lang="en-US" sz="1500" dirty="0">
-                <a:solidFill>
-                  <a:srgbClr val="3D3A36"/>
+              <a:rPr lang="en-US" sz="1100" dirty="0">
+                <a:solidFill>
+                  <a:srgbClr val="6B6660"/>
                 </a:solidFill>
                 <a:latin typeface="Calibri" pitchFamily="34" charset="0"/>
                 <a:ea typeface="Calibri" pitchFamily="34" charset="-122"/>
                 <a:cs typeface="Calibri" pitchFamily="34" charset="-120"/>
               </a:rPr>
-              <a:t>Matter can change from one state to another by adding or removing energy (usually heat). These are physical changes — the substance stays the same, only the arrangement and energy of the particles changes. No new substances are formed.</a:t>
-            </a:r>
-            <a:endParaRPr lang="en-US" sz="1500" dirty="0"/>
+              <a:t>Solid → liquid</a:t>
+            </a:r>
+            <a:endParaRPr lang="en-US" sz="1100" dirty="0"/>
+          </a:p>
+        </p:txBody>
+      </p:sp>
+      <p:sp>
+        <p:nvSpPr>
+          <p:cNvPr id="10" name="Shape 8"/>
+          <p:cNvSpPr/>
+          <p:nvPr/>
+        </p:nvSpPr>
+        <p:spPr>
+          <a:xfrm>
+            <a:off x="4754880" y="1051560"/>
+            <a:ext cx="3657600" cy="658368"/>
+          </a:xfrm>
+          <a:prstGeom prst="rect">
+            <a:avLst/>
+          </a:prstGeom>
+          <a:solidFill>
+            <a:srgbClr val="FFFFFF"/>
+          </a:solidFill>
+          <a:ln/>
+          <a:effectLst>
+            <a:outerShdw sx="100000" sy="100000" kx="0" ky="0" algn="bl" rotWithShape="0" blurRad="50800" dist="25400" dir="8100000">
+              <a:srgbClr val="000000">
+                <a:alpha val="10000"/>
+              </a:srgbClr>
+            </a:outerShdw>
+          </a:effectLst>
+        </p:spPr>
+      </p:sp>
+      <p:sp>
+        <p:nvSpPr>
+          <p:cNvPr id="11" name="Shape 9"/>
+          <p:cNvSpPr/>
+          <p:nvPr/>
+        </p:nvSpPr>
+        <p:spPr>
+          <a:xfrm>
+            <a:off x="4754880" y="1051560"/>
+            <a:ext cx="54864" cy="658368"/>
+          </a:xfrm>
+          <a:prstGeom prst="rect">
+            <a:avLst/>
+          </a:prstGeom>
+          <a:solidFill>
+            <a:srgbClr val="2A9D8F"/>
+          </a:solidFill>
+          <a:ln/>
+        </p:spPr>
+      </p:sp>
+      <p:sp>
+        <p:nvSpPr>
+          <p:cNvPr id="12" name="Text 10"/>
+          <p:cNvSpPr/>
+          <p:nvPr/>
+        </p:nvSpPr>
+        <p:spPr>
+          <a:xfrm>
+            <a:off x="4937760" y="1051560"/>
+            <a:ext cx="1463040" cy="658368"/>
+          </a:xfrm>
+          <a:prstGeom prst="rect">
+            <a:avLst/>
+          </a:prstGeom>
+          <a:noFill/>
+          <a:ln/>
+        </p:spPr>
+        <p:txBody>
+          <a:bodyPr wrap="square" lIns="0" tIns="0" rIns="0" bIns="0" rtlCol="0" anchor="ctr"/>
+          <a:lstStyle/>
+          <a:p>
+            <a:pPr indent="0" marL="0">
+              <a:buNone/>
+            </a:pPr>
+            <a:r>
+              <a:rPr lang="en-US" sz="1300" b="1" dirty="0">
+                <a:solidFill>
+                  <a:srgbClr val="1B2A4A"/>
+                </a:solidFill>
+                <a:latin typeface="Georgia" pitchFamily="34" charset="0"/>
+                <a:ea typeface="Georgia" pitchFamily="34" charset="-122"/>
+                <a:cs typeface="Georgia" pitchFamily="34" charset="-120"/>
+              </a:rPr>
+              <a:t>Freezing</a:t>
+            </a:r>
+            <a:endParaRPr lang="en-US" sz="1300" dirty="0"/>
+          </a:p>
+        </p:txBody>
+      </p:sp>
+      <p:sp>
+        <p:nvSpPr>
+          <p:cNvPr id="13" name="Text 11"/>
+          <p:cNvSpPr/>
+          <p:nvPr/>
+        </p:nvSpPr>
+        <p:spPr>
+          <a:xfrm>
+            <a:off x="6400800" y="1051560"/>
+            <a:ext cx="1920240" cy="658368"/>
+          </a:xfrm>
+          <a:prstGeom prst="rect">
+            <a:avLst/>
+          </a:prstGeom>
+          <a:noFill/>
+          <a:ln/>
+        </p:spPr>
+        <p:txBody>
+          <a:bodyPr wrap="square" lIns="0" tIns="0" rIns="0" bIns="0" rtlCol="0" anchor="ctr"/>
+          <a:lstStyle/>
+          <a:p>
+            <a:pPr indent="0" marL="0">
+              <a:buNone/>
+            </a:pPr>
+            <a:r>
+              <a:rPr lang="en-US" sz="1100" dirty="0">
+                <a:solidFill>
+                  <a:srgbClr val="6B6660"/>
+                </a:solidFill>
+                <a:latin typeface="Calibri" pitchFamily="34" charset="0"/>
+                <a:ea typeface="Calibri" pitchFamily="34" charset="-122"/>
+                <a:cs typeface="Calibri" pitchFamily="34" charset="-120"/>
+              </a:rPr>
+              <a:t>Liquid → solid</a:t>
+            </a:r>
+            <a:endParaRPr lang="en-US" sz="1100" dirty="0"/>
+          </a:p>
+        </p:txBody>
+      </p:sp>
+      <p:sp>
+        <p:nvSpPr>
+          <p:cNvPr id="14" name="Shape 12"/>
+          <p:cNvSpPr/>
+          <p:nvPr/>
+        </p:nvSpPr>
+        <p:spPr>
+          <a:xfrm>
+            <a:off x="731520" y="1819656"/>
+            <a:ext cx="3657600" cy="658368"/>
+          </a:xfrm>
+          <a:prstGeom prst="rect">
+            <a:avLst/>
+          </a:prstGeom>
+          <a:solidFill>
+            <a:srgbClr val="FFFFFF"/>
+          </a:solidFill>
+          <a:ln/>
+          <a:effectLst>
+            <a:outerShdw sx="100000" sy="100000" kx="0" ky="0" algn="bl" rotWithShape="0" blurRad="50800" dist="25400" dir="8100000">
+              <a:srgbClr val="000000">
+                <a:alpha val="10000"/>
+              </a:srgbClr>
+            </a:outerShdw>
+          </a:effectLst>
+        </p:spPr>
+      </p:sp>
+      <p:sp>
+        <p:nvSpPr>
+          <p:cNvPr id="15" name="Shape 13"/>
+          <p:cNvSpPr/>
+          <p:nvPr/>
+        </p:nvSpPr>
+        <p:spPr>
+          <a:xfrm>
+            <a:off x="731520" y="1819656"/>
+            <a:ext cx="54864" cy="658368"/>
+          </a:xfrm>
+          <a:prstGeom prst="rect">
+            <a:avLst/>
+          </a:prstGeom>
+          <a:solidFill>
+            <a:srgbClr val="2A9D8F"/>
+          </a:solidFill>
+          <a:ln/>
+        </p:spPr>
+      </p:sp>
+      <p:sp>
+        <p:nvSpPr>
+          <p:cNvPr id="16" name="Text 14"/>
+          <p:cNvSpPr/>
+          <p:nvPr/>
+        </p:nvSpPr>
+        <p:spPr>
+          <a:xfrm>
+            <a:off x="914400" y="1819656"/>
+            <a:ext cx="1463040" cy="658368"/>
+          </a:xfrm>
+          <a:prstGeom prst="rect">
+            <a:avLst/>
+          </a:prstGeom>
+          <a:noFill/>
+          <a:ln/>
+        </p:spPr>
+        <p:txBody>
+          <a:bodyPr wrap="square" lIns="0" tIns="0" rIns="0" bIns="0" rtlCol="0" anchor="ctr"/>
+          <a:lstStyle/>
+          <a:p>
+            <a:pPr indent="0" marL="0">
+              <a:buNone/>
+            </a:pPr>
+            <a:r>
+              <a:rPr lang="en-US" sz="1300" b="1" dirty="0">
+                <a:solidFill>
+                  <a:srgbClr val="1B2A4A"/>
+                </a:solidFill>
+                <a:latin typeface="Georgia" pitchFamily="34" charset="0"/>
+                <a:ea typeface="Georgia" pitchFamily="34" charset="-122"/>
+                <a:cs typeface="Georgia" pitchFamily="34" charset="-120"/>
+              </a:rPr>
+              <a:t>Evaporation</a:t>
+            </a:r>
+            <a:endParaRPr lang="en-US" sz="1300" dirty="0"/>
+          </a:p>
+        </p:txBody>
+      </p:sp>
+      <p:sp>
+        <p:nvSpPr>
+          <p:cNvPr id="17" name="Text 15"/>
+          <p:cNvSpPr/>
+          <p:nvPr/>
+        </p:nvSpPr>
+        <p:spPr>
+          <a:xfrm>
+            <a:off x="2377440" y="1819656"/>
+            <a:ext cx="1920240" cy="658368"/>
+          </a:xfrm>
+          <a:prstGeom prst="rect">
+            <a:avLst/>
+          </a:prstGeom>
+          <a:noFill/>
+          <a:ln/>
+        </p:spPr>
+        <p:txBody>
+          <a:bodyPr wrap="square" lIns="0" tIns="0" rIns="0" bIns="0" rtlCol="0" anchor="ctr"/>
+          <a:lstStyle/>
+          <a:p>
+            <a:pPr indent="0" marL="0">
+              <a:buNone/>
+            </a:pPr>
+            <a:r>
+              <a:rPr lang="en-US" sz="1100" dirty="0">
+                <a:solidFill>
+                  <a:srgbClr val="6B6660"/>
+                </a:solidFill>
+                <a:latin typeface="Calibri" pitchFamily="34" charset="0"/>
+                <a:ea typeface="Calibri" pitchFamily="34" charset="-122"/>
+                <a:cs typeface="Calibri" pitchFamily="34" charset="-120"/>
+              </a:rPr>
+              <a:t>Liquid → gas (at the surface)</a:t>
+            </a:r>
+            <a:endParaRPr lang="en-US" sz="1100" dirty="0"/>
+          </a:p>
+        </p:txBody>
+      </p:sp>
+      <p:sp>
+        <p:nvSpPr>
+          <p:cNvPr id="18" name="Shape 16"/>
+          <p:cNvSpPr/>
+          <p:nvPr/>
+        </p:nvSpPr>
+        <p:spPr>
+          <a:xfrm>
+            <a:off x="4754880" y="1819656"/>
+            <a:ext cx="3657600" cy="658368"/>
+          </a:xfrm>
+          <a:prstGeom prst="rect">
+            <a:avLst/>
+          </a:prstGeom>
+          <a:solidFill>
+            <a:srgbClr val="FFFFFF"/>
+          </a:solidFill>
+          <a:ln/>
+          <a:effectLst>
+            <a:outerShdw sx="100000" sy="100000" kx="0" ky="0" algn="bl" rotWithShape="0" blurRad="50800" dist="25400" dir="8100000">
+              <a:srgbClr val="000000">
+                <a:alpha val="10000"/>
+              </a:srgbClr>
+            </a:outerShdw>
+          </a:effectLst>
+        </p:spPr>
+      </p:sp>
+      <p:sp>
+        <p:nvSpPr>
+          <p:cNvPr id="19" name="Shape 17"/>
+          <p:cNvSpPr/>
+          <p:nvPr/>
+        </p:nvSpPr>
+        <p:spPr>
+          <a:xfrm>
+            <a:off x="4754880" y="1819656"/>
+            <a:ext cx="54864" cy="658368"/>
+          </a:xfrm>
+          <a:prstGeom prst="rect">
+            <a:avLst/>
+          </a:prstGeom>
+          <a:solidFill>
+            <a:srgbClr val="2A9D8F"/>
+          </a:solidFill>
+          <a:ln/>
+        </p:spPr>
+      </p:sp>
+      <p:sp>
+        <p:nvSpPr>
+          <p:cNvPr id="20" name="Text 18"/>
+          <p:cNvSpPr/>
+          <p:nvPr/>
+        </p:nvSpPr>
+        <p:spPr>
+          <a:xfrm>
+            <a:off x="4937760" y="1819656"/>
+            <a:ext cx="1463040" cy="658368"/>
+          </a:xfrm>
+          <a:prstGeom prst="rect">
+            <a:avLst/>
+          </a:prstGeom>
+          <a:noFill/>
+          <a:ln/>
+        </p:spPr>
+        <p:txBody>
+          <a:bodyPr wrap="square" lIns="0" tIns="0" rIns="0" bIns="0" rtlCol="0" anchor="ctr"/>
+          <a:lstStyle/>
+          <a:p>
+            <a:pPr indent="0" marL="0">
+              <a:buNone/>
+            </a:pPr>
+            <a:r>
+              <a:rPr lang="en-US" sz="1300" b="1" dirty="0">
+                <a:solidFill>
+                  <a:srgbClr val="1B2A4A"/>
+                </a:solidFill>
+                <a:latin typeface="Georgia" pitchFamily="34" charset="0"/>
+                <a:ea typeface="Georgia" pitchFamily="34" charset="-122"/>
+                <a:cs typeface="Georgia" pitchFamily="34" charset="-120"/>
+              </a:rPr>
+              <a:t>Boiling</a:t>
+            </a:r>
+            <a:endParaRPr lang="en-US" sz="1300" dirty="0"/>
+          </a:p>
+        </p:txBody>
+      </p:sp>
+      <p:sp>
+        <p:nvSpPr>
+          <p:cNvPr id="21" name="Text 19"/>
+          <p:cNvSpPr/>
+          <p:nvPr/>
+        </p:nvSpPr>
+        <p:spPr>
+          <a:xfrm>
+            <a:off x="6400800" y="1819656"/>
+            <a:ext cx="1920240" cy="658368"/>
+          </a:xfrm>
+          <a:prstGeom prst="rect">
+            <a:avLst/>
+          </a:prstGeom>
+          <a:noFill/>
+          <a:ln/>
+        </p:spPr>
+        <p:txBody>
+          <a:bodyPr wrap="square" lIns="0" tIns="0" rIns="0" bIns="0" rtlCol="0" anchor="ctr"/>
+          <a:lstStyle/>
+          <a:p>
+            <a:pPr indent="0" marL="0">
+              <a:buNone/>
+            </a:pPr>
+            <a:r>
+              <a:rPr lang="en-US" sz="1100" dirty="0">
+                <a:solidFill>
+                  <a:srgbClr val="6B6660"/>
+                </a:solidFill>
+                <a:latin typeface="Calibri" pitchFamily="34" charset="0"/>
+                <a:ea typeface="Calibri" pitchFamily="34" charset="-122"/>
+                <a:cs typeface="Calibri" pitchFamily="34" charset="-120"/>
+              </a:rPr>
+              <a:t>Liquid → gas (throughout)</a:t>
+            </a:r>
+            <a:endParaRPr lang="en-US" sz="1100" dirty="0"/>
+          </a:p>
+        </p:txBody>
+      </p:sp>
+      <p:sp>
+        <p:nvSpPr>
+          <p:cNvPr id="22" name="Shape 20"/>
+          <p:cNvSpPr/>
+          <p:nvPr/>
+        </p:nvSpPr>
+        <p:spPr>
+          <a:xfrm>
+            <a:off x="731520" y="2587752"/>
+            <a:ext cx="3657600" cy="658368"/>
+          </a:xfrm>
+          <a:prstGeom prst="rect">
+            <a:avLst/>
+          </a:prstGeom>
+          <a:solidFill>
+            <a:srgbClr val="FFFFFF"/>
+          </a:solidFill>
+          <a:ln/>
+          <a:effectLst>
+            <a:outerShdw sx="100000" sy="100000" kx="0" ky="0" algn="bl" rotWithShape="0" blurRad="50800" dist="25400" dir="8100000">
+              <a:srgbClr val="000000">
+                <a:alpha val="10000"/>
+              </a:srgbClr>
+            </a:outerShdw>
+          </a:effectLst>
+        </p:spPr>
+      </p:sp>
+      <p:sp>
+        <p:nvSpPr>
+          <p:cNvPr id="23" name="Shape 21"/>
+          <p:cNvSpPr/>
+          <p:nvPr/>
+        </p:nvSpPr>
+        <p:spPr>
+          <a:xfrm>
+            <a:off x="731520" y="2587752"/>
+            <a:ext cx="54864" cy="658368"/>
+          </a:xfrm>
+          <a:prstGeom prst="rect">
+            <a:avLst/>
+          </a:prstGeom>
+          <a:solidFill>
+            <a:srgbClr val="2A9D8F"/>
+          </a:solidFill>
+          <a:ln/>
+        </p:spPr>
+      </p:sp>
+      <p:sp>
+        <p:nvSpPr>
+          <p:cNvPr id="24" name="Text 22"/>
+          <p:cNvSpPr/>
+          <p:nvPr/>
+        </p:nvSpPr>
+        <p:spPr>
+          <a:xfrm>
+            <a:off x="914400" y="2587752"/>
+            <a:ext cx="1463040" cy="658368"/>
+          </a:xfrm>
+          <a:prstGeom prst="rect">
+            <a:avLst/>
+          </a:prstGeom>
+          <a:noFill/>
+          <a:ln/>
+        </p:spPr>
+        <p:txBody>
+          <a:bodyPr wrap="square" lIns="0" tIns="0" rIns="0" bIns="0" rtlCol="0" anchor="ctr"/>
+          <a:lstStyle/>
+          <a:p>
+            <a:pPr indent="0" marL="0">
+              <a:buNone/>
+            </a:pPr>
+            <a:r>
+              <a:rPr lang="en-US" sz="1300" b="1" dirty="0">
+                <a:solidFill>
+                  <a:srgbClr val="1B2A4A"/>
+                </a:solidFill>
+                <a:latin typeface="Georgia" pitchFamily="34" charset="0"/>
+                <a:ea typeface="Georgia" pitchFamily="34" charset="-122"/>
+                <a:cs typeface="Georgia" pitchFamily="34" charset="-120"/>
+              </a:rPr>
+              <a:t>Condensation</a:t>
+            </a:r>
+            <a:endParaRPr lang="en-US" sz="1300" dirty="0"/>
+          </a:p>
+        </p:txBody>
+      </p:sp>
+      <p:sp>
+        <p:nvSpPr>
+          <p:cNvPr id="25" name="Text 23"/>
+          <p:cNvSpPr/>
+          <p:nvPr/>
+        </p:nvSpPr>
+        <p:spPr>
+          <a:xfrm>
+            <a:off x="2377440" y="2587752"/>
+            <a:ext cx="1920240" cy="658368"/>
+          </a:xfrm>
+          <a:prstGeom prst="rect">
+            <a:avLst/>
+          </a:prstGeom>
+          <a:noFill/>
+          <a:ln/>
+        </p:spPr>
+        <p:txBody>
+          <a:bodyPr wrap="square" lIns="0" tIns="0" rIns="0" bIns="0" rtlCol="0" anchor="ctr"/>
+          <a:lstStyle/>
+          <a:p>
+            <a:pPr indent="0" marL="0">
+              <a:buNone/>
+            </a:pPr>
+            <a:r>
+              <a:rPr lang="en-US" sz="1100" dirty="0">
+                <a:solidFill>
+                  <a:srgbClr val="6B6660"/>
+                </a:solidFill>
+                <a:latin typeface="Calibri" pitchFamily="34" charset="0"/>
+                <a:ea typeface="Calibri" pitchFamily="34" charset="-122"/>
+                <a:cs typeface="Calibri" pitchFamily="34" charset="-120"/>
+              </a:rPr>
+              <a:t>Gas → liquid</a:t>
+            </a:r>
+            <a:endParaRPr lang="en-US" sz="1100" dirty="0"/>
+          </a:p>
+        </p:txBody>
+      </p:sp>
+      <p:sp>
+        <p:nvSpPr>
+          <p:cNvPr id="26" name="Shape 24"/>
+          <p:cNvSpPr/>
+          <p:nvPr/>
+        </p:nvSpPr>
+        <p:spPr>
+          <a:xfrm>
+            <a:off x="4754880" y="2587752"/>
+            <a:ext cx="3657600" cy="658368"/>
+          </a:xfrm>
+          <a:prstGeom prst="rect">
+            <a:avLst/>
+          </a:prstGeom>
+          <a:solidFill>
+            <a:srgbClr val="FFFFFF"/>
+          </a:solidFill>
+          <a:ln/>
+          <a:effectLst>
+            <a:outerShdw sx="100000" sy="100000" kx="0" ky="0" algn="bl" rotWithShape="0" blurRad="50800" dist="25400" dir="8100000">
+              <a:srgbClr val="000000">
+                <a:alpha val="10000"/>
+              </a:srgbClr>
+            </a:outerShdw>
+          </a:effectLst>
+        </p:spPr>
+      </p:sp>
+      <p:sp>
+        <p:nvSpPr>
+          <p:cNvPr id="27" name="Shape 25"/>
+          <p:cNvSpPr/>
+          <p:nvPr/>
+        </p:nvSpPr>
+        <p:spPr>
+          <a:xfrm>
+            <a:off x="4754880" y="2587752"/>
+            <a:ext cx="54864" cy="658368"/>
+          </a:xfrm>
+          <a:prstGeom prst="rect">
+            <a:avLst/>
+          </a:prstGeom>
+          <a:solidFill>
+            <a:srgbClr val="2A9D8F"/>
+          </a:solidFill>
+          <a:ln/>
+        </p:spPr>
+      </p:sp>
+      <p:sp>
+        <p:nvSpPr>
+          <p:cNvPr id="28" name="Text 26"/>
+          <p:cNvSpPr/>
+          <p:nvPr/>
+        </p:nvSpPr>
+        <p:spPr>
+          <a:xfrm>
+            <a:off x="4937760" y="2587752"/>
+            <a:ext cx="1463040" cy="658368"/>
+          </a:xfrm>
+          <a:prstGeom prst="rect">
+            <a:avLst/>
+          </a:prstGeom>
+          <a:noFill/>
+          <a:ln/>
+        </p:spPr>
+        <p:txBody>
+          <a:bodyPr wrap="square" lIns="0" tIns="0" rIns="0" bIns="0" rtlCol="0" anchor="ctr"/>
+          <a:lstStyle/>
+          <a:p>
+            <a:pPr indent="0" marL="0">
+              <a:buNone/>
+            </a:pPr>
+            <a:r>
+              <a:rPr lang="en-US" sz="1300" b="1" dirty="0">
+                <a:solidFill>
+                  <a:srgbClr val="1B2A4A"/>
+                </a:solidFill>
+                <a:latin typeface="Georgia" pitchFamily="34" charset="0"/>
+                <a:ea typeface="Georgia" pitchFamily="34" charset="-122"/>
+                <a:cs typeface="Georgia" pitchFamily="34" charset="-120"/>
+              </a:rPr>
+              <a:t>Sublimation</a:t>
+            </a:r>
+            <a:endParaRPr lang="en-US" sz="1300" dirty="0"/>
+          </a:p>
+        </p:txBody>
+      </p:sp>
+      <p:sp>
+        <p:nvSpPr>
+          <p:cNvPr id="29" name="Text 27"/>
+          <p:cNvSpPr/>
+          <p:nvPr/>
+        </p:nvSpPr>
+        <p:spPr>
+          <a:xfrm>
+            <a:off x="6400800" y="2587752"/>
+            <a:ext cx="1920240" cy="658368"/>
+          </a:xfrm>
+          <a:prstGeom prst="rect">
+            <a:avLst/>
+          </a:prstGeom>
+          <a:noFill/>
+          <a:ln/>
+        </p:spPr>
+        <p:txBody>
+          <a:bodyPr wrap="square" lIns="0" tIns="0" rIns="0" bIns="0" rtlCol="0" anchor="ctr"/>
+          <a:lstStyle/>
+          <a:p>
+            <a:pPr indent="0" marL="0">
+              <a:buNone/>
+            </a:pPr>
+            <a:r>
+              <a:rPr lang="en-US" sz="1100" dirty="0">
+                <a:solidFill>
+                  <a:srgbClr val="6B6660"/>
+                </a:solidFill>
+                <a:latin typeface="Calibri" pitchFamily="34" charset="0"/>
+                <a:ea typeface="Calibri" pitchFamily="34" charset="-122"/>
+                <a:cs typeface="Calibri" pitchFamily="34" charset="-120"/>
+              </a:rPr>
+              <a:t>Solid → gas (skipping liquid)</a:t>
+            </a:r>
+            <a:endParaRPr lang="en-US" sz="1100" dirty="0"/>
           </a:p>
         </p:txBody>
       </p:sp>
@@ -1655,7 +2631,47 @@
         <p:spPr>
           <a:xfrm>
             <a:off x="0" y="0"/>
-            <a:ext cx="9144000" cy="54864"/>
+            <a:ext cx="9144000" cy="822960"/>
+          </a:xfrm>
+          <a:prstGeom prst="rect">
+            <a:avLst/>
+          </a:prstGeom>
+          <a:solidFill>
+            <a:srgbClr val="FFFFFF"/>
+          </a:solidFill>
+          <a:ln/>
+        </p:spPr>
+      </p:sp>
+      <p:sp>
+        <p:nvSpPr>
+          <p:cNvPr id="3" name="Shape 1"/>
+          <p:cNvSpPr/>
+          <p:nvPr/>
+        </p:nvSpPr>
+        <p:spPr>
+          <a:xfrm>
+            <a:off x="0" y="804672"/>
+            <a:ext cx="9144000" cy="27432"/>
+          </a:xfrm>
+          <a:prstGeom prst="rect">
+            <a:avLst/>
+          </a:prstGeom>
+          <a:solidFill>
+            <a:srgbClr val="E5E2DC"/>
+          </a:solidFill>
+          <a:ln/>
+        </p:spPr>
+      </p:sp>
+      <p:sp>
+        <p:nvSpPr>
+          <p:cNvPr id="4" name="Shape 2"/>
+          <p:cNvSpPr/>
+          <p:nvPr/>
+        </p:nvSpPr>
+        <p:spPr>
+          <a:xfrm>
+            <a:off x="548640" y="201168"/>
+            <a:ext cx="54864" cy="420624"/>
           </a:xfrm>
           <a:prstGeom prst="rect">
             <a:avLst/>
@@ -1668,14 +2684,14 @@
       </p:sp>
       <p:sp>
         <p:nvSpPr>
-          <p:cNvPr id="3" name="Text 1"/>
-          <p:cNvSpPr/>
-          <p:nvPr/>
-        </p:nvSpPr>
-        <p:spPr>
-          <a:xfrm>
-            <a:off x="7772400" y="4709160"/>
-            <a:ext cx="1097280" cy="320040"/>
+          <p:cNvPr id="5" name="Text 3"/>
+          <p:cNvSpPr/>
+          <p:nvPr/>
+        </p:nvSpPr>
+        <p:spPr>
+          <a:xfrm>
+            <a:off x="777240" y="137160"/>
+            <a:ext cx="7772400" cy="548640"/>
           </a:xfrm>
           <a:prstGeom prst="rect">
             <a:avLst/>
@@ -1684,89 +2700,193 @@
           <a:ln/>
         </p:spPr>
         <p:txBody>
-          <a:bodyPr wrap="square" rtlCol="0" anchor="ctr"/>
-          <a:lstStyle/>
-          <a:p>
-            <a:pPr algn="r" indent="0" marL="0">
+          <a:bodyPr wrap="square" lIns="0" tIns="0" rIns="0" bIns="0" rtlCol="0" anchor="ctr"/>
+          <a:lstStyle/>
+          <a:p>
+            <a:pPr indent="0" marL="0">
               <a:buNone/>
             </a:pPr>
             <a:r>
-              <a:rPr lang="en-US" sz="900" dirty="0">
-                <a:solidFill>
-                  <a:srgbClr val="6B6660"/>
+              <a:rPr lang="en-US" sz="2000" b="1" dirty="0">
+                <a:solidFill>
+                  <a:srgbClr val="1B2A4A"/>
+                </a:solidFill>
+                <a:latin typeface="Georgia" pitchFamily="34" charset="0"/>
+                <a:ea typeface="Georgia" pitchFamily="34" charset="-122"/>
+                <a:cs typeface="Georgia" pitchFamily="34" charset="-120"/>
+              </a:rPr>
+              <a:t>How Heating Causes State Changes</a:t>
+            </a:r>
+            <a:endParaRPr lang="en-US" sz="2000" dirty="0"/>
+          </a:p>
+        </p:txBody>
+      </p:sp>
+      <p:sp>
+        <p:nvSpPr>
+          <p:cNvPr id="6" name="Text 4"/>
+          <p:cNvSpPr/>
+          <p:nvPr/>
+        </p:nvSpPr>
+        <p:spPr>
+          <a:xfrm>
+            <a:off x="731520" y="1051560"/>
+            <a:ext cx="7680960" cy="3108960"/>
+          </a:xfrm>
+          <a:prstGeom prst="rect">
+            <a:avLst/>
+          </a:prstGeom>
+          <a:noFill/>
+          <a:ln/>
+        </p:spPr>
+        <p:txBody>
+          <a:bodyPr wrap="square" rtlCol="0" anchor="t"/>
+          <a:lstStyle/>
+          <a:p>
+            <a:pPr marL="342900" indent="-342900">
+              <a:spcAft>
+                <a:spcPts val="800"/>
+              </a:spcAft>
+              <a:buSzPct val="100000"/>
+              <a:buChar char="•"/>
+            </a:pPr>
+            <a:r>
+              <a:rPr lang="en-US" sz="1500" dirty="0">
+                <a:solidFill>
+                  <a:srgbClr val="3D3A36"/>
                 </a:solidFill>
                 <a:latin typeface="Calibri" pitchFamily="34" charset="0"/>
                 <a:ea typeface="Calibri" pitchFamily="34" charset="-122"/>
                 <a:cs typeface="Calibri" pitchFamily="34" charset="-120"/>
               </a:rPr>
-              <a:t>3 / 5</a:t>
-            </a:r>
-            <a:endParaRPr lang="en-US" sz="900" dirty="0"/>
-          </a:p>
-        </p:txBody>
-      </p:sp>
-      <p:sp>
-        <p:nvSpPr>
-          <p:cNvPr id="4" name="Text 2"/>
-          <p:cNvSpPr/>
-          <p:nvPr/>
-        </p:nvSpPr>
-        <p:spPr>
-          <a:xfrm>
-            <a:off x="457200" y="274320"/>
-            <a:ext cx="8229600" cy="640080"/>
-          </a:xfrm>
-          <a:prstGeom prst="rect">
-            <a:avLst/>
-          </a:prstGeom>
-          <a:noFill/>
-          <a:ln/>
-        </p:spPr>
-        <p:txBody>
-          <a:bodyPr wrap="square" rtlCol="0" anchor="ctr"/>
-          <a:lstStyle/>
-          <a:p>
-            <a:pPr indent="0" marL="0">
-              <a:buNone/>
-            </a:pPr>
-            <a:r>
-              <a:rPr lang="en-US" sz="2600" b="1" dirty="0">
-                <a:solidFill>
-                  <a:srgbClr val="1B2A4A"/>
-                </a:solidFill>
-                <a:latin typeface="Georgia" pitchFamily="34" charset="0"/>
-                <a:ea typeface="Georgia" pitchFamily="34" charset="-122"/>
-                <a:cs typeface="Georgia" pitchFamily="34" charset="-120"/>
-              </a:rPr>
-              <a:t>The Six Changes of State</a:t>
-            </a:r>
-            <a:endParaRPr lang="en-US" sz="2600" dirty="0"/>
-          </a:p>
-        </p:txBody>
-      </p:sp>
-      <p:sp>
-        <p:nvSpPr>
-          <p:cNvPr id="5" name="Shape 3"/>
-          <p:cNvSpPr/>
-          <p:nvPr/>
-        </p:nvSpPr>
-        <p:spPr>
-          <a:xfrm>
-            <a:off x="457200" y="1188720"/>
-            <a:ext cx="2560320" cy="1828800"/>
-          </a:xfrm>
-          <a:prstGeom prst="rect">
-            <a:avLst/>
-          </a:prstGeom>
-          <a:solidFill>
-            <a:srgbClr val="FFFFFF"/>
-          </a:solidFill>
-          <a:ln w="12700">
-            <a:solidFill>
-              <a:srgbClr val="E5E2DC"/>
-            </a:solidFill>
-            <a:prstDash val="solid"/>
-          </a:ln>
+              <a:t>When you HEAT a substance, you give particles MORE energy.</a:t>
+            </a:r>
+            <a:endParaRPr lang="en-US" sz="1500" dirty="0"/>
+          </a:p>
+          <a:p>
+            <a:pPr marL="342900" indent="-342900">
+              <a:spcAft>
+                <a:spcPts val="800"/>
+              </a:spcAft>
+              <a:buSzPct val="100000"/>
+              <a:buChar char="•"/>
+            </a:pPr>
+            <a:r>
+              <a:rPr lang="en-US" sz="1500" dirty="0">
+                <a:solidFill>
+                  <a:srgbClr val="3D3A36"/>
+                </a:solidFill>
+                <a:latin typeface="Calibri" pitchFamily="34" charset="0"/>
+                <a:ea typeface="Calibri" pitchFamily="34" charset="-122"/>
+                <a:cs typeface="Calibri" pitchFamily="34" charset="-120"/>
+              </a:rPr>
+              <a:t>Particles vibrate or move faster.</a:t>
+            </a:r>
+            <a:endParaRPr lang="en-US" sz="1500" dirty="0"/>
+          </a:p>
+          <a:p>
+            <a:pPr marL="342900" indent="-342900">
+              <a:spcAft>
+                <a:spcPts val="800"/>
+              </a:spcAft>
+              <a:buSzPct val="100000"/>
+              <a:buChar char="•"/>
+            </a:pPr>
+            <a:r>
+              <a:rPr lang="en-US" sz="1500" dirty="0">
+                <a:solidFill>
+                  <a:srgbClr val="3D3A36"/>
+                </a:solidFill>
+                <a:latin typeface="Calibri" pitchFamily="34" charset="0"/>
+                <a:ea typeface="Calibri" pitchFamily="34" charset="-122"/>
+                <a:cs typeface="Calibri" pitchFamily="34" charset="-120"/>
+              </a:rPr>
+              <a:t>Eventually, they overcome the forces holding them together.</a:t>
+            </a:r>
+            <a:endParaRPr lang="en-US" sz="1500" dirty="0"/>
+          </a:p>
+          <a:p>
+            <a:pPr marL="342900" indent="-342900">
+              <a:spcAft>
+                <a:spcPts val="800"/>
+              </a:spcAft>
+              <a:buSzPct val="100000"/>
+              <a:buChar char="•"/>
+            </a:pPr>
+            <a:r>
+              <a:rPr lang="en-US" sz="1500" dirty="0">
+                <a:solidFill>
+                  <a:srgbClr val="3D3A36"/>
+                </a:solidFill>
+                <a:latin typeface="Calibri" pitchFamily="34" charset="0"/>
+                <a:ea typeface="Calibri" pitchFamily="34" charset="-122"/>
+                <a:cs typeface="Calibri" pitchFamily="34" charset="-120"/>
+              </a:rPr>
+              <a:t>Solid → Liquid (melting): particles break free from fixed positions.</a:t>
+            </a:r>
+            <a:endParaRPr lang="en-US" sz="1500" dirty="0"/>
+          </a:p>
+          <a:p>
+            <a:pPr marL="342900" indent="-342900">
+              <a:spcAft>
+                <a:spcPts val="800"/>
+              </a:spcAft>
+              <a:buSzPct val="100000"/>
+              <a:buChar char="•"/>
+            </a:pPr>
+            <a:r>
+              <a:rPr lang="en-US" sz="1500" dirty="0">
+                <a:solidFill>
+                  <a:srgbClr val="3D3A36"/>
+                </a:solidFill>
+                <a:latin typeface="Calibri" pitchFamily="34" charset="0"/>
+                <a:ea typeface="Calibri" pitchFamily="34" charset="-122"/>
+                <a:cs typeface="Calibri" pitchFamily="34" charset="-120"/>
+              </a:rPr>
+              <a:t>Liquid → Gas (boiling): particles escape the liquid entirely.</a:t>
+            </a:r>
+            <a:endParaRPr lang="en-US" sz="1500" dirty="0"/>
+          </a:p>
+          <a:p>
+            <a:pPr marL="342900" indent="-342900">
+              <a:spcAft>
+                <a:spcPts val="800"/>
+              </a:spcAft>
+              <a:buSzPct val="100000"/>
+              <a:buChar char="•"/>
+            </a:pPr>
+            <a:r>
+              <a:rPr lang="en-US" sz="1500" dirty="0">
+                <a:solidFill>
+                  <a:srgbClr val="3D3A36"/>
+                </a:solidFill>
+                <a:latin typeface="Calibri" pitchFamily="34" charset="0"/>
+                <a:ea typeface="Calibri" pitchFamily="34" charset="-122"/>
+                <a:cs typeface="Calibri" pitchFamily="34" charset="-120"/>
+              </a:rPr>
+              <a:t>DURING a state change, temperature stays CONSTANT — energy breaks bonds, not raises temperature.</a:t>
+            </a:r>
+            <a:endParaRPr lang="en-US" sz="1500" dirty="0"/>
+          </a:p>
+        </p:txBody>
+      </p:sp>
+      <p:sp>
+        <p:nvSpPr>
+          <p:cNvPr id="7" name="Shape 5"/>
+          <p:cNvSpPr/>
+          <p:nvPr/>
+        </p:nvSpPr>
+        <p:spPr>
+          <a:xfrm>
+            <a:off x="731520" y="4206240"/>
+            <a:ext cx="7680960" cy="640080"/>
+          </a:xfrm>
+          <a:prstGeom prst="rect">
+            <a:avLst/>
+          </a:prstGeom>
+          <a:solidFill>
+            <a:srgbClr val="E8F5F3"/>
+          </a:solidFill>
+          <a:ln/>
           <a:effectLst>
             <a:outerShdw sx="100000" sy="100000" kx="0" ky="0" algn="bl" rotWithShape="0" blurRad="50800" dist="25400" dir="8100000">
               <a:srgbClr val="000000">
@@ -1778,34 +2898,14 @@
       </p:sp>
       <p:sp>
         <p:nvSpPr>
-          <p:cNvPr id="6" name="Shape 4"/>
-          <p:cNvSpPr/>
-          <p:nvPr/>
-        </p:nvSpPr>
-        <p:spPr>
-          <a:xfrm>
-            <a:off x="457200" y="1188720"/>
-            <a:ext cx="2560320" cy="54864"/>
-          </a:xfrm>
-          <a:prstGeom prst="rect">
-            <a:avLst/>
-          </a:prstGeom>
-          <a:solidFill>
-            <a:srgbClr val="2A9D8F"/>
-          </a:solidFill>
-          <a:ln/>
-        </p:spPr>
-      </p:sp>
-      <p:sp>
-        <p:nvSpPr>
-          <p:cNvPr id="7" name="Text 5"/>
-          <p:cNvSpPr/>
-          <p:nvPr/>
-        </p:nvSpPr>
-        <p:spPr>
-          <a:xfrm>
-            <a:off x="594360" y="1325880"/>
-            <a:ext cx="2286000" cy="365760"/>
+          <p:cNvPr id="8" name="Text 6"/>
+          <p:cNvSpPr/>
+          <p:nvPr/>
+        </p:nvSpPr>
+        <p:spPr>
+          <a:xfrm>
+            <a:off x="914400" y="4251960"/>
+            <a:ext cx="7315200" cy="548640"/>
           </a:xfrm>
           <a:prstGeom prst="rect">
             <a:avLst/>
@@ -1821,46 +2921,21 @@
               <a:buNone/>
             </a:pPr>
             <a:r>
-              <a:rPr lang="en-US" sz="1400" b="1" dirty="0">
-                <a:solidFill>
-                  <a:srgbClr val="1B2A4A"/>
+              <a:rPr lang="en-US" sz="1200" b="1" dirty="0">
+                <a:solidFill>
+                  <a:srgbClr val="2A9D8F"/>
                 </a:solidFill>
                 <a:latin typeface="Calibri" pitchFamily="34" charset="0"/>
                 <a:ea typeface="Calibri" pitchFamily="34" charset="-122"/>
                 <a:cs typeface="Calibri" pitchFamily="34" charset="-120"/>
               </a:rPr>
-              <a:t>Melting &amp; Freezing</a:t>
-            </a:r>
-            <a:endParaRPr lang="en-US" sz="1400" dirty="0"/>
-          </a:p>
-        </p:txBody>
-      </p:sp>
-      <p:sp>
-        <p:nvSpPr>
-          <p:cNvPr id="8" name="Text 6"/>
-          <p:cNvSpPr/>
-          <p:nvPr/>
-        </p:nvSpPr>
-        <p:spPr>
-          <a:xfrm>
-            <a:off x="594360" y="1737360"/>
-            <a:ext cx="2286000" cy="1097280"/>
-          </a:xfrm>
-          <a:prstGeom prst="rect">
-            <a:avLst/>
-          </a:prstGeom>
-          <a:noFill/>
-          <a:ln/>
-        </p:spPr>
-        <p:txBody>
-          <a:bodyPr wrap="square" rtlCol="0" anchor="t"/>
-          <a:lstStyle/>
-          <a:p>
+              <a:t>Key Idea: </a:t>
+            </a:r>
             <a:pPr indent="0" marL="0">
               <a:buNone/>
             </a:pPr>
             <a:r>
-              <a:rPr lang="en-US" sz="1100" dirty="0">
+              <a:rPr lang="en-US" sz="1200" i="1" dirty="0">
                 <a:solidFill>
                   <a:srgbClr val="3D3A36"/>
                 </a:solidFill>
@@ -1868,269 +2943,9 @@
                 <a:ea typeface="Calibri" pitchFamily="34" charset="-122"/>
                 <a:cs typeface="Calibri" pitchFamily="34" charset="-120"/>
               </a:rPr>
-              <a:t>Melting: solid → liquid (add heat). Freezing: liquid → solid (remove heat). Water melts/freezes at 0°C. Particles gain/lose energy to break/form bonds.</a:t>
-            </a:r>
-            <a:endParaRPr lang="en-US" sz="1100" dirty="0"/>
-          </a:p>
-        </p:txBody>
-      </p:sp>
-      <p:sp>
-        <p:nvSpPr>
-          <p:cNvPr id="9" name="Shape 7"/>
-          <p:cNvSpPr/>
-          <p:nvPr/>
-        </p:nvSpPr>
-        <p:spPr>
-          <a:xfrm>
-            <a:off x="3291840" y="1188720"/>
-            <a:ext cx="2560320" cy="1828800"/>
-          </a:xfrm>
-          <a:prstGeom prst="rect">
-            <a:avLst/>
-          </a:prstGeom>
-          <a:solidFill>
-            <a:srgbClr val="FFFFFF"/>
-          </a:solidFill>
-          <a:ln w="12700">
-            <a:solidFill>
-              <a:srgbClr val="E5E2DC"/>
-            </a:solidFill>
-            <a:prstDash val="solid"/>
-          </a:ln>
-          <a:effectLst>
-            <a:outerShdw sx="100000" sy="100000" kx="0" ky="0" algn="bl" rotWithShape="0" blurRad="50800" dist="25400" dir="8100000">
-              <a:srgbClr val="000000">
-                <a:alpha val="10000"/>
-              </a:srgbClr>
-            </a:outerShdw>
-          </a:effectLst>
-        </p:spPr>
-      </p:sp>
-      <p:sp>
-        <p:nvSpPr>
-          <p:cNvPr id="10" name="Shape 8"/>
-          <p:cNvSpPr/>
-          <p:nvPr/>
-        </p:nvSpPr>
-        <p:spPr>
-          <a:xfrm>
-            <a:off x="3291840" y="1188720"/>
-            <a:ext cx="2560320" cy="54864"/>
-          </a:xfrm>
-          <a:prstGeom prst="rect">
-            <a:avLst/>
-          </a:prstGeom>
-          <a:solidFill>
-            <a:srgbClr val="2A9D8F"/>
-          </a:solidFill>
-          <a:ln/>
-        </p:spPr>
-      </p:sp>
-      <p:sp>
-        <p:nvSpPr>
-          <p:cNvPr id="11" name="Text 9"/>
-          <p:cNvSpPr/>
-          <p:nvPr/>
-        </p:nvSpPr>
-        <p:spPr>
-          <a:xfrm>
-            <a:off x="3429000" y="1325880"/>
-            <a:ext cx="2286000" cy="365760"/>
-          </a:xfrm>
-          <a:prstGeom prst="rect">
-            <a:avLst/>
-          </a:prstGeom>
-          <a:noFill/>
-          <a:ln/>
-        </p:spPr>
-        <p:txBody>
-          <a:bodyPr wrap="square" rtlCol="0" anchor="ctr"/>
-          <a:lstStyle/>
-          <a:p>
-            <a:pPr indent="0" marL="0">
-              <a:buNone/>
-            </a:pPr>
-            <a:r>
-              <a:rPr lang="en-US" sz="1400" b="1" dirty="0">
-                <a:solidFill>
-                  <a:srgbClr val="1B2A4A"/>
-                </a:solidFill>
-                <a:latin typeface="Calibri" pitchFamily="34" charset="0"/>
-                <a:ea typeface="Calibri" pitchFamily="34" charset="-122"/>
-                <a:cs typeface="Calibri" pitchFamily="34" charset="-120"/>
-              </a:rPr>
-              <a:t>Evaporation &amp; Condensation</a:t>
-            </a:r>
-            <a:endParaRPr lang="en-US" sz="1400" dirty="0"/>
-          </a:p>
-        </p:txBody>
-      </p:sp>
-      <p:sp>
-        <p:nvSpPr>
-          <p:cNvPr id="12" name="Text 10"/>
-          <p:cNvSpPr/>
-          <p:nvPr/>
-        </p:nvSpPr>
-        <p:spPr>
-          <a:xfrm>
-            <a:off x="3429000" y="1737360"/>
-            <a:ext cx="2286000" cy="1097280"/>
-          </a:xfrm>
-          <a:prstGeom prst="rect">
-            <a:avLst/>
-          </a:prstGeom>
-          <a:noFill/>
-          <a:ln/>
-        </p:spPr>
-        <p:txBody>
-          <a:bodyPr wrap="square" rtlCol="0" anchor="t"/>
-          <a:lstStyle/>
-          <a:p>
-            <a:pPr indent="0" marL="0">
-              <a:buNone/>
-            </a:pPr>
-            <a:r>
-              <a:rPr lang="en-US" sz="1100" dirty="0">
-                <a:solidFill>
-                  <a:srgbClr val="3D3A36"/>
-                </a:solidFill>
-                <a:latin typeface="Calibri" pitchFamily="34" charset="0"/>
-                <a:ea typeface="Calibri" pitchFamily="34" charset="-122"/>
-                <a:cs typeface="Calibri" pitchFamily="34" charset="-120"/>
-              </a:rPr>
-              <a:t>Evaporation: liquid → gas (add heat). Condensation: gas → liquid (remove heat). Water boils at 100°C. Evaporation happens at ANY temperature from the surface.</a:t>
-            </a:r>
-            <a:endParaRPr lang="en-US" sz="1100" dirty="0"/>
-          </a:p>
-        </p:txBody>
-      </p:sp>
-      <p:sp>
-        <p:nvSpPr>
-          <p:cNvPr id="13" name="Shape 11"/>
-          <p:cNvSpPr/>
-          <p:nvPr/>
-        </p:nvSpPr>
-        <p:spPr>
-          <a:xfrm>
-            <a:off x="6126480" y="1188720"/>
-            <a:ext cx="2560320" cy="1828800"/>
-          </a:xfrm>
-          <a:prstGeom prst="rect">
-            <a:avLst/>
-          </a:prstGeom>
-          <a:solidFill>
-            <a:srgbClr val="FFFFFF"/>
-          </a:solidFill>
-          <a:ln w="12700">
-            <a:solidFill>
-              <a:srgbClr val="E5E2DC"/>
-            </a:solidFill>
-            <a:prstDash val="solid"/>
-          </a:ln>
-          <a:effectLst>
-            <a:outerShdw sx="100000" sy="100000" kx="0" ky="0" algn="bl" rotWithShape="0" blurRad="50800" dist="25400" dir="8100000">
-              <a:srgbClr val="000000">
-                <a:alpha val="10000"/>
-              </a:srgbClr>
-            </a:outerShdw>
-          </a:effectLst>
-        </p:spPr>
-      </p:sp>
-      <p:sp>
-        <p:nvSpPr>
-          <p:cNvPr id="14" name="Shape 12"/>
-          <p:cNvSpPr/>
-          <p:nvPr/>
-        </p:nvSpPr>
-        <p:spPr>
-          <a:xfrm>
-            <a:off x="6126480" y="1188720"/>
-            <a:ext cx="2560320" cy="54864"/>
-          </a:xfrm>
-          <a:prstGeom prst="rect">
-            <a:avLst/>
-          </a:prstGeom>
-          <a:solidFill>
-            <a:srgbClr val="2A9D8F"/>
-          </a:solidFill>
-          <a:ln/>
-        </p:spPr>
-      </p:sp>
-      <p:sp>
-        <p:nvSpPr>
-          <p:cNvPr id="15" name="Text 13"/>
-          <p:cNvSpPr/>
-          <p:nvPr/>
-        </p:nvSpPr>
-        <p:spPr>
-          <a:xfrm>
-            <a:off x="6263640" y="1325880"/>
-            <a:ext cx="2286000" cy="365760"/>
-          </a:xfrm>
-          <a:prstGeom prst="rect">
-            <a:avLst/>
-          </a:prstGeom>
-          <a:noFill/>
-          <a:ln/>
-        </p:spPr>
-        <p:txBody>
-          <a:bodyPr wrap="square" rtlCol="0" anchor="ctr"/>
-          <a:lstStyle/>
-          <a:p>
-            <a:pPr indent="0" marL="0">
-              <a:buNone/>
-            </a:pPr>
-            <a:r>
-              <a:rPr lang="en-US" sz="1400" b="1" dirty="0">
-                <a:solidFill>
-                  <a:srgbClr val="1B2A4A"/>
-                </a:solidFill>
-                <a:latin typeface="Calibri" pitchFamily="34" charset="0"/>
-                <a:ea typeface="Calibri" pitchFamily="34" charset="-122"/>
-                <a:cs typeface="Calibri" pitchFamily="34" charset="-120"/>
-              </a:rPr>
-              <a:t>Sublimation &amp; Deposition</a:t>
-            </a:r>
-            <a:endParaRPr lang="en-US" sz="1400" dirty="0"/>
-          </a:p>
-        </p:txBody>
-      </p:sp>
-      <p:sp>
-        <p:nvSpPr>
-          <p:cNvPr id="16" name="Text 14"/>
-          <p:cNvSpPr/>
-          <p:nvPr/>
-        </p:nvSpPr>
-        <p:spPr>
-          <a:xfrm>
-            <a:off x="6263640" y="1737360"/>
-            <a:ext cx="2286000" cy="1097280"/>
-          </a:xfrm>
-          <a:prstGeom prst="rect">
-            <a:avLst/>
-          </a:prstGeom>
-          <a:noFill/>
-          <a:ln/>
-        </p:spPr>
-        <p:txBody>
-          <a:bodyPr wrap="square" rtlCol="0" anchor="t"/>
-          <a:lstStyle/>
-          <a:p>
-            <a:pPr indent="0" marL="0">
-              <a:buNone/>
-            </a:pPr>
-            <a:r>
-              <a:rPr lang="en-US" sz="1100" dirty="0">
-                <a:solidFill>
-                  <a:srgbClr val="3D3A36"/>
-                </a:solidFill>
-                <a:latin typeface="Calibri" pitchFamily="34" charset="0"/>
-                <a:ea typeface="Calibri" pitchFamily="34" charset="-122"/>
-                <a:cs typeface="Calibri" pitchFamily="34" charset="-120"/>
-              </a:rPr>
-              <a:t>Sublimation: solid → gas directly (skips liquid). Deposition: gas → solid directly. Example: dry ice (solid CO₂) sublimes. Frost forms by deposition.</a:t>
-            </a:r>
-            <a:endParaRPr lang="en-US" sz="1100" dirty="0"/>
+              <a:t>This is why water stays at 100°C while it boils — all energy goes into breaking bonds.</a:t>
+            </a:r>
+            <a:endParaRPr lang="en-US" sz="1200" dirty="0"/>
           </a:p>
         </p:txBody>
       </p:sp>
@@ -2175,7 +2990,47 @@
         <p:spPr>
           <a:xfrm>
             <a:off x="0" y="0"/>
-            <a:ext cx="9144000" cy="54864"/>
+            <a:ext cx="9144000" cy="822960"/>
+          </a:xfrm>
+          <a:prstGeom prst="rect">
+            <a:avLst/>
+          </a:prstGeom>
+          <a:solidFill>
+            <a:srgbClr val="FFFFFF"/>
+          </a:solidFill>
+          <a:ln/>
+        </p:spPr>
+      </p:sp>
+      <p:sp>
+        <p:nvSpPr>
+          <p:cNvPr id="3" name="Shape 1"/>
+          <p:cNvSpPr/>
+          <p:nvPr/>
+        </p:nvSpPr>
+        <p:spPr>
+          <a:xfrm>
+            <a:off x="0" y="804672"/>
+            <a:ext cx="9144000" cy="27432"/>
+          </a:xfrm>
+          <a:prstGeom prst="rect">
+            <a:avLst/>
+          </a:prstGeom>
+          <a:solidFill>
+            <a:srgbClr val="E5E2DC"/>
+          </a:solidFill>
+          <a:ln/>
+        </p:spPr>
+      </p:sp>
+      <p:sp>
+        <p:nvSpPr>
+          <p:cNvPr id="4" name="Shape 2"/>
+          <p:cNvSpPr/>
+          <p:nvPr/>
+        </p:nvSpPr>
+        <p:spPr>
+          <a:xfrm>
+            <a:off x="548640" y="201168"/>
+            <a:ext cx="54864" cy="420624"/>
           </a:xfrm>
           <a:prstGeom prst="rect">
             <a:avLst/>
@@ -2188,14 +3043,14 @@
       </p:sp>
       <p:sp>
         <p:nvSpPr>
-          <p:cNvPr id="3" name="Text 1"/>
-          <p:cNvSpPr/>
-          <p:nvPr/>
-        </p:nvSpPr>
-        <p:spPr>
-          <a:xfrm>
-            <a:off x="7772400" y="4709160"/>
-            <a:ext cx="1097280" cy="320040"/>
+          <p:cNvPr id="5" name="Text 3"/>
+          <p:cNvSpPr/>
+          <p:nvPr/>
+        </p:nvSpPr>
+        <p:spPr>
+          <a:xfrm>
+            <a:off x="777240" y="137160"/>
+            <a:ext cx="7772400" cy="548640"/>
           </a:xfrm>
           <a:prstGeom prst="rect">
             <a:avLst/>
@@ -2204,53 +3059,14 @@
           <a:ln/>
         </p:spPr>
         <p:txBody>
-          <a:bodyPr wrap="square" rtlCol="0" anchor="ctr"/>
-          <a:lstStyle/>
-          <a:p>
-            <a:pPr algn="r" indent="0" marL="0">
-              <a:buNone/>
-            </a:pPr>
-            <a:r>
-              <a:rPr lang="en-US" sz="900" dirty="0">
-                <a:solidFill>
-                  <a:srgbClr val="6B6660"/>
-                </a:solidFill>
-                <a:latin typeface="Calibri" pitchFamily="34" charset="0"/>
-                <a:ea typeface="Calibri" pitchFamily="34" charset="-122"/>
-                <a:cs typeface="Calibri" pitchFamily="34" charset="-120"/>
-              </a:rPr>
-              <a:t>4 / 5</a:t>
-            </a:r>
-            <a:endParaRPr lang="en-US" sz="900" dirty="0"/>
-          </a:p>
-        </p:txBody>
-      </p:sp>
-      <p:sp>
-        <p:nvSpPr>
-          <p:cNvPr id="4" name="Text 2"/>
-          <p:cNvSpPr/>
-          <p:nvPr/>
-        </p:nvSpPr>
-        <p:spPr>
-          <a:xfrm>
-            <a:off x="457200" y="274320"/>
-            <a:ext cx="8229600" cy="640080"/>
-          </a:xfrm>
-          <a:prstGeom prst="rect">
-            <a:avLst/>
-          </a:prstGeom>
-          <a:noFill/>
-          <a:ln/>
-        </p:spPr>
-        <p:txBody>
-          <a:bodyPr wrap="square" rtlCol="0" anchor="ctr"/>
+          <a:bodyPr wrap="square" lIns="0" tIns="0" rIns="0" bIns="0" rtlCol="0" anchor="ctr"/>
           <a:lstStyle/>
           <a:p>
             <a:pPr indent="0" marL="0">
               <a:buNone/>
             </a:pPr>
             <a:r>
-              <a:rPr lang="en-US" sz="2600" b="1" dirty="0">
+              <a:rPr lang="en-US" sz="2000" b="1" dirty="0">
                 <a:solidFill>
                   <a:srgbClr val="1B2A4A"/>
                 </a:solidFill>
@@ -2258,136 +3074,9 @@
                 <a:ea typeface="Georgia" pitchFamily="34" charset="-122"/>
                 <a:cs typeface="Georgia" pitchFamily="34" charset="-120"/>
               </a:rPr>
-              <a:t>Heating and Cooling Curves</a:t>
-            </a:r>
-            <a:endParaRPr lang="en-US" sz="2600" dirty="0"/>
-          </a:p>
-        </p:txBody>
-      </p:sp>
-      <p:sp>
-        <p:nvSpPr>
-          <p:cNvPr id="5" name="Text 3"/>
-          <p:cNvSpPr/>
-          <p:nvPr/>
-        </p:nvSpPr>
-        <p:spPr>
-          <a:xfrm>
-            <a:off x="457200" y="1188720"/>
-            <a:ext cx="3840480" cy="3474720"/>
-          </a:xfrm>
-          <a:prstGeom prst="rect">
-            <a:avLst/>
-          </a:prstGeom>
-          <a:noFill/>
-          <a:ln/>
-        </p:spPr>
-        <p:txBody>
-          <a:bodyPr wrap="square" rtlCol="0" anchor="t"/>
-          <a:lstStyle/>
-          <a:p>
-            <a:pPr marL="342900" indent="-342900">
-              <a:spcAft>
-                <a:spcPts val="600"/>
-              </a:spcAft>
-              <a:buSzPct val="100000"/>
-              <a:buChar char="•"/>
-            </a:pPr>
-            <a:r>
-              <a:rPr lang="en-US" sz="1400" dirty="0">
-                <a:solidFill>
-                  <a:srgbClr val="3D3A36"/>
-                </a:solidFill>
-                <a:latin typeface="Calibri" pitchFamily="34" charset="0"/>
-                <a:ea typeface="Calibri" pitchFamily="34" charset="-122"/>
-                <a:cs typeface="Calibri" pitchFamily="34" charset="-120"/>
-              </a:rPr>
-              <a:t>When you heat a substance, temperature rises steadily</a:t>
-            </a:r>
-            <a:endParaRPr lang="en-US" sz="1400" dirty="0"/>
-          </a:p>
-          <a:p>
-            <a:pPr marL="342900" indent="-342900">
-              <a:spcAft>
-                <a:spcPts val="600"/>
-              </a:spcAft>
-              <a:buSzPct val="100000"/>
-              <a:buChar char="•"/>
-            </a:pPr>
-            <a:r>
-              <a:rPr lang="en-US" sz="1400" dirty="0">
-                <a:solidFill>
-                  <a:srgbClr val="3D3A36"/>
-                </a:solidFill>
-                <a:latin typeface="Calibri" pitchFamily="34" charset="0"/>
-                <a:ea typeface="Calibri" pitchFamily="34" charset="-122"/>
-                <a:cs typeface="Calibri" pitchFamily="34" charset="-120"/>
-              </a:rPr>
-              <a:t>At the melting point, temperature STOPS rising — energy breaks bonds instead</a:t>
-            </a:r>
-            <a:endParaRPr lang="en-US" sz="1400" dirty="0"/>
-          </a:p>
-          <a:p>
-            <a:pPr marL="342900" indent="-342900">
-              <a:spcAft>
-                <a:spcPts val="600"/>
-              </a:spcAft>
-              <a:buSzPct val="100000"/>
-              <a:buChar char="•"/>
-            </a:pPr>
-            <a:r>
-              <a:rPr lang="en-US" sz="1400" dirty="0">
-                <a:solidFill>
-                  <a:srgbClr val="3D3A36"/>
-                </a:solidFill>
-                <a:latin typeface="Calibri" pitchFamily="34" charset="0"/>
-                <a:ea typeface="Calibri" pitchFamily="34" charset="-122"/>
-                <a:cs typeface="Calibri" pitchFamily="34" charset="-120"/>
-              </a:rPr>
-              <a:t>Once all solid has melted, temperature rises again</a:t>
-            </a:r>
-            <a:endParaRPr lang="en-US" sz="1400" dirty="0"/>
-          </a:p>
-          <a:p>
-            <a:pPr marL="342900" indent="-342900">
-              <a:spcAft>
-                <a:spcPts val="600"/>
-              </a:spcAft>
-              <a:buSzPct val="100000"/>
-              <a:buChar char="•"/>
-            </a:pPr>
-            <a:r>
-              <a:rPr lang="en-US" sz="1400" dirty="0">
-                <a:solidFill>
-                  <a:srgbClr val="3D3A36"/>
-                </a:solidFill>
-                <a:latin typeface="Calibri" pitchFamily="34" charset="0"/>
-                <a:ea typeface="Calibri" pitchFamily="34" charset="-122"/>
-                <a:cs typeface="Calibri" pitchFamily="34" charset="-120"/>
-              </a:rPr>
-              <a:t>Same flat section at the boiling point</a:t>
-            </a:r>
-            <a:endParaRPr lang="en-US" sz="1400" dirty="0"/>
-          </a:p>
-          <a:p>
-            <a:pPr marL="342900" indent="-342900">
-              <a:spcAft>
-                <a:spcPts val="600"/>
-              </a:spcAft>
-              <a:buSzPct val="100000"/>
-              <a:buChar char="•"/>
-            </a:pPr>
-            <a:r>
-              <a:rPr lang="en-US" sz="1400" dirty="0">
-                <a:solidFill>
-                  <a:srgbClr val="3D3A36"/>
-                </a:solidFill>
-                <a:latin typeface="Calibri" pitchFamily="34" charset="0"/>
-                <a:ea typeface="Calibri" pitchFamily="34" charset="-122"/>
-                <a:cs typeface="Calibri" pitchFamily="34" charset="-120"/>
-              </a:rPr>
-              <a:t>The flat sections are where changes of state happen</a:t>
-            </a:r>
-            <a:endParaRPr lang="en-US" sz="1400" dirty="0"/>
+              <a:t>Key Temperatures for Water</a:t>
+            </a:r>
+            <a:endParaRPr lang="en-US" sz="2000" dirty="0"/>
           </a:p>
         </p:txBody>
       </p:sp>
@@ -2399,8 +3088,8 @@
         </p:nvSpPr>
         <p:spPr>
           <a:xfrm>
-            <a:off x="4846320" y="1188720"/>
-            <a:ext cx="3840480" cy="3474720"/>
+            <a:off x="731520" y="1280160"/>
+            <a:ext cx="2377440" cy="2377440"/>
           </a:xfrm>
           <a:prstGeom prst="rect">
             <a:avLst/>
@@ -2408,12 +3097,7 @@
           <a:solidFill>
             <a:srgbClr val="FFFFFF"/>
           </a:solidFill>
-          <a:ln w="12700">
-            <a:solidFill>
-              <a:srgbClr val="E5E2DC"/>
-            </a:solidFill>
-            <a:prstDash val="solid"/>
-          </a:ln>
+          <a:ln/>
           <a:effectLst>
             <a:outerShdw sx="100000" sy="100000" kx="0" ky="0" algn="bl" rotWithShape="0" blurRad="50800" dist="25400" dir="8100000">
               <a:srgbClr val="000000">
@@ -2425,23 +3109,42 @@
       </p:sp>
       <p:sp>
         <p:nvSpPr>
-          <p:cNvPr id="7" name="Shape 5"/>
-          <p:cNvSpPr/>
-          <p:nvPr/>
-        </p:nvSpPr>
-        <p:spPr>
-          <a:xfrm>
-            <a:off x="4846320" y="1188720"/>
-            <a:ext cx="3840480" cy="54864"/>
-          </a:xfrm>
-          <a:prstGeom prst="rect">
-            <a:avLst/>
-          </a:prstGeom>
-          <a:solidFill>
-            <a:srgbClr val="2A9D8F"/>
-          </a:solidFill>
-          <a:ln/>
-        </p:spPr>
+          <p:cNvPr id="7" name="Text 5"/>
+          <p:cNvSpPr/>
+          <p:nvPr/>
+        </p:nvSpPr>
+        <p:spPr>
+          <a:xfrm>
+            <a:off x="731520" y="1463040"/>
+            <a:ext cx="2377440" cy="914400"/>
+          </a:xfrm>
+          <a:prstGeom prst="rect">
+            <a:avLst/>
+          </a:prstGeom>
+          <a:noFill/>
+          <a:ln/>
+        </p:spPr>
+        <p:txBody>
+          <a:bodyPr wrap="square" rtlCol="0" anchor="ctr"/>
+          <a:lstStyle/>
+          <a:p>
+            <a:pPr algn="ctr" indent="0" marL="0">
+              <a:buNone/>
+            </a:pPr>
+            <a:r>
+              <a:rPr lang="en-US" sz="3600" b="1" dirty="0">
+                <a:solidFill>
+                  <a:srgbClr val="2A9D8F"/>
+                </a:solidFill>
+                <a:latin typeface="Georgia" pitchFamily="34" charset="0"/>
+                <a:ea typeface="Georgia" pitchFamily="34" charset="-122"/>
+                <a:cs typeface="Georgia" pitchFamily="34" charset="-120"/>
+              </a:rPr>
+              <a:t>0°C</a:t>
+            </a:r>
+            <a:endParaRPr lang="en-US" sz="3600" dirty="0"/>
+          </a:p>
+        </p:txBody>
       </p:sp>
       <p:sp>
         <p:nvSpPr>
@@ -2451,8 +3154,8 @@
         </p:nvSpPr>
         <p:spPr>
           <a:xfrm>
-            <a:off x="5120640" y="1371600"/>
-            <a:ext cx="3291840" cy="3108960"/>
+            <a:off x="731520" y="2423160"/>
+            <a:ext cx="2377440" cy="365760"/>
           </a:xfrm>
           <a:prstGeom prst="rect">
             <a:avLst/>
@@ -2461,136 +3164,390 @@
           <a:ln/>
         </p:spPr>
         <p:txBody>
-          <a:bodyPr wrap="square" rtlCol="0" anchor="t"/>
-          <a:lstStyle/>
-          <a:p>
-            <a:pPr indent="0" marL="0">
-              <a:spcAft>
-                <a:spcPts val="400"/>
-              </a:spcAft>
+          <a:bodyPr wrap="square" rtlCol="0" anchor="ctr"/>
+          <a:lstStyle/>
+          <a:p>
+            <a:pPr algn="ctr" indent="0" marL="0">
               <a:buNone/>
             </a:pPr>
             <a:r>
-              <a:rPr lang="en-US" sz="1600" b="1" dirty="0">
-                <a:solidFill>
-                  <a:srgbClr val="1B2A4A"/>
+              <a:rPr lang="en-US" sz="1200" b="1" dirty="0">
+                <a:solidFill>
+                  <a:srgbClr val="6B6660"/>
                 </a:solidFill>
                 <a:latin typeface="Calibri" pitchFamily="34" charset="0"/>
                 <a:ea typeface="Calibri" pitchFamily="34" charset="-122"/>
                 <a:cs typeface="Calibri" pitchFamily="34" charset="-120"/>
               </a:rPr>
-              <a:t>Physical vs Chemical Change</a:t>
-            </a:r>
-            <a:endParaRPr lang="en-US" sz="1600" dirty="0"/>
-          </a:p>
-          <a:p>
-            <a:pPr indent="0" marL="0">
-              <a:spcAft>
-                <a:spcPts val="400"/>
-              </a:spcAft>
+              <a:t>MELTING POINT</a:t>
+            </a:r>
+            <a:endParaRPr lang="en-US" sz="1200" dirty="0"/>
+          </a:p>
+        </p:txBody>
+      </p:sp>
+      <p:sp>
+        <p:nvSpPr>
+          <p:cNvPr id="9" name="Text 7"/>
+          <p:cNvSpPr/>
+          <p:nvPr/>
+        </p:nvSpPr>
+        <p:spPr>
+          <a:xfrm>
+            <a:off x="822960" y="2834640"/>
+            <a:ext cx="2194560" cy="640080"/>
+          </a:xfrm>
+          <a:prstGeom prst="rect">
+            <a:avLst/>
+          </a:prstGeom>
+          <a:noFill/>
+          <a:ln/>
+        </p:spPr>
+        <p:txBody>
+          <a:bodyPr wrap="square" rtlCol="0" anchor="ctr"/>
+          <a:lstStyle/>
+          <a:p>
+            <a:pPr algn="ctr" indent="0" marL="0">
               <a:buNone/>
             </a:pPr>
-            <a:endParaRPr lang="en-US" sz="1600" dirty="0"/>
-          </a:p>
-          <a:p>
-            <a:pPr indent="0" marL="0">
-              <a:spcAft>
-                <a:spcPts val="400"/>
-              </a:spcAft>
-              <a:buNone/>
-            </a:pPr>
-            <a:r>
-              <a:rPr lang="en-US" sz="1300" dirty="0">
-                <a:solidFill>
-                  <a:srgbClr val="3D3A36"/>
+            <a:r>
+              <a:rPr lang="en-US" sz="1000" dirty="0">
+                <a:solidFill>
+                  <a:srgbClr val="9B9690"/>
                 </a:solidFill>
                 <a:latin typeface="Calibri" pitchFamily="34" charset="0"/>
                 <a:ea typeface="Calibri" pitchFamily="34" charset="-122"/>
                 <a:cs typeface="Calibri" pitchFamily="34" charset="-120"/>
               </a:rPr>
-              <a:t>Changes of state are PHYSICAL changes</a:t>
-            </a:r>
-            <a:endParaRPr lang="en-US" sz="1600" dirty="0"/>
-          </a:p>
-          <a:p>
-            <a:pPr indent="0" marL="0">
-              <a:spcAft>
-                <a:spcPts val="400"/>
-              </a:spcAft>
+              <a:t>Solid ice becomes liquid water</a:t>
+            </a:r>
+            <a:endParaRPr lang="en-US" sz="1000" dirty="0"/>
+          </a:p>
+        </p:txBody>
+      </p:sp>
+      <p:sp>
+        <p:nvSpPr>
+          <p:cNvPr id="10" name="Shape 8"/>
+          <p:cNvSpPr/>
+          <p:nvPr/>
+        </p:nvSpPr>
+        <p:spPr>
+          <a:xfrm>
+            <a:off x="3383280" y="1280160"/>
+            <a:ext cx="2377440" cy="2377440"/>
+          </a:xfrm>
+          <a:prstGeom prst="rect">
+            <a:avLst/>
+          </a:prstGeom>
+          <a:solidFill>
+            <a:srgbClr val="FFFFFF"/>
+          </a:solidFill>
+          <a:ln/>
+          <a:effectLst>
+            <a:outerShdw sx="100000" sy="100000" kx="0" ky="0" algn="bl" rotWithShape="0" blurRad="50800" dist="25400" dir="8100000">
+              <a:srgbClr val="000000">
+                <a:alpha val="10000"/>
+              </a:srgbClr>
+            </a:outerShdw>
+          </a:effectLst>
+        </p:spPr>
+      </p:sp>
+      <p:sp>
+        <p:nvSpPr>
+          <p:cNvPr id="11" name="Text 9"/>
+          <p:cNvSpPr/>
+          <p:nvPr/>
+        </p:nvSpPr>
+        <p:spPr>
+          <a:xfrm>
+            <a:off x="3383280" y="1463040"/>
+            <a:ext cx="2377440" cy="914400"/>
+          </a:xfrm>
+          <a:prstGeom prst="rect">
+            <a:avLst/>
+          </a:prstGeom>
+          <a:noFill/>
+          <a:ln/>
+        </p:spPr>
+        <p:txBody>
+          <a:bodyPr wrap="square" rtlCol="0" anchor="ctr"/>
+          <a:lstStyle/>
+          <a:p>
+            <a:pPr algn="ctr" indent="0" marL="0">
               <a:buNone/>
             </a:pPr>
             <a:r>
-              <a:rPr lang="en-US" sz="1300" dirty="0">
-                <a:solidFill>
-                  <a:srgbClr val="3D3A36"/>
+              <a:rPr lang="en-US" sz="3600" b="1" dirty="0">
+                <a:solidFill>
+                  <a:srgbClr val="2A9D8F"/>
+                </a:solidFill>
+                <a:latin typeface="Georgia" pitchFamily="34" charset="0"/>
+                <a:ea typeface="Georgia" pitchFamily="34" charset="-122"/>
+                <a:cs typeface="Georgia" pitchFamily="34" charset="-120"/>
+              </a:rPr>
+              <a:t>100°C</a:t>
+            </a:r>
+            <a:endParaRPr lang="en-US" sz="3600" dirty="0"/>
+          </a:p>
+        </p:txBody>
+      </p:sp>
+      <p:sp>
+        <p:nvSpPr>
+          <p:cNvPr id="12" name="Text 10"/>
+          <p:cNvSpPr/>
+          <p:nvPr/>
+        </p:nvSpPr>
+        <p:spPr>
+          <a:xfrm>
+            <a:off x="3383280" y="2423160"/>
+            <a:ext cx="2377440" cy="365760"/>
+          </a:xfrm>
+          <a:prstGeom prst="rect">
+            <a:avLst/>
+          </a:prstGeom>
+          <a:noFill/>
+          <a:ln/>
+        </p:spPr>
+        <p:txBody>
+          <a:bodyPr wrap="square" rtlCol="0" anchor="ctr"/>
+          <a:lstStyle/>
+          <a:p>
+            <a:pPr algn="ctr" indent="0" marL="0">
+              <a:buNone/>
+            </a:pPr>
+            <a:r>
+              <a:rPr lang="en-US" sz="1200" b="1" dirty="0">
+                <a:solidFill>
+                  <a:srgbClr val="6B6660"/>
                 </a:solidFill>
                 <a:latin typeface="Calibri" pitchFamily="34" charset="0"/>
                 <a:ea typeface="Calibri" pitchFamily="34" charset="-122"/>
                 <a:cs typeface="Calibri" pitchFamily="34" charset="-120"/>
               </a:rPr>
-              <a:t>The substance is still the same (water is still H₂O)</a:t>
-            </a:r>
-            <a:endParaRPr lang="en-US" sz="1600" dirty="0"/>
-          </a:p>
-          <a:p>
-            <a:pPr indent="0" marL="0">
-              <a:spcAft>
-                <a:spcPts val="400"/>
-              </a:spcAft>
+              <a:t>BOILING POINT</a:t>
+            </a:r>
+            <a:endParaRPr lang="en-US" sz="1200" dirty="0"/>
+          </a:p>
+        </p:txBody>
+      </p:sp>
+      <p:sp>
+        <p:nvSpPr>
+          <p:cNvPr id="13" name="Text 11"/>
+          <p:cNvSpPr/>
+          <p:nvPr/>
+        </p:nvSpPr>
+        <p:spPr>
+          <a:xfrm>
+            <a:off x="3474720" y="2834640"/>
+            <a:ext cx="2194560" cy="640080"/>
+          </a:xfrm>
+          <a:prstGeom prst="rect">
+            <a:avLst/>
+          </a:prstGeom>
+          <a:noFill/>
+          <a:ln/>
+        </p:spPr>
+        <p:txBody>
+          <a:bodyPr wrap="square" rtlCol="0" anchor="ctr"/>
+          <a:lstStyle/>
+          <a:p>
+            <a:pPr algn="ctr" indent="0" marL="0">
               <a:buNone/>
             </a:pPr>
             <a:r>
-              <a:rPr lang="en-US" sz="1300" dirty="0">
-                <a:solidFill>
-                  <a:srgbClr val="3D3A36"/>
+              <a:rPr lang="en-US" sz="1000" dirty="0">
+                <a:solidFill>
+                  <a:srgbClr val="9B9690"/>
                 </a:solidFill>
                 <a:latin typeface="Calibri" pitchFamily="34" charset="0"/>
                 <a:ea typeface="Calibri" pitchFamily="34" charset="-122"/>
                 <a:cs typeface="Calibri" pitchFamily="34" charset="-120"/>
               </a:rPr>
-              <a:t>Physical changes are reversible</a:t>
-            </a:r>
-            <a:endParaRPr lang="en-US" sz="1600" dirty="0"/>
-          </a:p>
-          <a:p>
-            <a:pPr indent="0" marL="0">
-              <a:spcAft>
-                <a:spcPts val="400"/>
-              </a:spcAft>
+              <a:t>Liquid water becomes steam</a:t>
+            </a:r>
+            <a:endParaRPr lang="en-US" sz="1000" dirty="0"/>
+          </a:p>
+        </p:txBody>
+      </p:sp>
+      <p:sp>
+        <p:nvSpPr>
+          <p:cNvPr id="14" name="Shape 12"/>
+          <p:cNvSpPr/>
+          <p:nvPr/>
+        </p:nvSpPr>
+        <p:spPr>
+          <a:xfrm>
+            <a:off x="6035040" y="1280160"/>
+            <a:ext cx="2377440" cy="2377440"/>
+          </a:xfrm>
+          <a:prstGeom prst="rect">
+            <a:avLst/>
+          </a:prstGeom>
+          <a:solidFill>
+            <a:srgbClr val="FFFFFF"/>
+          </a:solidFill>
+          <a:ln/>
+          <a:effectLst>
+            <a:outerShdw sx="100000" sy="100000" kx="0" ky="0" algn="bl" rotWithShape="0" blurRad="50800" dist="25400" dir="8100000">
+              <a:srgbClr val="000000">
+                <a:alpha val="10000"/>
+              </a:srgbClr>
+            </a:outerShdw>
+          </a:effectLst>
+        </p:spPr>
+      </p:sp>
+      <p:sp>
+        <p:nvSpPr>
+          <p:cNvPr id="15" name="Text 13"/>
+          <p:cNvSpPr/>
+          <p:nvPr/>
+        </p:nvSpPr>
+        <p:spPr>
+          <a:xfrm>
+            <a:off x="6035040" y="1463040"/>
+            <a:ext cx="2377440" cy="914400"/>
+          </a:xfrm>
+          <a:prstGeom prst="rect">
+            <a:avLst/>
+          </a:prstGeom>
+          <a:noFill/>
+          <a:ln/>
+        </p:spPr>
+        <p:txBody>
+          <a:bodyPr wrap="square" rtlCol="0" anchor="ctr"/>
+          <a:lstStyle/>
+          <a:p>
+            <a:pPr algn="ctr" indent="0" marL="0">
               <a:buNone/>
             </a:pPr>
             <a:r>
-              <a:rPr lang="en-US" sz="1300" dirty="0">
-                <a:solidFill>
-                  <a:srgbClr val="3D3A36"/>
+              <a:rPr lang="en-US" sz="3600" b="1" dirty="0">
+                <a:solidFill>
+                  <a:srgbClr val="2A9D8F"/>
+                </a:solidFill>
+                <a:latin typeface="Georgia" pitchFamily="34" charset="0"/>
+                <a:ea typeface="Georgia" pitchFamily="34" charset="-122"/>
+                <a:cs typeface="Georgia" pitchFamily="34" charset="-120"/>
+              </a:rPr>
+              <a:t>−273°C</a:t>
+            </a:r>
+            <a:endParaRPr lang="en-US" sz="3600" dirty="0"/>
+          </a:p>
+        </p:txBody>
+      </p:sp>
+      <p:sp>
+        <p:nvSpPr>
+          <p:cNvPr id="16" name="Text 14"/>
+          <p:cNvSpPr/>
+          <p:nvPr/>
+        </p:nvSpPr>
+        <p:spPr>
+          <a:xfrm>
+            <a:off x="6035040" y="2423160"/>
+            <a:ext cx="2377440" cy="365760"/>
+          </a:xfrm>
+          <a:prstGeom prst="rect">
+            <a:avLst/>
+          </a:prstGeom>
+          <a:noFill/>
+          <a:ln/>
+        </p:spPr>
+        <p:txBody>
+          <a:bodyPr wrap="square" rtlCol="0" anchor="ctr"/>
+          <a:lstStyle/>
+          <a:p>
+            <a:pPr algn="ctr" indent="0" marL="0">
+              <a:buNone/>
+            </a:pPr>
+            <a:r>
+              <a:rPr lang="en-US" sz="1200" b="1" dirty="0">
+                <a:solidFill>
+                  <a:srgbClr val="6B6660"/>
                 </a:solidFill>
                 <a:latin typeface="Calibri" pitchFamily="34" charset="0"/>
                 <a:ea typeface="Calibri" pitchFamily="34" charset="-122"/>
                 <a:cs typeface="Calibri" pitchFamily="34" charset="-120"/>
               </a:rPr>
-              <a:t>Chemical changes form NEW substances (irreversible)</a:t>
-            </a:r>
-            <a:endParaRPr lang="en-US" sz="1600" dirty="0"/>
-          </a:p>
-          <a:p>
-            <a:pPr indent="0" marL="0">
-              <a:spcAft>
-                <a:spcPts val="400"/>
-              </a:spcAft>
+              <a:t>ABSOLUTE ZERO</a:t>
+            </a:r>
+            <a:endParaRPr lang="en-US" sz="1200" dirty="0"/>
+          </a:p>
+        </p:txBody>
+      </p:sp>
+      <p:sp>
+        <p:nvSpPr>
+          <p:cNvPr id="17" name="Text 15"/>
+          <p:cNvSpPr/>
+          <p:nvPr/>
+        </p:nvSpPr>
+        <p:spPr>
+          <a:xfrm>
+            <a:off x="6126480" y="2834640"/>
+            <a:ext cx="2194560" cy="640080"/>
+          </a:xfrm>
+          <a:prstGeom prst="rect">
+            <a:avLst/>
+          </a:prstGeom>
+          <a:noFill/>
+          <a:ln/>
+        </p:spPr>
+        <p:txBody>
+          <a:bodyPr wrap="square" rtlCol="0" anchor="ctr"/>
+          <a:lstStyle/>
+          <a:p>
+            <a:pPr algn="ctr" indent="0" marL="0">
               <a:buNone/>
             </a:pPr>
             <a:r>
-              <a:rPr lang="en-US" sz="1300" dirty="0">
-                <a:solidFill>
-                  <a:srgbClr val="3D3A36"/>
+              <a:rPr lang="en-US" sz="1000" dirty="0">
+                <a:solidFill>
+                  <a:srgbClr val="9B9690"/>
                 </a:solidFill>
                 <a:latin typeface="Calibri" pitchFamily="34" charset="0"/>
                 <a:ea typeface="Calibri" pitchFamily="34" charset="-122"/>
                 <a:cs typeface="Calibri" pitchFamily="34" charset="-120"/>
               </a:rPr>
-              <a:t>Examples of chemical changes: burning, rusting, cooking</a:t>
-            </a:r>
-            <a:endParaRPr lang="en-US" sz="1600" dirty="0"/>
+              <a:t>Particles have minimum energy</a:t>
+            </a:r>
+            <a:endParaRPr lang="en-US" sz="1000" dirty="0"/>
+          </a:p>
+        </p:txBody>
+      </p:sp>
+      <p:sp>
+        <p:nvSpPr>
+          <p:cNvPr id="18" name="Text 16"/>
+          <p:cNvSpPr/>
+          <p:nvPr/>
+        </p:nvSpPr>
+        <p:spPr>
+          <a:xfrm>
+            <a:off x="731520" y="4114800"/>
+            <a:ext cx="7680960" cy="457200"/>
+          </a:xfrm>
+          <a:prstGeom prst="rect">
+            <a:avLst/>
+          </a:prstGeom>
+          <a:noFill/>
+          <a:ln/>
+        </p:spPr>
+        <p:txBody>
+          <a:bodyPr wrap="square" rtlCol="0" anchor="ctr"/>
+          <a:lstStyle/>
+          <a:p>
+            <a:pPr algn="ctr" indent="0" marL="0">
+              <a:buNone/>
+            </a:pPr>
+            <a:r>
+              <a:rPr lang="en-US" sz="1200" i="1" dirty="0">
+                <a:solidFill>
+                  <a:srgbClr val="6B6660"/>
+                </a:solidFill>
+                <a:latin typeface="Calibri" pitchFamily="34" charset="0"/>
+                <a:ea typeface="Calibri" pitchFamily="34" charset="-122"/>
+                <a:cs typeface="Calibri" pitchFamily="34" charset="-120"/>
+              </a:rPr>
+              <a:t>These temperatures are at standard atmospheric pressure (sea level).</a:t>
+            </a:r>
+            <a:endParaRPr lang="en-US" sz="1200" dirty="0"/>
           </a:p>
         </p:txBody>
       </p:sp>
@@ -2608,7 +3565,7 @@
     <p:bg>
       <p:bgPr>
         <a:solidFill>
-          <a:srgbClr val="1B2A4A"/>
+          <a:srgbClr val="FAF8F5"/>
         </a:solidFill>
       </p:bgPr>
     </p:bg>
@@ -2635,27 +3592,67 @@
         <p:spPr>
           <a:xfrm>
             <a:off x="0" y="0"/>
-            <a:ext cx="109728" cy="5143500"/>
-          </a:xfrm>
-          <a:prstGeom prst="rect">
-            <a:avLst/>
-          </a:prstGeom>
-          <a:solidFill>
-            <a:srgbClr val="E9C46A"/>
-          </a:solidFill>
-          <a:ln/>
-        </p:spPr>
-      </p:sp>
-      <p:sp>
-        <p:nvSpPr>
-          <p:cNvPr id="3" name="Text 1"/>
-          <p:cNvSpPr/>
-          <p:nvPr/>
-        </p:nvSpPr>
-        <p:spPr>
-          <a:xfrm>
-            <a:off x="731520" y="457200"/>
-            <a:ext cx="7772400" cy="731520"/>
+            <a:ext cx="9144000" cy="822960"/>
+          </a:xfrm>
+          <a:prstGeom prst="rect">
+            <a:avLst/>
+          </a:prstGeom>
+          <a:solidFill>
+            <a:srgbClr val="FFFFFF"/>
+          </a:solidFill>
+          <a:ln/>
+        </p:spPr>
+      </p:sp>
+      <p:sp>
+        <p:nvSpPr>
+          <p:cNvPr id="3" name="Shape 1"/>
+          <p:cNvSpPr/>
+          <p:nvPr/>
+        </p:nvSpPr>
+        <p:spPr>
+          <a:xfrm>
+            <a:off x="0" y="804672"/>
+            <a:ext cx="9144000" cy="27432"/>
+          </a:xfrm>
+          <a:prstGeom prst="rect">
+            <a:avLst/>
+          </a:prstGeom>
+          <a:solidFill>
+            <a:srgbClr val="E5E2DC"/>
+          </a:solidFill>
+          <a:ln/>
+        </p:spPr>
+      </p:sp>
+      <p:sp>
+        <p:nvSpPr>
+          <p:cNvPr id="4" name="Shape 2"/>
+          <p:cNvSpPr/>
+          <p:nvPr/>
+        </p:nvSpPr>
+        <p:spPr>
+          <a:xfrm>
+            <a:off x="548640" y="201168"/>
+            <a:ext cx="54864" cy="420624"/>
+          </a:xfrm>
+          <a:prstGeom prst="rect">
+            <a:avLst/>
+          </a:prstGeom>
+          <a:solidFill>
+            <a:srgbClr val="2A9D8F"/>
+          </a:solidFill>
+          <a:ln/>
+        </p:spPr>
+      </p:sp>
+      <p:sp>
+        <p:nvSpPr>
+          <p:cNvPr id="5" name="Text 3"/>
+          <p:cNvSpPr/>
+          <p:nvPr/>
+        </p:nvSpPr>
+        <p:spPr>
+          <a:xfrm>
+            <a:off x="777240" y="137160"/>
+            <a:ext cx="7772400" cy="548640"/>
           </a:xfrm>
           <a:prstGeom prst="rect">
             <a:avLst/>
@@ -2664,37 +3661,123 @@
           <a:ln/>
         </p:spPr>
         <p:txBody>
-          <a:bodyPr wrap="square" rtlCol="0" anchor="ctr"/>
+          <a:bodyPr wrap="square" lIns="0" tIns="0" rIns="0" bIns="0" rtlCol="0" anchor="ctr"/>
           <a:lstStyle/>
           <a:p>
             <a:pPr indent="0" marL="0">
               <a:buNone/>
             </a:pPr>
             <a:r>
-              <a:rPr lang="en-US" sz="3200" b="1" dirty="0">
-                <a:solidFill>
-                  <a:srgbClr val="FFFFFF"/>
+              <a:rPr lang="en-US" sz="2000" b="1" dirty="0">
+                <a:solidFill>
+                  <a:srgbClr val="1B2A4A"/>
                 </a:solidFill>
                 <a:latin typeface="Georgia" pitchFamily="34" charset="0"/>
                 <a:ea typeface="Georgia" pitchFamily="34" charset="-122"/>
                 <a:cs typeface="Georgia" pitchFamily="34" charset="-120"/>
               </a:rPr>
-              <a:t>Key Takeaways</a:t>
-            </a:r>
-            <a:endParaRPr lang="en-US" sz="3200" dirty="0"/>
-          </a:p>
-        </p:txBody>
-      </p:sp>
-      <p:sp>
-        <p:nvSpPr>
-          <p:cNvPr id="4" name="Text 2"/>
-          <p:cNvSpPr/>
-          <p:nvPr/>
-        </p:nvSpPr>
-        <p:spPr>
-          <a:xfrm>
-            <a:off x="731520" y="1463040"/>
-            <a:ext cx="7772400" cy="3200400"/>
+              <a:t>Evaporation vs Boiling</a:t>
+            </a:r>
+            <a:endParaRPr lang="en-US" sz="2000" dirty="0"/>
+          </a:p>
+        </p:txBody>
+      </p:sp>
+      <p:sp>
+        <p:nvSpPr>
+          <p:cNvPr id="6" name="Shape 4"/>
+          <p:cNvSpPr/>
+          <p:nvPr/>
+        </p:nvSpPr>
+        <p:spPr>
+          <a:xfrm>
+            <a:off x="548640" y="1051560"/>
+            <a:ext cx="3840480" cy="3474720"/>
+          </a:xfrm>
+          <a:prstGeom prst="rect">
+            <a:avLst/>
+          </a:prstGeom>
+          <a:solidFill>
+            <a:srgbClr val="FFFFFF"/>
+          </a:solidFill>
+          <a:ln/>
+          <a:effectLst>
+            <a:outerShdw sx="100000" sy="100000" kx="0" ky="0" algn="bl" rotWithShape="0" blurRad="50800" dist="25400" dir="8100000">
+              <a:srgbClr val="000000">
+                <a:alpha val="10000"/>
+              </a:srgbClr>
+            </a:outerShdw>
+          </a:effectLst>
+        </p:spPr>
+      </p:sp>
+      <p:sp>
+        <p:nvSpPr>
+          <p:cNvPr id="7" name="Shape 5"/>
+          <p:cNvSpPr/>
+          <p:nvPr/>
+        </p:nvSpPr>
+        <p:spPr>
+          <a:xfrm>
+            <a:off x="548640" y="1051560"/>
+            <a:ext cx="3840480" cy="54864"/>
+          </a:xfrm>
+          <a:prstGeom prst="rect">
+            <a:avLst/>
+          </a:prstGeom>
+          <a:solidFill>
+            <a:srgbClr val="2A9D8F"/>
+          </a:solidFill>
+          <a:ln/>
+        </p:spPr>
+      </p:sp>
+      <p:sp>
+        <p:nvSpPr>
+          <p:cNvPr id="8" name="Text 6"/>
+          <p:cNvSpPr/>
+          <p:nvPr/>
+        </p:nvSpPr>
+        <p:spPr>
+          <a:xfrm>
+            <a:off x="777240" y="1188720"/>
+            <a:ext cx="3383280" cy="457200"/>
+          </a:xfrm>
+          <a:prstGeom prst="rect">
+            <a:avLst/>
+          </a:prstGeom>
+          <a:noFill/>
+          <a:ln/>
+        </p:spPr>
+        <p:txBody>
+          <a:bodyPr wrap="square" lIns="0" tIns="0" rIns="0" bIns="0" rtlCol="0" anchor="ctr"/>
+          <a:lstStyle/>
+          <a:p>
+            <a:pPr indent="0" marL="0">
+              <a:buNone/>
+            </a:pPr>
+            <a:r>
+              <a:rPr lang="en-US" sz="1500" b="1" dirty="0">
+                <a:solidFill>
+                  <a:srgbClr val="1B2A4A"/>
+                </a:solidFill>
+                <a:latin typeface="Georgia" pitchFamily="34" charset="0"/>
+                <a:ea typeface="Georgia" pitchFamily="34" charset="-122"/>
+                <a:cs typeface="Georgia" pitchFamily="34" charset="-120"/>
+              </a:rPr>
+              <a:t>Evaporation</a:t>
+            </a:r>
+            <a:endParaRPr lang="en-US" sz="1500" dirty="0"/>
+          </a:p>
+        </p:txBody>
+      </p:sp>
+      <p:sp>
+        <p:nvSpPr>
+          <p:cNvPr id="9" name="Text 7"/>
+          <p:cNvSpPr/>
+          <p:nvPr/>
+        </p:nvSpPr>
+        <p:spPr>
+          <a:xfrm>
+            <a:off x="777240" y="1691640"/>
+            <a:ext cx="3383280" cy="2651760"/>
           </a:xfrm>
           <a:prstGeom prst="rect">
             <a:avLst/>
@@ -2708,120 +3791,167 @@
           <a:p>
             <a:pPr marL="342900" indent="-342900">
               <a:spcAft>
-                <a:spcPts val="1000"/>
+                <a:spcPts val="600"/>
               </a:spcAft>
               <a:buSzPct val="100000"/>
               <a:buChar char="•"/>
             </a:pPr>
             <a:r>
-              <a:rPr lang="en-US" sz="1500" dirty="0">
-                <a:solidFill>
-                  <a:srgbClr val="CADCFC"/>
+              <a:rPr lang="en-US" sz="1300" dirty="0">
+                <a:solidFill>
+                  <a:srgbClr val="3D3A36"/>
                 </a:solidFill>
                 <a:latin typeface="Calibri" pitchFamily="34" charset="0"/>
                 <a:ea typeface="Calibri" pitchFamily="34" charset="-122"/>
                 <a:cs typeface="Calibri" pitchFamily="34" charset="-120"/>
               </a:rPr>
-              <a:t>Melting, freezing, evaporation, condensation, sublimation, deposition</a:t>
-            </a:r>
-            <a:endParaRPr lang="en-US" sz="1500" dirty="0"/>
+              <a:t>Happens at the SURFACE only</a:t>
+            </a:r>
+            <a:endParaRPr lang="en-US" sz="1300" dirty="0"/>
           </a:p>
           <a:p>
             <a:pPr marL="342900" indent="-342900">
               <a:spcAft>
-                <a:spcPts val="1000"/>
+                <a:spcPts val="600"/>
               </a:spcAft>
               <a:buSzPct val="100000"/>
               <a:buChar char="•"/>
             </a:pPr>
             <a:r>
-              <a:rPr lang="en-US" sz="1500" dirty="0">
-                <a:solidFill>
-                  <a:srgbClr val="CADCFC"/>
+              <a:rPr lang="en-US" sz="1300" dirty="0">
+                <a:solidFill>
+                  <a:srgbClr val="3D3A36"/>
                 </a:solidFill>
                 <a:latin typeface="Calibri" pitchFamily="34" charset="0"/>
                 <a:ea typeface="Calibri" pitchFamily="34" charset="-122"/>
                 <a:cs typeface="Calibri" pitchFamily="34" charset="-120"/>
               </a:rPr>
-              <a:t>Changes of state are physical changes — reversible, no new substances</a:t>
-            </a:r>
-            <a:endParaRPr lang="en-US" sz="1500" dirty="0"/>
+              <a:t>Occurs at ANY temperature</a:t>
+            </a:r>
+            <a:endParaRPr lang="en-US" sz="1300" dirty="0"/>
           </a:p>
           <a:p>
             <a:pPr marL="342900" indent="-342900">
               <a:spcAft>
-                <a:spcPts val="1000"/>
+                <a:spcPts val="600"/>
               </a:spcAft>
               <a:buSzPct val="100000"/>
               <a:buChar char="•"/>
             </a:pPr>
             <a:r>
-              <a:rPr lang="en-US" sz="1500" dirty="0">
-                <a:solidFill>
-                  <a:srgbClr val="CADCFC"/>
+              <a:rPr lang="en-US" sz="1300" dirty="0">
+                <a:solidFill>
+                  <a:srgbClr val="3D3A36"/>
                 </a:solidFill>
                 <a:latin typeface="Calibri" pitchFamily="34" charset="0"/>
                 <a:ea typeface="Calibri" pitchFamily="34" charset="-122"/>
                 <a:cs typeface="Calibri" pitchFamily="34" charset="-120"/>
               </a:rPr>
-              <a:t>Energy is added to melt/evaporate, removed to freeze/condense</a:t>
-            </a:r>
-            <a:endParaRPr lang="en-US" sz="1500" dirty="0"/>
+              <a:t>Slow, gradual process</a:t>
+            </a:r>
+            <a:endParaRPr lang="en-US" sz="1300" dirty="0"/>
           </a:p>
           <a:p>
             <a:pPr marL="342900" indent="-342900">
               <a:spcAft>
-                <a:spcPts val="1000"/>
+                <a:spcPts val="600"/>
               </a:spcAft>
               <a:buSzPct val="100000"/>
               <a:buChar char="•"/>
             </a:pPr>
             <a:r>
-              <a:rPr lang="en-US" sz="1500" dirty="0">
-                <a:solidFill>
-                  <a:srgbClr val="CADCFC"/>
+              <a:rPr lang="en-US" sz="1300" dirty="0">
+                <a:solidFill>
+                  <a:srgbClr val="3D3A36"/>
                 </a:solidFill>
                 <a:latin typeface="Calibri" pitchFamily="34" charset="0"/>
                 <a:ea typeface="Calibri" pitchFamily="34" charset="-122"/>
                 <a:cs typeface="Calibri" pitchFamily="34" charset="-120"/>
               </a:rPr>
-              <a:t>Temperature stays flat during a change of state (energy breaks bonds)</a:t>
-            </a:r>
-            <a:endParaRPr lang="en-US" sz="1500" dirty="0"/>
+              <a:t>Fastest particles escape first</a:t>
+            </a:r>
+            <a:endParaRPr lang="en-US" sz="1300" dirty="0"/>
           </a:p>
           <a:p>
             <a:pPr marL="342900" indent="-342900">
               <a:spcAft>
-                <a:spcPts val="1000"/>
+                <a:spcPts val="600"/>
               </a:spcAft>
               <a:buSzPct val="100000"/>
               <a:buChar char="•"/>
             </a:pPr>
             <a:r>
-              <a:rPr lang="en-US" sz="1500" dirty="0">
-                <a:solidFill>
-                  <a:srgbClr val="CADCFC"/>
+              <a:rPr lang="en-US" sz="1300" dirty="0">
+                <a:solidFill>
+                  <a:srgbClr val="3D3A36"/>
                 </a:solidFill>
                 <a:latin typeface="Calibri" pitchFamily="34" charset="0"/>
                 <a:ea typeface="Calibri" pitchFamily="34" charset="-122"/>
                 <a:cs typeface="Calibri" pitchFamily="34" charset="-120"/>
               </a:rPr>
-              <a:t>Evaporation happens at the surface at any temperature; boiling happens throughout at boiling point</a:t>
-            </a:r>
-            <a:endParaRPr lang="en-US" sz="1500" dirty="0"/>
-          </a:p>
-        </p:txBody>
-      </p:sp>
-      <p:sp>
-        <p:nvSpPr>
-          <p:cNvPr id="5" name="Text 3"/>
-          <p:cNvSpPr/>
-          <p:nvPr/>
-        </p:nvSpPr>
-        <p:spPr>
-          <a:xfrm>
-            <a:off x="731520" y="4572000"/>
-            <a:ext cx="7772400" cy="365760"/>
+              <a:t>Example: puddle drying on a sunny day</a:t>
+            </a:r>
+            <a:endParaRPr lang="en-US" sz="1300" dirty="0"/>
+          </a:p>
+        </p:txBody>
+      </p:sp>
+      <p:sp>
+        <p:nvSpPr>
+          <p:cNvPr id="10" name="Shape 8"/>
+          <p:cNvSpPr/>
+          <p:nvPr/>
+        </p:nvSpPr>
+        <p:spPr>
+          <a:xfrm>
+            <a:off x="4754880" y="1051560"/>
+            <a:ext cx="3840480" cy="3474720"/>
+          </a:xfrm>
+          <a:prstGeom prst="rect">
+            <a:avLst/>
+          </a:prstGeom>
+          <a:solidFill>
+            <a:srgbClr val="FFFFFF"/>
+          </a:solidFill>
+          <a:ln/>
+          <a:effectLst>
+            <a:outerShdw sx="100000" sy="100000" kx="0" ky="0" algn="bl" rotWithShape="0" blurRad="50800" dist="25400" dir="8100000">
+              <a:srgbClr val="000000">
+                <a:alpha val="10000"/>
+              </a:srgbClr>
+            </a:outerShdw>
+          </a:effectLst>
+        </p:spPr>
+      </p:sp>
+      <p:sp>
+        <p:nvSpPr>
+          <p:cNvPr id="11" name="Shape 9"/>
+          <p:cNvSpPr/>
+          <p:nvPr/>
+        </p:nvSpPr>
+        <p:spPr>
+          <a:xfrm>
+            <a:off x="4754880" y="1051560"/>
+            <a:ext cx="3840480" cy="54864"/>
+          </a:xfrm>
+          <a:prstGeom prst="rect">
+            <a:avLst/>
+          </a:prstGeom>
+          <a:solidFill>
+            <a:srgbClr val="E9C46A"/>
+          </a:solidFill>
+          <a:ln/>
+        </p:spPr>
+      </p:sp>
+      <p:sp>
+        <p:nvSpPr>
+          <p:cNvPr id="12" name="Text 10"/>
+          <p:cNvSpPr/>
+          <p:nvPr/>
+        </p:nvSpPr>
+        <p:spPr>
+          <a:xfrm>
+            <a:off x="4983480" y="1188720"/>
+            <a:ext cx="3383280" cy="457200"/>
           </a:xfrm>
           <a:prstGeom prst="rect">
             <a:avLst/>
@@ -2830,24 +3960,1299 @@
           <a:ln/>
         </p:spPr>
         <p:txBody>
-          <a:bodyPr wrap="square" rtlCol="0" anchor="ctr"/>
+          <a:bodyPr wrap="square" lIns="0" tIns="0" rIns="0" bIns="0" rtlCol="0" anchor="ctr"/>
           <a:lstStyle/>
           <a:p>
             <a:pPr indent="0" marL="0">
               <a:buNone/>
             </a:pPr>
             <a:r>
-              <a:rPr lang="en-US" sz="1100" dirty="0">
-                <a:solidFill>
-                  <a:srgbClr val="E9C46A"/>
+              <a:rPr lang="en-US" sz="1500" b="1" dirty="0">
+                <a:solidFill>
+                  <a:srgbClr val="1B2A4A"/>
+                </a:solidFill>
+                <a:latin typeface="Georgia" pitchFamily="34" charset="0"/>
+                <a:ea typeface="Georgia" pitchFamily="34" charset="-122"/>
+                <a:cs typeface="Georgia" pitchFamily="34" charset="-120"/>
+              </a:rPr>
+              <a:t>Boiling</a:t>
+            </a:r>
+            <a:endParaRPr lang="en-US" sz="1500" dirty="0"/>
+          </a:p>
+        </p:txBody>
+      </p:sp>
+      <p:sp>
+        <p:nvSpPr>
+          <p:cNvPr id="13" name="Text 11"/>
+          <p:cNvSpPr/>
+          <p:nvPr/>
+        </p:nvSpPr>
+        <p:spPr>
+          <a:xfrm>
+            <a:off x="4983480" y="1691640"/>
+            <a:ext cx="3383280" cy="2651760"/>
+          </a:xfrm>
+          <a:prstGeom prst="rect">
+            <a:avLst/>
+          </a:prstGeom>
+          <a:noFill/>
+          <a:ln/>
+        </p:spPr>
+        <p:txBody>
+          <a:bodyPr wrap="square" rtlCol="0" anchor="t"/>
+          <a:lstStyle/>
+          <a:p>
+            <a:pPr marL="342900" indent="-342900">
+              <a:spcAft>
+                <a:spcPts val="600"/>
+              </a:spcAft>
+              <a:buSzPct val="100000"/>
+              <a:buChar char="•"/>
+            </a:pPr>
+            <a:r>
+              <a:rPr lang="en-US" sz="1300" dirty="0">
+                <a:solidFill>
+                  <a:srgbClr val="3D3A36"/>
                 </a:solidFill>
                 <a:latin typeface="Calibri" pitchFamily="34" charset="0"/>
                 <a:ea typeface="Calibri" pitchFamily="34" charset="-122"/>
                 <a:cs typeface="Calibri" pitchFamily="34" charset="-120"/>
               </a:rPr>
+              <a:t>Happens THROUGHOUT the liquid</a:t>
+            </a:r>
+            <a:endParaRPr lang="en-US" sz="1300" dirty="0"/>
+          </a:p>
+          <a:p>
+            <a:pPr marL="342900" indent="-342900">
+              <a:spcAft>
+                <a:spcPts val="600"/>
+              </a:spcAft>
+              <a:buSzPct val="100000"/>
+              <a:buChar char="•"/>
+            </a:pPr>
+            <a:r>
+              <a:rPr lang="en-US" sz="1300" dirty="0">
+                <a:solidFill>
+                  <a:srgbClr val="3D3A36"/>
+                </a:solidFill>
+                <a:latin typeface="Calibri" pitchFamily="34" charset="0"/>
+                <a:ea typeface="Calibri" pitchFamily="34" charset="-122"/>
+                <a:cs typeface="Calibri" pitchFamily="34" charset="-120"/>
+              </a:rPr>
+              <a:t>Only at the BOILING POINT</a:t>
+            </a:r>
+            <a:endParaRPr lang="en-US" sz="1300" dirty="0"/>
+          </a:p>
+          <a:p>
+            <a:pPr marL="342900" indent="-342900">
+              <a:spcAft>
+                <a:spcPts val="600"/>
+              </a:spcAft>
+              <a:buSzPct val="100000"/>
+              <a:buChar char="•"/>
+            </a:pPr>
+            <a:r>
+              <a:rPr lang="en-US" sz="1300" dirty="0">
+                <a:solidFill>
+                  <a:srgbClr val="3D3A36"/>
+                </a:solidFill>
+                <a:latin typeface="Calibri" pitchFamily="34" charset="0"/>
+                <a:ea typeface="Calibri" pitchFamily="34" charset="-122"/>
+                <a:cs typeface="Calibri" pitchFamily="34" charset="-120"/>
+              </a:rPr>
+              <a:t>Fast, vigorous bubbles</a:t>
+            </a:r>
+            <a:endParaRPr lang="en-US" sz="1300" dirty="0"/>
+          </a:p>
+          <a:p>
+            <a:pPr marL="342900" indent="-342900">
+              <a:spcAft>
+                <a:spcPts val="600"/>
+              </a:spcAft>
+              <a:buSzPct val="100000"/>
+              <a:buChar char="•"/>
+            </a:pPr>
+            <a:r>
+              <a:rPr lang="en-US" sz="1300" dirty="0">
+                <a:solidFill>
+                  <a:srgbClr val="3D3A36"/>
+                </a:solidFill>
+                <a:latin typeface="Calibri" pitchFamily="34" charset="0"/>
+                <a:ea typeface="Calibri" pitchFamily="34" charset="-122"/>
+                <a:cs typeface="Calibri" pitchFamily="34" charset="-120"/>
+              </a:rPr>
+              <a:t>All particles have enough energy</a:t>
+            </a:r>
+            <a:endParaRPr lang="en-US" sz="1300" dirty="0"/>
+          </a:p>
+          <a:p>
+            <a:pPr marL="342900" indent="-342900">
+              <a:spcAft>
+                <a:spcPts val="600"/>
+              </a:spcAft>
+              <a:buSzPct val="100000"/>
+              <a:buChar char="•"/>
+            </a:pPr>
+            <a:r>
+              <a:rPr lang="en-US" sz="1300" dirty="0">
+                <a:solidFill>
+                  <a:srgbClr val="3D3A36"/>
+                </a:solidFill>
+                <a:latin typeface="Calibri" pitchFamily="34" charset="0"/>
+                <a:ea typeface="Calibri" pitchFamily="34" charset="-122"/>
+                <a:cs typeface="Calibri" pitchFamily="34" charset="-120"/>
+              </a:rPr>
+              <a:t>Example: kettle bubbling at 100°C</a:t>
+            </a:r>
+            <a:endParaRPr lang="en-US" sz="1300" dirty="0"/>
+          </a:p>
+        </p:txBody>
+      </p:sp>
+    </p:spTree>
+  </p:cSld>
+  <p:clrMapOvr>
+    <a:masterClrMapping/>
+  </p:clrMapOvr>
+</p:sld>
+</file>
+
+<file path=ppt/slides/slide6.xml><?xml version="1.0" encoding="utf-8"?>
+<p:sld xmlns:a="http://schemas.openxmlformats.org/drawingml/2006/main" xmlns:r="http://schemas.openxmlformats.org/officeDocument/2006/relationships" xmlns:p="http://schemas.openxmlformats.org/presentationml/2006/main">
+  <p:cSld name="Slide 6">
+    <p:bg>
+      <p:bgPr>
+        <a:solidFill>
+          <a:srgbClr val="FAF8F5"/>
+        </a:solidFill>
+      </p:bgPr>
+    </p:bg>
+    <p:spTree>
+      <p:nvGrpSpPr>
+        <p:cNvPr id="1" name=""/>
+        <p:cNvGrpSpPr/>
+        <p:nvPr/>
+      </p:nvGrpSpPr>
+      <p:grpSpPr>
+        <a:xfrm>
+          <a:off x="0" y="0"/>
+          <a:ext cx="0" cy="0"/>
+          <a:chOff x="0" y="0"/>
+          <a:chExt cx="0" cy="0"/>
+        </a:xfrm>
+      </p:grpSpPr>
+      <p:sp>
+        <p:nvSpPr>
+          <p:cNvPr id="2" name="Shape 0"/>
+          <p:cNvSpPr/>
+          <p:nvPr/>
+        </p:nvSpPr>
+        <p:spPr>
+          <a:xfrm>
+            <a:off x="0" y="0"/>
+            <a:ext cx="9144000" cy="822960"/>
+          </a:xfrm>
+          <a:prstGeom prst="rect">
+            <a:avLst/>
+          </a:prstGeom>
+          <a:solidFill>
+            <a:srgbClr val="FFFFFF"/>
+          </a:solidFill>
+          <a:ln/>
+        </p:spPr>
+      </p:sp>
+      <p:sp>
+        <p:nvSpPr>
+          <p:cNvPr id="3" name="Shape 1"/>
+          <p:cNvSpPr/>
+          <p:nvPr/>
+        </p:nvSpPr>
+        <p:spPr>
+          <a:xfrm>
+            <a:off x="0" y="804672"/>
+            <a:ext cx="9144000" cy="27432"/>
+          </a:xfrm>
+          <a:prstGeom prst="rect">
+            <a:avLst/>
+          </a:prstGeom>
+          <a:solidFill>
+            <a:srgbClr val="E5E2DC"/>
+          </a:solidFill>
+          <a:ln/>
+        </p:spPr>
+      </p:sp>
+      <p:sp>
+        <p:nvSpPr>
+          <p:cNvPr id="4" name="Shape 2"/>
+          <p:cNvSpPr/>
+          <p:nvPr/>
+        </p:nvSpPr>
+        <p:spPr>
+          <a:xfrm>
+            <a:off x="548640" y="201168"/>
+            <a:ext cx="54864" cy="420624"/>
+          </a:xfrm>
+          <a:prstGeom prst="rect">
+            <a:avLst/>
+          </a:prstGeom>
+          <a:solidFill>
+            <a:srgbClr val="2A9D8F"/>
+          </a:solidFill>
+          <a:ln/>
+        </p:spPr>
+      </p:sp>
+      <p:sp>
+        <p:nvSpPr>
+          <p:cNvPr id="5" name="Text 3"/>
+          <p:cNvSpPr/>
+          <p:nvPr/>
+        </p:nvSpPr>
+        <p:spPr>
+          <a:xfrm>
+            <a:off x="777240" y="137160"/>
+            <a:ext cx="7772400" cy="548640"/>
+          </a:xfrm>
+          <a:prstGeom prst="rect">
+            <a:avLst/>
+          </a:prstGeom>
+          <a:noFill/>
+          <a:ln/>
+        </p:spPr>
+        <p:txBody>
+          <a:bodyPr wrap="square" lIns="0" tIns="0" rIns="0" bIns="0" rtlCol="0" anchor="ctr"/>
+          <a:lstStyle/>
+          <a:p>
+            <a:pPr indent="0" marL="0">
+              <a:buNone/>
+            </a:pPr>
+            <a:r>
+              <a:rPr lang="en-US" sz="2000" b="1" dirty="0">
+                <a:solidFill>
+                  <a:srgbClr val="1B2A4A"/>
+                </a:solidFill>
+                <a:latin typeface="Georgia" pitchFamily="34" charset="0"/>
+                <a:ea typeface="Georgia" pitchFamily="34" charset="-122"/>
+                <a:cs typeface="Georgia" pitchFamily="34" charset="-120"/>
+              </a:rPr>
+              <a:t>Cooling Curve &amp; Heating Curve</a:t>
+            </a:r>
+            <a:endParaRPr lang="en-US" sz="2000" dirty="0"/>
+          </a:p>
+        </p:txBody>
+      </p:sp>
+      <p:sp>
+        <p:nvSpPr>
+          <p:cNvPr id="6" name="Text 4"/>
+          <p:cNvSpPr/>
+          <p:nvPr/>
+        </p:nvSpPr>
+        <p:spPr>
+          <a:xfrm>
+            <a:off x="731520" y="1051560"/>
+            <a:ext cx="7680960" cy="3108960"/>
+          </a:xfrm>
+          <a:prstGeom prst="rect">
+            <a:avLst/>
+          </a:prstGeom>
+          <a:noFill/>
+          <a:ln/>
+        </p:spPr>
+        <p:txBody>
+          <a:bodyPr wrap="square" rtlCol="0" anchor="t"/>
+          <a:lstStyle/>
+          <a:p>
+            <a:pPr marL="342900" indent="-342900">
+              <a:spcAft>
+                <a:spcPts val="800"/>
+              </a:spcAft>
+              <a:buSzPct val="100000"/>
+              <a:buChar char="•"/>
+            </a:pPr>
+            <a:r>
+              <a:rPr lang="en-US" sz="1500" dirty="0">
+                <a:solidFill>
+                  <a:srgbClr val="3D3A36"/>
+                </a:solidFill>
+                <a:latin typeface="Calibri" pitchFamily="34" charset="0"/>
+                <a:ea typeface="Calibri" pitchFamily="34" charset="-122"/>
+                <a:cs typeface="Calibri" pitchFamily="34" charset="-120"/>
+              </a:rPr>
+              <a:t>A heating curve shows temperature vs time as a substance is heated.</a:t>
+            </a:r>
+            <a:endParaRPr lang="en-US" sz="1500" dirty="0"/>
+          </a:p>
+          <a:p>
+            <a:pPr marL="342900" indent="-342900">
+              <a:spcAft>
+                <a:spcPts val="800"/>
+              </a:spcAft>
+              <a:buSzPct val="100000"/>
+              <a:buChar char="•"/>
+            </a:pPr>
+            <a:r>
+              <a:rPr lang="en-US" sz="1500" dirty="0">
+                <a:solidFill>
+                  <a:srgbClr val="3D3A36"/>
+                </a:solidFill>
+                <a:latin typeface="Calibri" pitchFamily="34" charset="0"/>
+                <a:ea typeface="Calibri" pitchFamily="34" charset="-122"/>
+                <a:cs typeface="Calibri" pitchFamily="34" charset="-120"/>
+              </a:rPr>
+              <a:t>FLAT sections = state change happening (temperature stays constant).</a:t>
+            </a:r>
+            <a:endParaRPr lang="en-US" sz="1500" dirty="0"/>
+          </a:p>
+          <a:p>
+            <a:pPr marL="342900" indent="-342900">
+              <a:spcAft>
+                <a:spcPts val="800"/>
+              </a:spcAft>
+              <a:buSzPct val="100000"/>
+              <a:buChar char="•"/>
+            </a:pPr>
+            <a:r>
+              <a:rPr lang="en-US" sz="1500" dirty="0">
+                <a:solidFill>
+                  <a:srgbClr val="3D3A36"/>
+                </a:solidFill>
+                <a:latin typeface="Calibri" pitchFamily="34" charset="0"/>
+                <a:ea typeface="Calibri" pitchFamily="34" charset="-122"/>
+                <a:cs typeface="Calibri" pitchFamily="34" charset="-120"/>
+              </a:rPr>
+              <a:t>RISING sections = substance getting hotter within one state.</a:t>
+            </a:r>
+            <a:endParaRPr lang="en-US" sz="1500" dirty="0"/>
+          </a:p>
+          <a:p>
+            <a:pPr marL="342900" indent="-342900">
+              <a:spcAft>
+                <a:spcPts val="800"/>
+              </a:spcAft>
+              <a:buSzPct val="100000"/>
+              <a:buChar char="•"/>
+            </a:pPr>
+            <a:r>
+              <a:rPr lang="en-US" sz="1500" dirty="0">
+                <a:solidFill>
+                  <a:srgbClr val="3D3A36"/>
+                </a:solidFill>
+                <a:latin typeface="Calibri" pitchFamily="34" charset="0"/>
+                <a:ea typeface="Calibri" pitchFamily="34" charset="-122"/>
+                <a:cs typeface="Calibri" pitchFamily="34" charset="-120"/>
+              </a:rPr>
+              <a:t>A cooling curve is the reverse — temperature drops with flat sections at state changes.</a:t>
+            </a:r>
+            <a:endParaRPr lang="en-US" sz="1500" dirty="0"/>
+          </a:p>
+          <a:p>
+            <a:pPr marL="342900" indent="-342900">
+              <a:spcAft>
+                <a:spcPts val="800"/>
+              </a:spcAft>
+              <a:buSzPct val="100000"/>
+              <a:buChar char="•"/>
+            </a:pPr>
+            <a:r>
+              <a:rPr lang="en-US" sz="1500" dirty="0">
+                <a:solidFill>
+                  <a:srgbClr val="3D3A36"/>
+                </a:solidFill>
+                <a:latin typeface="Calibri" pitchFamily="34" charset="0"/>
+                <a:ea typeface="Calibri" pitchFamily="34" charset="-122"/>
+                <a:cs typeface="Calibri" pitchFamily="34" charset="-120"/>
+              </a:rPr>
+              <a:t>The flat parts show that energy is being used to change state, NOT to change temperature.</a:t>
+            </a:r>
+            <a:endParaRPr lang="en-US" sz="1500" dirty="0"/>
+          </a:p>
+        </p:txBody>
+      </p:sp>
+    </p:spTree>
+  </p:cSld>
+  <p:clrMapOvr>
+    <a:masterClrMapping/>
+  </p:clrMapOvr>
+</p:sld>
+</file>
+
+<file path=ppt/slides/slide7.xml><?xml version="1.0" encoding="utf-8"?>
+<p:sld xmlns:a="http://schemas.openxmlformats.org/drawingml/2006/main" xmlns:r="http://schemas.openxmlformats.org/officeDocument/2006/relationships" xmlns:p="http://schemas.openxmlformats.org/presentationml/2006/main">
+  <p:cSld name="Slide 7">
+    <p:bg>
+      <p:bgPr>
+        <a:solidFill>
+          <a:srgbClr val="FAF8F5"/>
+        </a:solidFill>
+      </p:bgPr>
+    </p:bg>
+    <p:spTree>
+      <p:nvGrpSpPr>
+        <p:cNvPr id="1" name=""/>
+        <p:cNvGrpSpPr/>
+        <p:nvPr/>
+      </p:nvGrpSpPr>
+      <p:grpSpPr>
+        <a:xfrm>
+          <a:off x="0" y="0"/>
+          <a:ext cx="0" cy="0"/>
+          <a:chOff x="0" y="0"/>
+          <a:chExt cx="0" cy="0"/>
+        </a:xfrm>
+      </p:grpSpPr>
+      <p:sp>
+        <p:nvSpPr>
+          <p:cNvPr id="2" name="Shape 0"/>
+          <p:cNvSpPr/>
+          <p:nvPr/>
+        </p:nvSpPr>
+        <p:spPr>
+          <a:xfrm>
+            <a:off x="0" y="0"/>
+            <a:ext cx="9144000" cy="822960"/>
+          </a:xfrm>
+          <a:prstGeom prst="rect">
+            <a:avLst/>
+          </a:prstGeom>
+          <a:solidFill>
+            <a:srgbClr val="FFFFFF"/>
+          </a:solidFill>
+          <a:ln/>
+        </p:spPr>
+      </p:sp>
+      <p:sp>
+        <p:nvSpPr>
+          <p:cNvPr id="3" name="Shape 1"/>
+          <p:cNvSpPr/>
+          <p:nvPr/>
+        </p:nvSpPr>
+        <p:spPr>
+          <a:xfrm>
+            <a:off x="0" y="804672"/>
+            <a:ext cx="9144000" cy="27432"/>
+          </a:xfrm>
+          <a:prstGeom prst="rect">
+            <a:avLst/>
+          </a:prstGeom>
+          <a:solidFill>
+            <a:srgbClr val="E5E2DC"/>
+          </a:solidFill>
+          <a:ln/>
+        </p:spPr>
+      </p:sp>
+      <p:sp>
+        <p:nvSpPr>
+          <p:cNvPr id="4" name="Shape 2"/>
+          <p:cNvSpPr/>
+          <p:nvPr/>
+        </p:nvSpPr>
+        <p:spPr>
+          <a:xfrm>
+            <a:off x="548640" y="201168"/>
+            <a:ext cx="54864" cy="420624"/>
+          </a:xfrm>
+          <a:prstGeom prst="rect">
+            <a:avLst/>
+          </a:prstGeom>
+          <a:solidFill>
+            <a:srgbClr val="2A9D8F"/>
+          </a:solidFill>
+          <a:ln/>
+        </p:spPr>
+      </p:sp>
+      <p:sp>
+        <p:nvSpPr>
+          <p:cNvPr id="5" name="Text 3"/>
+          <p:cNvSpPr/>
+          <p:nvPr/>
+        </p:nvSpPr>
+        <p:spPr>
+          <a:xfrm>
+            <a:off x="777240" y="137160"/>
+            <a:ext cx="7772400" cy="548640"/>
+          </a:xfrm>
+          <a:prstGeom prst="rect">
+            <a:avLst/>
+          </a:prstGeom>
+          <a:noFill/>
+          <a:ln/>
+        </p:spPr>
+        <p:txBody>
+          <a:bodyPr wrap="square" lIns="0" tIns="0" rIns="0" bIns="0" rtlCol="0" anchor="ctr"/>
+          <a:lstStyle/>
+          <a:p>
+            <a:pPr indent="0" marL="0">
+              <a:buNone/>
+            </a:pPr>
+            <a:r>
+              <a:rPr lang="en-US" sz="2000" b="1" dirty="0">
+                <a:solidFill>
+                  <a:srgbClr val="1B2A4A"/>
+                </a:solidFill>
+                <a:latin typeface="Georgia" pitchFamily="34" charset="0"/>
+                <a:ea typeface="Georgia" pitchFamily="34" charset="-122"/>
+                <a:cs typeface="Georgia" pitchFamily="34" charset="-120"/>
+              </a:rPr>
+              <a:t>Check Your Understanding</a:t>
+            </a:r>
+            <a:endParaRPr lang="en-US" sz="2000" dirty="0"/>
+          </a:p>
+        </p:txBody>
+      </p:sp>
+      <p:sp>
+        <p:nvSpPr>
+          <p:cNvPr id="6" name="Shape 4"/>
+          <p:cNvSpPr/>
+          <p:nvPr/>
+        </p:nvSpPr>
+        <p:spPr>
+          <a:xfrm>
+            <a:off x="731520" y="1051560"/>
+            <a:ext cx="7680960" cy="438912"/>
+          </a:xfrm>
+          <a:prstGeom prst="rect">
+            <a:avLst/>
+          </a:prstGeom>
+          <a:solidFill>
+            <a:srgbClr val="FFFFFF"/>
+          </a:solidFill>
+          <a:ln/>
+        </p:spPr>
+      </p:sp>
+      <p:sp>
+        <p:nvSpPr>
+          <p:cNvPr id="7" name="Text 5"/>
+          <p:cNvSpPr/>
+          <p:nvPr/>
+        </p:nvSpPr>
+        <p:spPr>
+          <a:xfrm>
+            <a:off x="868680" y="1051560"/>
+            <a:ext cx="320040" cy="438912"/>
+          </a:xfrm>
+          <a:prstGeom prst="rect">
+            <a:avLst/>
+          </a:prstGeom>
+          <a:noFill/>
+          <a:ln/>
+        </p:spPr>
+        <p:txBody>
+          <a:bodyPr wrap="square" rtlCol="0" anchor="ctr"/>
+          <a:lstStyle/>
+          <a:p>
+            <a:pPr indent="0" marL="0">
+              <a:buNone/>
+            </a:pPr>
+            <a:r>
+              <a:rPr lang="en-US" sz="1400" dirty="0">
+                <a:solidFill>
+                  <a:srgbClr val="2A9D8F"/>
+                </a:solidFill>
+              </a:rPr>
+              <a:t>☐</a:t>
+            </a:r>
+            <a:endParaRPr lang="en-US" sz="1400" dirty="0"/>
+          </a:p>
+        </p:txBody>
+      </p:sp>
+      <p:sp>
+        <p:nvSpPr>
+          <p:cNvPr id="8" name="Text 6"/>
+          <p:cNvSpPr/>
+          <p:nvPr/>
+        </p:nvSpPr>
+        <p:spPr>
+          <a:xfrm>
+            <a:off x="1234440" y="1051560"/>
+            <a:ext cx="6949440" cy="438912"/>
+          </a:xfrm>
+          <a:prstGeom prst="rect">
+            <a:avLst/>
+          </a:prstGeom>
+          <a:noFill/>
+          <a:ln/>
+        </p:spPr>
+        <p:txBody>
+          <a:bodyPr wrap="square" rtlCol="0" anchor="ctr"/>
+          <a:lstStyle/>
+          <a:p>
+            <a:pPr indent="0" marL="0">
+              <a:buNone/>
+            </a:pPr>
+            <a:r>
+              <a:rPr lang="en-US" sz="1300" dirty="0">
+                <a:solidFill>
+                  <a:srgbClr val="3D3A36"/>
+                </a:solidFill>
+                <a:latin typeface="Calibri" pitchFamily="34" charset="0"/>
+                <a:ea typeface="Calibri" pitchFamily="34" charset="-122"/>
+                <a:cs typeface="Calibri" pitchFamily="34" charset="-120"/>
+              </a:rPr>
+              <a:t>I can name all 6 changes of state</a:t>
+            </a:r>
+            <a:endParaRPr lang="en-US" sz="1300" dirty="0"/>
+          </a:p>
+        </p:txBody>
+      </p:sp>
+      <p:sp>
+        <p:nvSpPr>
+          <p:cNvPr id="9" name="Shape 7"/>
+          <p:cNvSpPr/>
+          <p:nvPr/>
+        </p:nvSpPr>
+        <p:spPr>
+          <a:xfrm>
+            <a:off x="731520" y="1554480"/>
+            <a:ext cx="7680960" cy="438912"/>
+          </a:xfrm>
+          <a:prstGeom prst="rect">
+            <a:avLst/>
+          </a:prstGeom>
+          <a:solidFill>
+            <a:srgbClr val="F8F6F3"/>
+          </a:solidFill>
+          <a:ln/>
+        </p:spPr>
+      </p:sp>
+      <p:sp>
+        <p:nvSpPr>
+          <p:cNvPr id="10" name="Text 8"/>
+          <p:cNvSpPr/>
+          <p:nvPr/>
+        </p:nvSpPr>
+        <p:spPr>
+          <a:xfrm>
+            <a:off x="868680" y="1554480"/>
+            <a:ext cx="320040" cy="438912"/>
+          </a:xfrm>
+          <a:prstGeom prst="rect">
+            <a:avLst/>
+          </a:prstGeom>
+          <a:noFill/>
+          <a:ln/>
+        </p:spPr>
+        <p:txBody>
+          <a:bodyPr wrap="square" rtlCol="0" anchor="ctr"/>
+          <a:lstStyle/>
+          <a:p>
+            <a:pPr indent="0" marL="0">
+              <a:buNone/>
+            </a:pPr>
+            <a:r>
+              <a:rPr lang="en-US" sz="1400" dirty="0">
+                <a:solidFill>
+                  <a:srgbClr val="2A9D8F"/>
+                </a:solidFill>
+              </a:rPr>
+              <a:t>☐</a:t>
+            </a:r>
+            <a:endParaRPr lang="en-US" sz="1400" dirty="0"/>
+          </a:p>
+        </p:txBody>
+      </p:sp>
+      <p:sp>
+        <p:nvSpPr>
+          <p:cNvPr id="11" name="Text 9"/>
+          <p:cNvSpPr/>
+          <p:nvPr/>
+        </p:nvSpPr>
+        <p:spPr>
+          <a:xfrm>
+            <a:off x="1234440" y="1554480"/>
+            <a:ext cx="6949440" cy="438912"/>
+          </a:xfrm>
+          <a:prstGeom prst="rect">
+            <a:avLst/>
+          </a:prstGeom>
+          <a:noFill/>
+          <a:ln/>
+        </p:spPr>
+        <p:txBody>
+          <a:bodyPr wrap="square" rtlCol="0" anchor="ctr"/>
+          <a:lstStyle/>
+          <a:p>
+            <a:pPr indent="0" marL="0">
+              <a:buNone/>
+            </a:pPr>
+            <a:r>
+              <a:rPr lang="en-US" sz="1300" dirty="0">
+                <a:solidFill>
+                  <a:srgbClr val="3D3A36"/>
+                </a:solidFill>
+                <a:latin typeface="Calibri" pitchFamily="34" charset="0"/>
+                <a:ea typeface="Calibri" pitchFamily="34" charset="-122"/>
+                <a:cs typeface="Calibri" pitchFamily="34" charset="-120"/>
+              </a:rPr>
+              <a:t>I know that temperature stays constant during a state change</a:t>
+            </a:r>
+            <a:endParaRPr lang="en-US" sz="1300" dirty="0"/>
+          </a:p>
+        </p:txBody>
+      </p:sp>
+      <p:sp>
+        <p:nvSpPr>
+          <p:cNvPr id="12" name="Shape 10"/>
+          <p:cNvSpPr/>
+          <p:nvPr/>
+        </p:nvSpPr>
+        <p:spPr>
+          <a:xfrm>
+            <a:off x="731520" y="2057400"/>
+            <a:ext cx="7680960" cy="438912"/>
+          </a:xfrm>
+          <a:prstGeom prst="rect">
+            <a:avLst/>
+          </a:prstGeom>
+          <a:solidFill>
+            <a:srgbClr val="FFFFFF"/>
+          </a:solidFill>
+          <a:ln/>
+        </p:spPr>
+      </p:sp>
+      <p:sp>
+        <p:nvSpPr>
+          <p:cNvPr id="13" name="Text 11"/>
+          <p:cNvSpPr/>
+          <p:nvPr/>
+        </p:nvSpPr>
+        <p:spPr>
+          <a:xfrm>
+            <a:off x="868680" y="2057400"/>
+            <a:ext cx="320040" cy="438912"/>
+          </a:xfrm>
+          <a:prstGeom prst="rect">
+            <a:avLst/>
+          </a:prstGeom>
+          <a:noFill/>
+          <a:ln/>
+        </p:spPr>
+        <p:txBody>
+          <a:bodyPr wrap="square" rtlCol="0" anchor="ctr"/>
+          <a:lstStyle/>
+          <a:p>
+            <a:pPr indent="0" marL="0">
+              <a:buNone/>
+            </a:pPr>
+            <a:r>
+              <a:rPr lang="en-US" sz="1400" dirty="0">
+                <a:solidFill>
+                  <a:srgbClr val="2A9D8F"/>
+                </a:solidFill>
+              </a:rPr>
+              <a:t>☐</a:t>
+            </a:r>
+            <a:endParaRPr lang="en-US" sz="1400" dirty="0"/>
+          </a:p>
+        </p:txBody>
+      </p:sp>
+      <p:sp>
+        <p:nvSpPr>
+          <p:cNvPr id="14" name="Text 12"/>
+          <p:cNvSpPr/>
+          <p:nvPr/>
+        </p:nvSpPr>
+        <p:spPr>
+          <a:xfrm>
+            <a:off x="1234440" y="2057400"/>
+            <a:ext cx="6949440" cy="438912"/>
+          </a:xfrm>
+          <a:prstGeom prst="rect">
+            <a:avLst/>
+          </a:prstGeom>
+          <a:noFill/>
+          <a:ln/>
+        </p:spPr>
+        <p:txBody>
+          <a:bodyPr wrap="square" rtlCol="0" anchor="ctr"/>
+          <a:lstStyle/>
+          <a:p>
+            <a:pPr indent="0" marL="0">
+              <a:buNone/>
+            </a:pPr>
+            <a:r>
+              <a:rPr lang="en-US" sz="1300" dirty="0">
+                <a:solidFill>
+                  <a:srgbClr val="3D3A36"/>
+                </a:solidFill>
+                <a:latin typeface="Calibri" pitchFamily="34" charset="0"/>
+                <a:ea typeface="Calibri" pitchFamily="34" charset="-122"/>
+                <a:cs typeface="Calibri" pitchFamily="34" charset="-120"/>
+              </a:rPr>
+              <a:t>I can explain the difference between evaporation and boiling</a:t>
+            </a:r>
+            <a:endParaRPr lang="en-US" sz="1300" dirty="0"/>
+          </a:p>
+        </p:txBody>
+      </p:sp>
+      <p:sp>
+        <p:nvSpPr>
+          <p:cNvPr id="15" name="Shape 13"/>
+          <p:cNvSpPr/>
+          <p:nvPr/>
+        </p:nvSpPr>
+        <p:spPr>
+          <a:xfrm>
+            <a:off x="731520" y="2560320"/>
+            <a:ext cx="7680960" cy="438912"/>
+          </a:xfrm>
+          <a:prstGeom prst="rect">
+            <a:avLst/>
+          </a:prstGeom>
+          <a:solidFill>
+            <a:srgbClr val="F8F6F3"/>
+          </a:solidFill>
+          <a:ln/>
+        </p:spPr>
+      </p:sp>
+      <p:sp>
+        <p:nvSpPr>
+          <p:cNvPr id="16" name="Text 14"/>
+          <p:cNvSpPr/>
+          <p:nvPr/>
+        </p:nvSpPr>
+        <p:spPr>
+          <a:xfrm>
+            <a:off x="868680" y="2560320"/>
+            <a:ext cx="320040" cy="438912"/>
+          </a:xfrm>
+          <a:prstGeom prst="rect">
+            <a:avLst/>
+          </a:prstGeom>
+          <a:noFill/>
+          <a:ln/>
+        </p:spPr>
+        <p:txBody>
+          <a:bodyPr wrap="square" rtlCol="0" anchor="ctr"/>
+          <a:lstStyle/>
+          <a:p>
+            <a:pPr indent="0" marL="0">
+              <a:buNone/>
+            </a:pPr>
+            <a:r>
+              <a:rPr lang="en-US" sz="1400" dirty="0">
+                <a:solidFill>
+                  <a:srgbClr val="2A9D8F"/>
+                </a:solidFill>
+              </a:rPr>
+              <a:t>☐</a:t>
+            </a:r>
+            <a:endParaRPr lang="en-US" sz="1400" dirty="0"/>
+          </a:p>
+        </p:txBody>
+      </p:sp>
+      <p:sp>
+        <p:nvSpPr>
+          <p:cNvPr id="17" name="Text 15"/>
+          <p:cNvSpPr/>
+          <p:nvPr/>
+        </p:nvSpPr>
+        <p:spPr>
+          <a:xfrm>
+            <a:off x="1234440" y="2560320"/>
+            <a:ext cx="6949440" cy="438912"/>
+          </a:xfrm>
+          <a:prstGeom prst="rect">
+            <a:avLst/>
+          </a:prstGeom>
+          <a:noFill/>
+          <a:ln/>
+        </p:spPr>
+        <p:txBody>
+          <a:bodyPr wrap="square" rtlCol="0" anchor="ctr"/>
+          <a:lstStyle/>
+          <a:p>
+            <a:pPr indent="0" marL="0">
+              <a:buNone/>
+            </a:pPr>
+            <a:r>
+              <a:rPr lang="en-US" sz="1300" dirty="0">
+                <a:solidFill>
+                  <a:srgbClr val="3D3A36"/>
+                </a:solidFill>
+                <a:latin typeface="Calibri" pitchFamily="34" charset="0"/>
+                <a:ea typeface="Calibri" pitchFamily="34" charset="-122"/>
+                <a:cs typeface="Calibri" pitchFamily="34" charset="-120"/>
+              </a:rPr>
+              <a:t>I can read and interpret a heating/cooling curve</a:t>
+            </a:r>
+            <a:endParaRPr lang="en-US" sz="1300" dirty="0"/>
+          </a:p>
+        </p:txBody>
+      </p:sp>
+      <p:sp>
+        <p:nvSpPr>
+          <p:cNvPr id="18" name="Shape 16"/>
+          <p:cNvSpPr/>
+          <p:nvPr/>
+        </p:nvSpPr>
+        <p:spPr>
+          <a:xfrm>
+            <a:off x="731520" y="3063240"/>
+            <a:ext cx="7680960" cy="438912"/>
+          </a:xfrm>
+          <a:prstGeom prst="rect">
+            <a:avLst/>
+          </a:prstGeom>
+          <a:solidFill>
+            <a:srgbClr val="FFFFFF"/>
+          </a:solidFill>
+          <a:ln/>
+        </p:spPr>
+      </p:sp>
+      <p:sp>
+        <p:nvSpPr>
+          <p:cNvPr id="19" name="Text 17"/>
+          <p:cNvSpPr/>
+          <p:nvPr/>
+        </p:nvSpPr>
+        <p:spPr>
+          <a:xfrm>
+            <a:off x="868680" y="3063240"/>
+            <a:ext cx="320040" cy="438912"/>
+          </a:xfrm>
+          <a:prstGeom prst="rect">
+            <a:avLst/>
+          </a:prstGeom>
+          <a:noFill/>
+          <a:ln/>
+        </p:spPr>
+        <p:txBody>
+          <a:bodyPr wrap="square" rtlCol="0" anchor="ctr"/>
+          <a:lstStyle/>
+          <a:p>
+            <a:pPr indent="0" marL="0">
+              <a:buNone/>
+            </a:pPr>
+            <a:r>
+              <a:rPr lang="en-US" sz="1400" dirty="0">
+                <a:solidFill>
+                  <a:srgbClr val="2A9D8F"/>
+                </a:solidFill>
+              </a:rPr>
+              <a:t>☐</a:t>
+            </a:r>
+            <a:endParaRPr lang="en-US" sz="1400" dirty="0"/>
+          </a:p>
+        </p:txBody>
+      </p:sp>
+      <p:sp>
+        <p:nvSpPr>
+          <p:cNvPr id="20" name="Text 18"/>
+          <p:cNvSpPr/>
+          <p:nvPr/>
+        </p:nvSpPr>
+        <p:spPr>
+          <a:xfrm>
+            <a:off x="1234440" y="3063240"/>
+            <a:ext cx="6949440" cy="438912"/>
+          </a:xfrm>
+          <a:prstGeom prst="rect">
+            <a:avLst/>
+          </a:prstGeom>
+          <a:noFill/>
+          <a:ln/>
+        </p:spPr>
+        <p:txBody>
+          <a:bodyPr wrap="square" rtlCol="0" anchor="ctr"/>
+          <a:lstStyle/>
+          <a:p>
+            <a:pPr indent="0" marL="0">
+              <a:buNone/>
+            </a:pPr>
+            <a:r>
+              <a:rPr lang="en-US" sz="1300" dirty="0">
+                <a:solidFill>
+                  <a:srgbClr val="3D3A36"/>
+                </a:solidFill>
+                <a:latin typeface="Calibri" pitchFamily="34" charset="0"/>
+                <a:ea typeface="Calibri" pitchFamily="34" charset="-122"/>
+                <a:cs typeface="Calibri" pitchFamily="34" charset="-120"/>
+              </a:rPr>
+              <a:t>I can explain state changes using the particle model</a:t>
+            </a:r>
+            <a:endParaRPr lang="en-US" sz="1300" dirty="0"/>
+          </a:p>
+        </p:txBody>
+      </p:sp>
+      <p:sp>
+        <p:nvSpPr>
+          <p:cNvPr id="21" name="Shape 19"/>
+          <p:cNvSpPr/>
+          <p:nvPr/>
+        </p:nvSpPr>
+        <p:spPr>
+          <a:xfrm>
+            <a:off x="731520" y="3749040"/>
+            <a:ext cx="7680960" cy="594360"/>
+          </a:xfrm>
+          <a:prstGeom prst="rect">
+            <a:avLst/>
+          </a:prstGeom>
+          <a:solidFill>
+            <a:srgbClr val="E8F5F3"/>
+          </a:solidFill>
+          <a:ln/>
+          <a:effectLst>
+            <a:outerShdw sx="100000" sy="100000" kx="0" ky="0" algn="bl" rotWithShape="0" blurRad="50800" dist="25400" dir="8100000">
+              <a:srgbClr val="000000">
+                <a:alpha val="10000"/>
+              </a:srgbClr>
+            </a:outerShdw>
+          </a:effectLst>
+        </p:spPr>
+      </p:sp>
+      <p:sp>
+        <p:nvSpPr>
+          <p:cNvPr id="22" name="Text 20"/>
+          <p:cNvSpPr/>
+          <p:nvPr/>
+        </p:nvSpPr>
+        <p:spPr>
+          <a:xfrm>
+            <a:off x="914400" y="3749040"/>
+            <a:ext cx="7315200" cy="594360"/>
+          </a:xfrm>
+          <a:prstGeom prst="rect">
+            <a:avLst/>
+          </a:prstGeom>
+          <a:noFill/>
+          <a:ln/>
+        </p:spPr>
+        <p:txBody>
+          <a:bodyPr wrap="square" rtlCol="0" anchor="ctr"/>
+          <a:lstStyle/>
+          <a:p>
+            <a:pPr indent="0" marL="0">
+              <a:buNone/>
+            </a:pPr>
+            <a:r>
+              <a:rPr lang="en-US" sz="1200" b="1" dirty="0">
+                <a:solidFill>
+                  <a:srgbClr val="2A9D8F"/>
+                </a:solidFill>
+                <a:latin typeface="Calibri" pitchFamily="34" charset="0"/>
+                <a:ea typeface="Calibri" pitchFamily="34" charset="-122"/>
+                <a:cs typeface="Calibri" pitchFamily="34" charset="-120"/>
+              </a:rPr>
+              <a:t>Key Idea: </a:t>
+            </a:r>
+            <a:pPr indent="0" marL="0">
+              <a:buNone/>
+            </a:pPr>
+            <a:r>
+              <a:rPr lang="en-US" sz="1200" i="1" dirty="0">
+                <a:solidFill>
+                  <a:srgbClr val="3D3A36"/>
+                </a:solidFill>
+                <a:latin typeface="Calibri" pitchFamily="34" charset="0"/>
+                <a:ea typeface="Calibri" pitchFamily="34" charset="-122"/>
+                <a:cs typeface="Calibri" pitchFamily="34" charset="-120"/>
+              </a:rPr>
+              <a:t>State changes are PHYSICAL changes — no new substances are made.</a:t>
+            </a:r>
+            <a:endParaRPr lang="en-US" sz="1200" dirty="0"/>
+          </a:p>
+        </p:txBody>
+      </p:sp>
+    </p:spTree>
+  </p:cSld>
+  <p:clrMapOvr>
+    <a:masterClrMapping/>
+  </p:clrMapOvr>
+</p:sld>
+</file>
+
+<file path=ppt/slides/slide8.xml><?xml version="1.0" encoding="utf-8"?>
+<p:sld xmlns:a="http://schemas.openxmlformats.org/drawingml/2006/main" xmlns:r="http://schemas.openxmlformats.org/officeDocument/2006/relationships" xmlns:p="http://schemas.openxmlformats.org/presentationml/2006/main">
+  <p:cSld name="Slide 8">
+    <p:spTree>
+      <p:nvGrpSpPr>
+        <p:cNvPr id="1" name=""/>
+        <p:cNvGrpSpPr/>
+        <p:nvPr/>
+      </p:nvGrpSpPr>
+      <p:grpSpPr>
+        <a:xfrm>
+          <a:off x="0" y="0"/>
+          <a:ext cx="0" cy="0"/>
+          <a:chOff x="0" y="0"/>
+          <a:chExt cx="0" cy="0"/>
+        </a:xfrm>
+      </p:grpSpPr>
+      <p:sp>
+        <p:nvSpPr>
+          <p:cNvPr id="2" name="Shape 0"/>
+          <p:cNvSpPr/>
+          <p:nvPr/>
+        </p:nvSpPr>
+        <p:spPr>
+          <a:xfrm>
+            <a:off x="0" y="0"/>
+            <a:ext cx="9144000" cy="5143500"/>
+          </a:xfrm>
+          <a:prstGeom prst="rect">
+            <a:avLst/>
+          </a:prstGeom>
+          <a:solidFill>
+            <a:srgbClr val="1B2A4A"/>
+          </a:solidFill>
+          <a:ln/>
+        </p:spPr>
+      </p:sp>
+      <p:sp>
+        <p:nvSpPr>
+          <p:cNvPr id="3" name="Shape 1"/>
+          <p:cNvSpPr/>
+          <p:nvPr/>
+        </p:nvSpPr>
+        <p:spPr>
+          <a:xfrm>
+            <a:off x="0" y="4777740"/>
+            <a:ext cx="9144000" cy="365760"/>
+          </a:xfrm>
+          <a:prstGeom prst="rect">
+            <a:avLst/>
+          </a:prstGeom>
+          <a:solidFill>
+            <a:srgbClr val="2A9D8F"/>
+          </a:solidFill>
+          <a:ln/>
+        </p:spPr>
+      </p:sp>
+      <p:sp>
+        <p:nvSpPr>
+          <p:cNvPr id="4" name="Shape 2"/>
+          <p:cNvSpPr/>
+          <p:nvPr/>
+        </p:nvSpPr>
+        <p:spPr>
+          <a:xfrm>
+            <a:off x="-914400" y="-914400"/>
+            <a:ext cx="3657600" cy="3657600"/>
+          </a:xfrm>
+          <a:prstGeom prst="ellipse">
+            <a:avLst/>
+          </a:prstGeom>
+          <a:solidFill>
+            <a:srgbClr val="2A9D8F">
+              <a:alpha val="10000"/>
+            </a:srgbClr>
+          </a:solidFill>
+          <a:ln/>
+        </p:spPr>
+      </p:sp>
+      <p:sp>
+        <p:nvSpPr>
+          <p:cNvPr id="5" name="Text 3"/>
+          <p:cNvSpPr/>
+          <p:nvPr/>
+        </p:nvSpPr>
+        <p:spPr>
+          <a:xfrm>
+            <a:off x="731520" y="1463040"/>
+            <a:ext cx="7680960" cy="822960"/>
+          </a:xfrm>
+          <a:prstGeom prst="rect">
+            <a:avLst/>
+          </a:prstGeom>
+          <a:noFill/>
+          <a:ln/>
+        </p:spPr>
+        <p:txBody>
+          <a:bodyPr wrap="square" rtlCol="0" anchor="ctr"/>
+          <a:lstStyle/>
+          <a:p>
+            <a:pPr algn="ctr" indent="0" marL="0">
+              <a:buNone/>
+            </a:pPr>
+            <a:r>
+              <a:rPr lang="en-US" sz="3400" b="1" dirty="0">
+                <a:solidFill>
+                  <a:srgbClr val="FFFFFF"/>
+                </a:solidFill>
+                <a:latin typeface="Georgia" pitchFamily="34" charset="0"/>
+                <a:ea typeface="Georgia" pitchFamily="34" charset="-122"/>
+                <a:cs typeface="Georgia" pitchFamily="34" charset="-120"/>
+              </a:rPr>
+              <a:t>Review &amp; Practise</a:t>
+            </a:r>
+            <a:endParaRPr lang="en-US" sz="3400" dirty="0"/>
+          </a:p>
+        </p:txBody>
+      </p:sp>
+      <p:sp>
+        <p:nvSpPr>
+          <p:cNvPr id="6" name="Text 4"/>
+          <p:cNvSpPr/>
+          <p:nvPr/>
+        </p:nvSpPr>
+        <p:spPr>
+          <a:xfrm>
+            <a:off x="731520" y="2468880"/>
+            <a:ext cx="7680960" cy="457200"/>
+          </a:xfrm>
+          <a:prstGeom prst="rect">
+            <a:avLst/>
+          </a:prstGeom>
+          <a:noFill/>
+          <a:ln/>
+        </p:spPr>
+        <p:txBody>
+          <a:bodyPr wrap="square" rtlCol="0" anchor="ctr"/>
+          <a:lstStyle/>
+          <a:p>
+            <a:pPr algn="ctr" indent="0" marL="0">
+              <a:buNone/>
+            </a:pPr>
+            <a:r>
+              <a:rPr lang="en-US" sz="1800" dirty="0">
+                <a:solidFill>
+                  <a:srgbClr val="2A9D8F"/>
+                </a:solidFill>
+                <a:latin typeface="Calibri" pitchFamily="34" charset="0"/>
+                <a:ea typeface="Calibri" pitchFamily="34" charset="-122"/>
+                <a:cs typeface="Calibri" pitchFamily="34" charset="-120"/>
+              </a:rPr>
               <a:t>mrzocchi.com</a:t>
             </a:r>
-            <a:endParaRPr lang="en-US" sz="1100" dirty="0"/>
+            <a:endParaRPr lang="en-US" sz="1800" dirty="0"/>
+          </a:p>
+        </p:txBody>
+      </p:sp>
+      <p:sp>
+        <p:nvSpPr>
+          <p:cNvPr id="7" name="Text 5"/>
+          <p:cNvSpPr/>
+          <p:nvPr/>
+        </p:nvSpPr>
+        <p:spPr>
+          <a:xfrm>
+            <a:off x="731520" y="3108960"/>
+            <a:ext cx="7680960" cy="457200"/>
+          </a:xfrm>
+          <a:prstGeom prst="rect">
+            <a:avLst/>
+          </a:prstGeom>
+          <a:noFill/>
+          <a:ln/>
+        </p:spPr>
+        <p:txBody>
+          <a:bodyPr wrap="square" rtlCol="0" anchor="ctr"/>
+          <a:lstStyle/>
+          <a:p>
+            <a:pPr algn="ctr" indent="0" marL="0">
+              <a:buNone/>
+            </a:pPr>
+            <a:r>
+              <a:rPr lang="en-US" sz="1300" dirty="0">
+                <a:solidFill>
+                  <a:srgbClr val="9B9690"/>
+                </a:solidFill>
+                <a:latin typeface="Calibri" pitchFamily="34" charset="0"/>
+                <a:ea typeface="Calibri" pitchFamily="34" charset="-122"/>
+                <a:cs typeface="Calibri" pitchFamily="34" charset="-120"/>
+              </a:rPr>
+              <a:t>Use the Self-Quiz, Review Games, and Practice Builder to test yourself.</a:t>
+            </a:r>
+            <a:endParaRPr lang="en-US" sz="1300" dirty="0"/>
           </a:p>
         </p:txBody>
       </p:sp>
